--- a/ゲーム科1年/00_前期/ゲームプログラミングⅢ/ゲーム数学/実習/12_当たり判定解説.pptx
+++ b/ゲーム科1年/00_前期/ゲームプログラミングⅢ/ゲーム数学/実習/12_当たり判定解説.pptx
@@ -7,14 +7,20 @@
   <p:sldIdLst>
     <p:sldId id="256" r:id="rId2"/>
     <p:sldId id="257" r:id="rId3"/>
-    <p:sldId id="258" r:id="rId4"/>
-    <p:sldId id="259" r:id="rId5"/>
-    <p:sldId id="260" r:id="rId6"/>
-    <p:sldId id="261" r:id="rId7"/>
-    <p:sldId id="262" r:id="rId8"/>
-    <p:sldId id="263" r:id="rId9"/>
+    <p:sldId id="261" r:id="rId4"/>
+    <p:sldId id="262" r:id="rId5"/>
+    <p:sldId id="258" r:id="rId6"/>
+    <p:sldId id="259" r:id="rId7"/>
+    <p:sldId id="263" r:id="rId8"/>
+    <p:sldId id="260" r:id="rId9"/>
     <p:sldId id="264" r:id="rId10"/>
     <p:sldId id="265" r:id="rId11"/>
+    <p:sldId id="266" r:id="rId12"/>
+    <p:sldId id="267" r:id="rId13"/>
+    <p:sldId id="270" r:id="rId14"/>
+    <p:sldId id="269" r:id="rId15"/>
+    <p:sldId id="271" r:id="rId16"/>
+    <p:sldId id="272" r:id="rId17"/>
   </p:sldIdLst>
   <p:sldSz cx="12192000" cy="6858000"/>
   <p:notesSz cx="6858000" cy="9144000"/>
@@ -268,7 +274,7 @@
           <a:p>
             <a:fld id="{E9CC885B-4903-4D54-9A93-00025F12DED9}" type="datetimeFigureOut">
               <a:rPr kumimoji="1" lang="ja-JP" altLang="en-US" smtClean="0"/>
-              <a:t>2025/1/6</a:t>
+              <a:t>2026/2/24</a:t>
             </a:fld>
             <a:endParaRPr kumimoji="1" lang="ja-JP" altLang="en-US"/>
           </a:p>
@@ -498,7 +504,7 @@
           <a:p>
             <a:fld id="{E9CC885B-4903-4D54-9A93-00025F12DED9}" type="datetimeFigureOut">
               <a:rPr kumimoji="1" lang="ja-JP" altLang="en-US" smtClean="0"/>
-              <a:t>2025/1/6</a:t>
+              <a:t>2026/2/24</a:t>
             </a:fld>
             <a:endParaRPr kumimoji="1" lang="ja-JP" altLang="en-US"/>
           </a:p>
@@ -738,7 +744,7 @@
           <a:p>
             <a:fld id="{E9CC885B-4903-4D54-9A93-00025F12DED9}" type="datetimeFigureOut">
               <a:rPr kumimoji="1" lang="ja-JP" altLang="en-US" smtClean="0"/>
-              <a:t>2025/1/6</a:t>
+              <a:t>2026/2/24</a:t>
             </a:fld>
             <a:endParaRPr kumimoji="1" lang="ja-JP" altLang="en-US"/>
           </a:p>
@@ -968,7 +974,7 @@
           <a:p>
             <a:fld id="{E9CC885B-4903-4D54-9A93-00025F12DED9}" type="datetimeFigureOut">
               <a:rPr kumimoji="1" lang="ja-JP" altLang="en-US" smtClean="0"/>
-              <a:t>2025/1/6</a:t>
+              <a:t>2026/2/24</a:t>
             </a:fld>
             <a:endParaRPr kumimoji="1" lang="ja-JP" altLang="en-US"/>
           </a:p>
@@ -1243,7 +1249,7 @@
           <a:p>
             <a:fld id="{E9CC885B-4903-4D54-9A93-00025F12DED9}" type="datetimeFigureOut">
               <a:rPr kumimoji="1" lang="ja-JP" altLang="en-US" smtClean="0"/>
-              <a:t>2025/1/6</a:t>
+              <a:t>2026/2/24</a:t>
             </a:fld>
             <a:endParaRPr kumimoji="1" lang="ja-JP" altLang="en-US"/>
           </a:p>
@@ -1572,7 +1578,7 @@
           <a:p>
             <a:fld id="{E9CC885B-4903-4D54-9A93-00025F12DED9}" type="datetimeFigureOut">
               <a:rPr kumimoji="1" lang="ja-JP" altLang="en-US" smtClean="0"/>
-              <a:t>2025/1/6</a:t>
+              <a:t>2026/2/24</a:t>
             </a:fld>
             <a:endParaRPr kumimoji="1" lang="ja-JP" altLang="en-US"/>
           </a:p>
@@ -2048,7 +2054,7 @@
           <a:p>
             <a:fld id="{E9CC885B-4903-4D54-9A93-00025F12DED9}" type="datetimeFigureOut">
               <a:rPr kumimoji="1" lang="ja-JP" altLang="en-US" smtClean="0"/>
-              <a:t>2025/1/6</a:t>
+              <a:t>2026/2/24</a:t>
             </a:fld>
             <a:endParaRPr kumimoji="1" lang="ja-JP" altLang="en-US"/>
           </a:p>
@@ -2189,7 +2195,7 @@
           <a:p>
             <a:fld id="{E9CC885B-4903-4D54-9A93-00025F12DED9}" type="datetimeFigureOut">
               <a:rPr kumimoji="1" lang="ja-JP" altLang="en-US" smtClean="0"/>
-              <a:t>2025/1/6</a:t>
+              <a:t>2026/2/24</a:t>
             </a:fld>
             <a:endParaRPr kumimoji="1" lang="ja-JP" altLang="en-US"/>
           </a:p>
@@ -2302,7 +2308,7 @@
           <a:p>
             <a:fld id="{E9CC885B-4903-4D54-9A93-00025F12DED9}" type="datetimeFigureOut">
               <a:rPr kumimoji="1" lang="ja-JP" altLang="en-US" smtClean="0"/>
-              <a:t>2025/1/6</a:t>
+              <a:t>2026/2/24</a:t>
             </a:fld>
             <a:endParaRPr kumimoji="1" lang="ja-JP" altLang="en-US"/>
           </a:p>
@@ -2645,7 +2651,7 @@
           <a:p>
             <a:fld id="{E9CC885B-4903-4D54-9A93-00025F12DED9}" type="datetimeFigureOut">
               <a:rPr kumimoji="1" lang="ja-JP" altLang="en-US" smtClean="0"/>
-              <a:t>2025/1/6</a:t>
+              <a:t>2026/2/24</a:t>
             </a:fld>
             <a:endParaRPr kumimoji="1" lang="ja-JP" altLang="en-US"/>
           </a:p>
@@ -2933,7 +2939,7 @@
           <a:p>
             <a:fld id="{E9CC885B-4903-4D54-9A93-00025F12DED9}" type="datetimeFigureOut">
               <a:rPr kumimoji="1" lang="ja-JP" altLang="en-US" smtClean="0"/>
-              <a:t>2025/1/6</a:t>
+              <a:t>2026/2/24</a:t>
             </a:fld>
             <a:endParaRPr kumimoji="1" lang="ja-JP" altLang="en-US"/>
           </a:p>
@@ -3206,7 +3212,7 @@
           <a:p>
             <a:fld id="{E9CC885B-4903-4D54-9A93-00025F12DED9}" type="datetimeFigureOut">
               <a:rPr kumimoji="1" lang="ja-JP" altLang="en-US" smtClean="0"/>
-              <a:t>2025/1/6</a:t>
+              <a:t>2026/2/24</a:t>
             </a:fld>
             <a:endParaRPr kumimoji="1" lang="ja-JP" altLang="en-US"/>
           </a:p>
@@ -3638,7 +3644,7 @@
         <p:spPr>
           <a:xfrm>
             <a:off x="567542" y="491954"/>
-            <a:ext cx="5519460" cy="584775"/>
+            <a:ext cx="3057247" cy="584775"/>
           </a:xfrm>
           <a:prstGeom prst="rect">
             <a:avLst/>
@@ -3653,7 +3659,7 @@
           <a:p>
             <a:r>
               <a:rPr kumimoji="1" lang="ja-JP" altLang="en-US" sz="3200" b="1" u="sng" dirty="0"/>
-              <a:t>接線ベクトルと反射ベクトル</a:t>
+              <a:t>当たり判定解説</a:t>
             </a:r>
           </a:p>
         </p:txBody>
@@ -3673,7 +3679,7 @@
         <p:spPr>
           <a:xfrm>
             <a:off x="567542" y="1216429"/>
-            <a:ext cx="7263527" cy="830997"/>
+            <a:ext cx="6647974" cy="830997"/>
           </a:xfrm>
           <a:prstGeom prst="rect">
             <a:avLst/>
@@ -3688,34 +3694,14 @@
           <a:p>
             <a:r>
               <a:rPr lang="ja-JP" altLang="en-US" sz="2400" dirty="0"/>
-              <a:t>特定のブロックにバレットが当たったら、</a:t>
+              <a:t>これまでのサンプルゲームに使用されている、</a:t>
             </a:r>
             <a:endParaRPr lang="en-US" altLang="ja-JP" sz="2400" dirty="0"/>
           </a:p>
           <a:p>
             <a:r>
-              <a:rPr kumimoji="1" lang="ja-JP" altLang="en-US" sz="2400" b="1" dirty="0">
-                <a:solidFill>
-                  <a:srgbClr val="FF0000"/>
-                </a:solidFill>
-              </a:rPr>
-              <a:t>壁沿い</a:t>
-            </a:r>
-            <a:r>
-              <a:rPr kumimoji="1" lang="ja-JP" altLang="en-US" sz="2400" dirty="0"/>
-              <a:t>に進んだり、</a:t>
-            </a:r>
-            <a:r>
-              <a:rPr kumimoji="1" lang="ja-JP" altLang="en-US" sz="2400" b="1" dirty="0">
-                <a:solidFill>
-                  <a:srgbClr val="FF0000"/>
-                </a:solidFill>
-              </a:rPr>
-              <a:t>反射</a:t>
-            </a:r>
-            <a:r>
-              <a:rPr kumimoji="1" lang="ja-JP" altLang="en-US" sz="2400" dirty="0"/>
-              <a:t>したりするようにします。</a:t>
+              <a:rPr lang="ja-JP" altLang="en-US" sz="2400" dirty="0"/>
+              <a:t>ステージとの当たり判定を解説します。</a:t>
             </a:r>
             <a:endParaRPr kumimoji="1" lang="en-US" altLang="ja-JP" sz="2400" dirty="0"/>
           </a:p>
@@ -3723,10 +3709,10 @@
       </p:sp>
       <p:pic>
         <p:nvPicPr>
-          <p:cNvPr id="3" name="図 2">
-            <a:extLst>
-              <a:ext uri="{FF2B5EF4-FFF2-40B4-BE49-F238E27FC236}">
-                <a16:creationId xmlns:a16="http://schemas.microsoft.com/office/drawing/2014/main" id="{5C645573-3403-4604-A41E-0891D0E87A0E}"/>
+          <p:cNvPr id="5" name="図 4">
+            <a:extLst>
+              <a:ext uri="{FF2B5EF4-FFF2-40B4-BE49-F238E27FC236}">
+                <a16:creationId xmlns:a16="http://schemas.microsoft.com/office/drawing/2014/main" id="{4E8D4B62-D634-42A7-A255-C29919C1F161}"/>
               </a:ext>
             </a:extLst>
           </p:cNvPr>
@@ -3744,176 +3730,13 @@
         <p:spPr>
           <a:xfrm>
             <a:off x="567542" y="2187126"/>
-            <a:ext cx="4738976" cy="2770356"/>
+            <a:ext cx="7473799" cy="4348053"/>
           </a:xfrm>
           <a:prstGeom prst="rect">
             <a:avLst/>
           </a:prstGeom>
         </p:spPr>
       </p:pic>
-      <p:cxnSp>
-        <p:nvCxnSpPr>
-          <p:cNvPr id="7" name="直線矢印コネクタ 6">
-            <a:extLst>
-              <a:ext uri="{FF2B5EF4-FFF2-40B4-BE49-F238E27FC236}">
-                <a16:creationId xmlns:a16="http://schemas.microsoft.com/office/drawing/2014/main" id="{7CD06BCF-9F60-4DDE-819A-40CF99408737}"/>
-              </a:ext>
-            </a:extLst>
-          </p:cNvPr>
-          <p:cNvCxnSpPr>
-            <a:cxnSpLocks/>
-          </p:cNvCxnSpPr>
-          <p:nvPr/>
-        </p:nvCxnSpPr>
-        <p:spPr>
-          <a:xfrm>
-            <a:off x="1389528" y="3783106"/>
-            <a:ext cx="0" cy="618565"/>
-          </a:xfrm>
-          <a:prstGeom prst="straightConnector1">
-            <a:avLst/>
-          </a:prstGeom>
-          <a:ln w="76200">
-            <a:solidFill>
-              <a:srgbClr val="FF0000"/>
-            </a:solidFill>
-            <a:tailEnd type="triangle"/>
-          </a:ln>
-        </p:spPr>
-        <p:style>
-          <a:lnRef idx="1">
-            <a:schemeClr val="accent1"/>
-          </a:lnRef>
-          <a:fillRef idx="0">
-            <a:schemeClr val="accent1"/>
-          </a:fillRef>
-          <a:effectRef idx="0">
-            <a:schemeClr val="accent1"/>
-          </a:effectRef>
-          <a:fontRef idx="minor">
-            <a:schemeClr val="tx1"/>
-          </a:fontRef>
-        </p:style>
-      </p:cxnSp>
-      <p:pic>
-        <p:nvPicPr>
-          <p:cNvPr id="9" name="図 8">
-            <a:extLst>
-              <a:ext uri="{FF2B5EF4-FFF2-40B4-BE49-F238E27FC236}">
-                <a16:creationId xmlns:a16="http://schemas.microsoft.com/office/drawing/2014/main" id="{A4CEBC3E-C0B3-4EFB-BB98-029E8DD79302}"/>
-              </a:ext>
-            </a:extLst>
-          </p:cNvPr>
-          <p:cNvPicPr>
-            <a:picLocks noChangeAspect="1"/>
-          </p:cNvPicPr>
-          <p:nvPr/>
-        </p:nvPicPr>
-        <p:blipFill>
-          <a:blip r:embed="rId3"/>
-          <a:stretch>
-            <a:fillRect/>
-          </a:stretch>
-        </p:blipFill>
-        <p:spPr>
-          <a:xfrm>
-            <a:off x="5937400" y="2187126"/>
-            <a:ext cx="5090824" cy="2770356"/>
-          </a:xfrm>
-          <a:prstGeom prst="rect">
-            <a:avLst/>
-          </a:prstGeom>
-        </p:spPr>
-      </p:pic>
-      <p:cxnSp>
-        <p:nvCxnSpPr>
-          <p:cNvPr id="10" name="直線矢印コネクタ 9">
-            <a:extLst>
-              <a:ext uri="{FF2B5EF4-FFF2-40B4-BE49-F238E27FC236}">
-                <a16:creationId xmlns:a16="http://schemas.microsoft.com/office/drawing/2014/main" id="{6483FA56-EB24-4595-B32B-49063E794731}"/>
-              </a:ext>
-            </a:extLst>
-          </p:cNvPr>
-          <p:cNvCxnSpPr>
-            <a:cxnSpLocks/>
-          </p:cNvCxnSpPr>
-          <p:nvPr/>
-        </p:nvCxnSpPr>
-        <p:spPr>
-          <a:xfrm>
-            <a:off x="6741459" y="4213412"/>
-            <a:ext cx="349622" cy="188258"/>
-          </a:xfrm>
-          <a:prstGeom prst="straightConnector1">
-            <a:avLst/>
-          </a:prstGeom>
-          <a:ln w="76200">
-            <a:solidFill>
-              <a:srgbClr val="FF0000"/>
-            </a:solidFill>
-            <a:tailEnd type="triangle"/>
-          </a:ln>
-        </p:spPr>
-        <p:style>
-          <a:lnRef idx="1">
-            <a:schemeClr val="accent1"/>
-          </a:lnRef>
-          <a:fillRef idx="0">
-            <a:schemeClr val="accent1"/>
-          </a:fillRef>
-          <a:effectRef idx="0">
-            <a:schemeClr val="accent1"/>
-          </a:effectRef>
-          <a:fontRef idx="minor">
-            <a:schemeClr val="tx1"/>
-          </a:fontRef>
-        </p:style>
-      </p:cxnSp>
-      <p:cxnSp>
-        <p:nvCxnSpPr>
-          <p:cNvPr id="12" name="直線矢印コネクタ 11">
-            <a:extLst>
-              <a:ext uri="{FF2B5EF4-FFF2-40B4-BE49-F238E27FC236}">
-                <a16:creationId xmlns:a16="http://schemas.microsoft.com/office/drawing/2014/main" id="{890E6795-D112-4D05-9A5D-A9E09D177169}"/>
-              </a:ext>
-            </a:extLst>
-          </p:cNvPr>
-          <p:cNvCxnSpPr>
-            <a:cxnSpLocks/>
-          </p:cNvCxnSpPr>
-          <p:nvPr/>
-        </p:nvCxnSpPr>
-        <p:spPr>
-          <a:xfrm flipH="1">
-            <a:off x="6741459" y="3783106"/>
-            <a:ext cx="824754" cy="430306"/>
-          </a:xfrm>
-          <a:prstGeom prst="straightConnector1">
-            <a:avLst/>
-          </a:prstGeom>
-          <a:ln w="76200">
-            <a:solidFill>
-              <a:srgbClr val="FF0000"/>
-            </a:solidFill>
-            <a:headEnd type="none" w="med" len="med"/>
-            <a:tailEnd type="none" w="med" len="med"/>
-          </a:ln>
-        </p:spPr>
-        <p:style>
-          <a:lnRef idx="1">
-            <a:schemeClr val="accent1"/>
-          </a:lnRef>
-          <a:fillRef idx="0">
-            <a:schemeClr val="accent1"/>
-          </a:fillRef>
-          <a:effectRef idx="0">
-            <a:schemeClr val="accent1"/>
-          </a:effectRef>
-          <a:fontRef idx="minor">
-            <a:schemeClr val="tx1"/>
-          </a:fontRef>
-        </p:style>
-      </p:cxnSp>
     </p:spTree>
     <p:extLst>
       <p:ext uri="{BB962C8B-B14F-4D97-AF65-F5344CB8AC3E}">
@@ -3959,7 +3782,7 @@
         <p:spPr>
           <a:xfrm>
             <a:off x="567542" y="491954"/>
-            <a:ext cx="2646878" cy="584775"/>
+            <a:ext cx="4815742" cy="584775"/>
           </a:xfrm>
           <a:prstGeom prst="rect">
             <a:avLst/>
@@ -3973,12 +3796,8 @@
           <a:lstStyle/>
           <a:p>
             <a:r>
-              <a:rPr lang="ja-JP" altLang="en-US" sz="3200" b="1" u="sng" dirty="0"/>
-              <a:t>反射</a:t>
-            </a:r>
-            <a:r>
               <a:rPr kumimoji="1" lang="ja-JP" altLang="en-US" sz="3200" b="1" u="sng" dirty="0"/>
-              <a:t>ベクトル</a:t>
+              <a:t>当たり判定解説 負荷軽減</a:t>
             </a:r>
           </a:p>
         </p:txBody>
@@ -3998,7 +3817,7 @@
         <p:spPr>
           <a:xfrm>
             <a:off x="567542" y="1216429"/>
-            <a:ext cx="8087470" cy="830997"/>
+            <a:ext cx="3877985" cy="461665"/>
           </a:xfrm>
           <a:prstGeom prst="rect">
             <a:avLst/>
@@ -4012,54 +3831,23 @@
           <a:lstStyle/>
           <a:p>
             <a:r>
-              <a:rPr kumimoji="1" lang="en-US" altLang="ja-JP" sz="2400" b="1" dirty="0">
-                <a:solidFill>
-                  <a:srgbClr val="FF0000"/>
-                </a:solidFill>
-              </a:rPr>
-              <a:t>StraightBullet.cpp</a:t>
-            </a:r>
-            <a:r>
               <a:rPr lang="ja-JP" altLang="en-US" sz="2400" dirty="0"/>
-              <a:t>で呼ばれている</a:t>
-            </a:r>
-            <a:r>
-              <a:rPr lang="en-US" altLang="ja-JP" sz="2400" b="1" dirty="0" err="1">
-                <a:solidFill>
-                  <a:srgbClr val="0070C0"/>
-                </a:solidFill>
-              </a:rPr>
-              <a:t>VecTangent</a:t>
-            </a:r>
-            <a:r>
-              <a:rPr lang="ja-JP" altLang="en-US" sz="2400" dirty="0"/>
-              <a:t>関数を、</a:t>
-            </a:r>
-            <a:endParaRPr lang="en-US" altLang="ja-JP" sz="2400" dirty="0"/>
-          </a:p>
-          <a:p>
-            <a:r>
-              <a:rPr kumimoji="1" lang="en-US" altLang="ja-JP" sz="2400" b="1" dirty="0" err="1">
-                <a:solidFill>
-                  <a:srgbClr val="0070C0"/>
-                </a:solidFill>
-              </a:rPr>
-              <a:t>VecReflact</a:t>
-            </a:r>
-            <a:r>
-              <a:rPr kumimoji="1" lang="ja-JP" altLang="en-US" sz="2400" dirty="0"/>
-              <a:t>関数に置き換えて動作確認しましょう。</a:t>
-            </a:r>
-            <a:endParaRPr kumimoji="1" lang="en-US" altLang="ja-JP" sz="2400" dirty="0"/>
+              <a:t>実際の処理はこちらです。</a:t>
+            </a:r>
+            <a:endParaRPr lang="en-US" altLang="ja-JP" sz="2400" b="1" dirty="0">
+              <a:solidFill>
+                <a:srgbClr val="FF0000"/>
+              </a:solidFill>
+            </a:endParaRPr>
           </a:p>
         </p:txBody>
       </p:sp>
       <p:pic>
         <p:nvPicPr>
-          <p:cNvPr id="5" name="図 4">
-            <a:extLst>
-              <a:ext uri="{FF2B5EF4-FFF2-40B4-BE49-F238E27FC236}">
-                <a16:creationId xmlns:a16="http://schemas.microsoft.com/office/drawing/2014/main" id="{83A3454D-16EE-4C96-9031-F0EFE7CCD380}"/>
+          <p:cNvPr id="3" name="図 2">
+            <a:extLst>
+              <a:ext uri="{FF2B5EF4-FFF2-40B4-BE49-F238E27FC236}">
+                <a16:creationId xmlns:a16="http://schemas.microsoft.com/office/drawing/2014/main" id="{CE157431-1B0E-4ED3-9A9F-F313642A96B0}"/>
               </a:ext>
             </a:extLst>
           </p:cNvPr>
@@ -4076,8 +3864,8 @@
         </p:blipFill>
         <p:spPr>
           <a:xfrm>
-            <a:off x="567542" y="2187126"/>
-            <a:ext cx="10584452" cy="2205580"/>
+            <a:off x="567543" y="1817794"/>
+            <a:ext cx="6135010" cy="4227326"/>
           </a:xfrm>
           <a:prstGeom prst="rect">
             <a:avLst/>
@@ -4086,60 +3874,986 @@
       </p:pic>
       <p:sp>
         <p:nvSpPr>
-          <p:cNvPr id="9" name="正方形/長方形 8">
-            <a:extLst>
-              <a:ext uri="{FF2B5EF4-FFF2-40B4-BE49-F238E27FC236}">
-                <a16:creationId xmlns:a16="http://schemas.microsoft.com/office/drawing/2014/main" id="{326619F7-3EEB-4BAB-9DF4-EC5EEFE558F6}"/>
-              </a:ext>
-            </a:extLst>
-          </p:cNvPr>
-          <p:cNvSpPr/>
+          <p:cNvPr id="11" name="テキスト ボックス 10">
+            <a:extLst>
+              <a:ext uri="{FF2B5EF4-FFF2-40B4-BE49-F238E27FC236}">
+                <a16:creationId xmlns:a16="http://schemas.microsoft.com/office/drawing/2014/main" id="{3C9C2042-10B7-4E44-9F96-42665D23EDF7}"/>
+              </a:ext>
+            </a:extLst>
+          </p:cNvPr>
+          <p:cNvSpPr txBox="1"/>
           <p:nvPr/>
         </p:nvSpPr>
         <p:spPr>
           <a:xfrm>
-            <a:off x="3980329" y="3429000"/>
-            <a:ext cx="1362636" cy="416859"/>
+            <a:off x="2172295" y="6135213"/>
+            <a:ext cx="4801314" cy="461665"/>
           </a:xfrm>
           <a:prstGeom prst="rect">
             <a:avLst/>
           </a:prstGeom>
           <a:noFill/>
-          <a:ln w="38100">
-            <a:solidFill>
-              <a:srgbClr val="FF0000"/>
-            </a:solidFill>
-          </a:ln>
-        </p:spPr>
-        <p:style>
-          <a:lnRef idx="2">
-            <a:schemeClr val="accent1">
-              <a:shade val="50000"/>
-            </a:schemeClr>
-          </a:lnRef>
-          <a:fillRef idx="1">
-            <a:schemeClr val="accent1"/>
-          </a:fillRef>
-          <a:effectRef idx="0">
-            <a:schemeClr val="accent1"/>
-          </a:effectRef>
-          <a:fontRef idx="minor">
-            <a:schemeClr val="lt1"/>
-          </a:fontRef>
-        </p:style>
-        <p:txBody>
-          <a:bodyPr rtlCol="0" anchor="ctr"/>
-          <a:lstStyle/>
-          <a:p>
-            <a:pPr algn="ctr"/>
-            <a:endParaRPr kumimoji="1" lang="ja-JP" altLang="en-US"/>
+        </p:spPr>
+        <p:txBody>
+          <a:bodyPr wrap="none" rtlCol="0">
+            <a:spAutoFit/>
+          </a:bodyPr>
+          <a:lstStyle/>
+          <a:p>
+            <a:r>
+              <a:rPr lang="ja-JP" altLang="en-US" sz="2400" dirty="0"/>
+              <a:t>↓ここから当たり判定＆衝突解決</a:t>
+            </a:r>
+            <a:endParaRPr lang="en-US" altLang="ja-JP" sz="2400" b="1" dirty="0">
+              <a:solidFill>
+                <a:srgbClr val="FF0000"/>
+              </a:solidFill>
+            </a:endParaRPr>
           </a:p>
         </p:txBody>
       </p:sp>
     </p:spTree>
     <p:extLst>
       <p:ext uri="{BB962C8B-B14F-4D97-AF65-F5344CB8AC3E}">
-        <p14:creationId xmlns:p14="http://schemas.microsoft.com/office/powerpoint/2010/main" val="2133692010"/>
+        <p14:creationId xmlns:p14="http://schemas.microsoft.com/office/powerpoint/2010/main" val="1581004059"/>
+      </p:ext>
+    </p:extLst>
+  </p:cSld>
+  <p:clrMapOvr>
+    <a:masterClrMapping/>
+  </p:clrMapOvr>
+</p:sld>
+</file>
+
+<file path=ppt/slides/slide11.xml><?xml version="1.0" encoding="utf-8"?>
+<p:sld xmlns:a="http://schemas.openxmlformats.org/drawingml/2006/main" xmlns:r="http://schemas.openxmlformats.org/officeDocument/2006/relationships" xmlns:p="http://schemas.openxmlformats.org/presentationml/2006/main">
+  <p:cSld>
+    <p:spTree>
+      <p:nvGrpSpPr>
+        <p:cNvPr id="1" name=""/>
+        <p:cNvGrpSpPr/>
+        <p:nvPr/>
+      </p:nvGrpSpPr>
+      <p:grpSpPr>
+        <a:xfrm>
+          <a:off x="0" y="0"/>
+          <a:ext cx="0" cy="0"/>
+          <a:chOff x="0" y="0"/>
+          <a:chExt cx="0" cy="0"/>
+        </a:xfrm>
+      </p:grpSpPr>
+      <p:sp>
+        <p:nvSpPr>
+          <p:cNvPr id="4" name="テキスト ボックス 3">
+            <a:extLst>
+              <a:ext uri="{FF2B5EF4-FFF2-40B4-BE49-F238E27FC236}">
+                <a16:creationId xmlns:a16="http://schemas.microsoft.com/office/drawing/2014/main" id="{5A13BF46-B8C5-48AA-8308-C9ECFF431A18}"/>
+              </a:ext>
+            </a:extLst>
+          </p:cNvPr>
+          <p:cNvSpPr txBox="1"/>
+          <p:nvPr/>
+        </p:nvSpPr>
+        <p:spPr>
+          <a:xfrm>
+            <a:off x="567542" y="491954"/>
+            <a:ext cx="4815742" cy="584775"/>
+          </a:xfrm>
+          <a:prstGeom prst="rect">
+            <a:avLst/>
+          </a:prstGeom>
+          <a:noFill/>
+        </p:spPr>
+        <p:txBody>
+          <a:bodyPr wrap="none" rtlCol="0">
+            <a:spAutoFit/>
+          </a:bodyPr>
+          <a:lstStyle/>
+          <a:p>
+            <a:r>
+              <a:rPr kumimoji="1" lang="ja-JP" altLang="en-US" sz="3200" b="1" u="sng" dirty="0"/>
+              <a:t>当たり判定解説 負荷軽減</a:t>
+            </a:r>
+          </a:p>
+        </p:txBody>
+      </p:sp>
+      <p:sp>
+        <p:nvSpPr>
+          <p:cNvPr id="6" name="テキスト ボックス 5">
+            <a:extLst>
+              <a:ext uri="{FF2B5EF4-FFF2-40B4-BE49-F238E27FC236}">
+                <a16:creationId xmlns:a16="http://schemas.microsoft.com/office/drawing/2014/main" id="{55830AD6-028B-4C4E-80BF-B70DFC1C3A46}"/>
+              </a:ext>
+            </a:extLst>
+          </p:cNvPr>
+          <p:cNvSpPr txBox="1"/>
+          <p:nvPr/>
+        </p:nvSpPr>
+        <p:spPr>
+          <a:xfrm>
+            <a:off x="567542" y="1216429"/>
+            <a:ext cx="9417963" cy="1569660"/>
+          </a:xfrm>
+          <a:prstGeom prst="rect">
+            <a:avLst/>
+          </a:prstGeom>
+          <a:noFill/>
+        </p:spPr>
+        <p:txBody>
+          <a:bodyPr wrap="none" rtlCol="0">
+            <a:spAutoFit/>
+          </a:bodyPr>
+          <a:lstStyle/>
+          <a:p>
+            <a:r>
+              <a:rPr lang="ja-JP" altLang="en-US" sz="2400" dirty="0"/>
+              <a:t>このように、ゲームを作る時には常に、</a:t>
+            </a:r>
+            <a:endParaRPr lang="en-US" altLang="ja-JP" sz="2400" dirty="0"/>
+          </a:p>
+          <a:p>
+            <a:r>
+              <a:rPr lang="ja-JP" altLang="en-US" sz="2400" b="1" dirty="0">
+                <a:solidFill>
+                  <a:srgbClr val="FF0000"/>
+                </a:solidFill>
+              </a:rPr>
+              <a:t>拡張するとどうなるか</a:t>
+            </a:r>
+            <a:r>
+              <a:rPr lang="ja-JP" altLang="en-US" sz="2400" dirty="0"/>
+              <a:t>を考える必要があります。</a:t>
+            </a:r>
+            <a:endParaRPr lang="en-US" altLang="ja-JP" sz="2400" dirty="0"/>
+          </a:p>
+          <a:p>
+            <a:endParaRPr lang="en-US" altLang="ja-JP" sz="2400" dirty="0"/>
+          </a:p>
+          <a:p>
+            <a:r>
+              <a:rPr lang="ja-JP" altLang="en-US" sz="2400" dirty="0"/>
+              <a:t>始めのうちは難しいので、徐々に考えられるようになりましょう。</a:t>
+            </a:r>
+            <a:endParaRPr lang="en-US" altLang="ja-JP" sz="2400" dirty="0"/>
+          </a:p>
+        </p:txBody>
+      </p:sp>
+    </p:spTree>
+    <p:extLst>
+      <p:ext uri="{BB962C8B-B14F-4D97-AF65-F5344CB8AC3E}">
+        <p14:creationId xmlns:p14="http://schemas.microsoft.com/office/powerpoint/2010/main" val="2613924308"/>
+      </p:ext>
+    </p:extLst>
+  </p:cSld>
+  <p:clrMapOvr>
+    <a:masterClrMapping/>
+  </p:clrMapOvr>
+</p:sld>
+</file>
+
+<file path=ppt/slides/slide12.xml><?xml version="1.0" encoding="utf-8"?>
+<p:sld xmlns:a="http://schemas.openxmlformats.org/drawingml/2006/main" xmlns:r="http://schemas.openxmlformats.org/officeDocument/2006/relationships" xmlns:p="http://schemas.openxmlformats.org/presentationml/2006/main">
+  <p:cSld>
+    <p:spTree>
+      <p:nvGrpSpPr>
+        <p:cNvPr id="1" name=""/>
+        <p:cNvGrpSpPr/>
+        <p:nvPr/>
+      </p:nvGrpSpPr>
+      <p:grpSpPr>
+        <a:xfrm>
+          <a:off x="0" y="0"/>
+          <a:ext cx="0" cy="0"/>
+          <a:chOff x="0" y="0"/>
+          <a:chExt cx="0" cy="0"/>
+        </a:xfrm>
+      </p:grpSpPr>
+      <p:sp>
+        <p:nvSpPr>
+          <p:cNvPr id="6" name="テキスト ボックス 5">
+            <a:extLst>
+              <a:ext uri="{FF2B5EF4-FFF2-40B4-BE49-F238E27FC236}">
+                <a16:creationId xmlns:a16="http://schemas.microsoft.com/office/drawing/2014/main" id="{55830AD6-028B-4C4E-80BF-B70DFC1C3A46}"/>
+              </a:ext>
+            </a:extLst>
+          </p:cNvPr>
+          <p:cNvSpPr txBox="1"/>
+          <p:nvPr/>
+        </p:nvSpPr>
+        <p:spPr>
+          <a:xfrm>
+            <a:off x="4772561" y="3198168"/>
+            <a:ext cx="2646878" cy="461665"/>
+          </a:xfrm>
+          <a:prstGeom prst="rect">
+            <a:avLst/>
+          </a:prstGeom>
+          <a:noFill/>
+        </p:spPr>
+        <p:txBody>
+          <a:bodyPr wrap="none" rtlCol="0">
+            <a:spAutoFit/>
+          </a:bodyPr>
+          <a:lstStyle/>
+          <a:p>
+            <a:r>
+              <a:rPr lang="ja-JP" altLang="en-US" sz="2400" b="1" dirty="0"/>
+              <a:t>その他テクニック</a:t>
+            </a:r>
+            <a:endParaRPr kumimoji="1" lang="en-US" altLang="ja-JP" sz="2400" b="1" dirty="0"/>
+          </a:p>
+        </p:txBody>
+      </p:sp>
+    </p:spTree>
+    <p:extLst>
+      <p:ext uri="{BB962C8B-B14F-4D97-AF65-F5344CB8AC3E}">
+        <p14:creationId xmlns:p14="http://schemas.microsoft.com/office/powerpoint/2010/main" val="3404076661"/>
+      </p:ext>
+    </p:extLst>
+  </p:cSld>
+  <p:clrMapOvr>
+    <a:masterClrMapping/>
+  </p:clrMapOvr>
+</p:sld>
+</file>
+
+<file path=ppt/slides/slide13.xml><?xml version="1.0" encoding="utf-8"?>
+<p:sld xmlns:a="http://schemas.openxmlformats.org/drawingml/2006/main" xmlns:r="http://schemas.openxmlformats.org/officeDocument/2006/relationships" xmlns:p="http://schemas.openxmlformats.org/presentationml/2006/main">
+  <p:cSld>
+    <p:spTree>
+      <p:nvGrpSpPr>
+        <p:cNvPr id="1" name=""/>
+        <p:cNvGrpSpPr/>
+        <p:nvPr/>
+      </p:nvGrpSpPr>
+      <p:grpSpPr>
+        <a:xfrm>
+          <a:off x="0" y="0"/>
+          <a:ext cx="0" cy="0"/>
+          <a:chOff x="0" y="0"/>
+          <a:chExt cx="0" cy="0"/>
+        </a:xfrm>
+      </p:grpSpPr>
+      <p:sp>
+        <p:nvSpPr>
+          <p:cNvPr id="4" name="テキスト ボックス 3">
+            <a:extLst>
+              <a:ext uri="{FF2B5EF4-FFF2-40B4-BE49-F238E27FC236}">
+                <a16:creationId xmlns:a16="http://schemas.microsoft.com/office/drawing/2014/main" id="{5A13BF46-B8C5-48AA-8308-C9ECFF431A18}"/>
+              </a:ext>
+            </a:extLst>
+          </p:cNvPr>
+          <p:cNvSpPr txBox="1"/>
+          <p:nvPr/>
+        </p:nvSpPr>
+        <p:spPr>
+          <a:xfrm>
+            <a:off x="567542" y="491954"/>
+            <a:ext cx="5636479" cy="584775"/>
+          </a:xfrm>
+          <a:prstGeom prst="rect">
+            <a:avLst/>
+          </a:prstGeom>
+          <a:noFill/>
+        </p:spPr>
+        <p:txBody>
+          <a:bodyPr wrap="none" rtlCol="0">
+            <a:spAutoFit/>
+          </a:bodyPr>
+          <a:lstStyle/>
+          <a:p>
+            <a:r>
+              <a:rPr kumimoji="1" lang="ja-JP" altLang="en-US" sz="3200" b="1" u="sng" dirty="0"/>
+              <a:t>当たり判定解説 スナップ処理</a:t>
+            </a:r>
+          </a:p>
+        </p:txBody>
+      </p:sp>
+      <p:sp>
+        <p:nvSpPr>
+          <p:cNvPr id="6" name="テキスト ボックス 5">
+            <a:extLst>
+              <a:ext uri="{FF2B5EF4-FFF2-40B4-BE49-F238E27FC236}">
+                <a16:creationId xmlns:a16="http://schemas.microsoft.com/office/drawing/2014/main" id="{55830AD6-028B-4C4E-80BF-B70DFC1C3A46}"/>
+              </a:ext>
+            </a:extLst>
+          </p:cNvPr>
+          <p:cNvSpPr txBox="1"/>
+          <p:nvPr/>
+        </p:nvSpPr>
+        <p:spPr>
+          <a:xfrm>
+            <a:off x="567542" y="1216429"/>
+            <a:ext cx="11264622" cy="1200329"/>
+          </a:xfrm>
+          <a:prstGeom prst="rect">
+            <a:avLst/>
+          </a:prstGeom>
+          <a:noFill/>
+        </p:spPr>
+        <p:txBody>
+          <a:bodyPr wrap="none" rtlCol="0">
+            <a:spAutoFit/>
+          </a:bodyPr>
+          <a:lstStyle/>
+          <a:p>
+            <a:r>
+              <a:rPr lang="ja-JP" altLang="en-US" sz="2400" dirty="0"/>
+              <a:t>床の上にいるときは、</a:t>
+            </a:r>
+            <a:r>
+              <a:rPr lang="ja-JP" altLang="en-US" sz="2400" b="1" dirty="0">
+                <a:solidFill>
+                  <a:srgbClr val="FF0000"/>
+                </a:solidFill>
+              </a:rPr>
+              <a:t>簡単に床から離れないようにスナップ処理（吸いつき）</a:t>
+            </a:r>
+            <a:endParaRPr lang="en-US" altLang="ja-JP" sz="2400" b="1" dirty="0">
+              <a:solidFill>
+                <a:srgbClr val="FF0000"/>
+              </a:solidFill>
+            </a:endParaRPr>
+          </a:p>
+          <a:p>
+            <a:r>
+              <a:rPr lang="ja-JP" altLang="en-US" sz="2400" dirty="0"/>
+              <a:t>を用意することが多いです。</a:t>
+            </a:r>
+            <a:endParaRPr lang="en-US" altLang="ja-JP" sz="2400" dirty="0"/>
+          </a:p>
+          <a:p>
+            <a:r>
+              <a:rPr lang="ja-JP" altLang="en-US" sz="2400" dirty="0"/>
+              <a:t>これにより、</a:t>
+            </a:r>
+            <a:r>
+              <a:rPr lang="ja-JP" altLang="en-US" sz="2400" b="1" dirty="0">
+                <a:solidFill>
+                  <a:srgbClr val="FF0000"/>
+                </a:solidFill>
+              </a:rPr>
+              <a:t>ちょっとした段差や坂では空中に浮かないように</a:t>
+            </a:r>
+            <a:r>
+              <a:rPr lang="ja-JP" altLang="en-US" sz="2400" dirty="0"/>
+              <a:t>しています。</a:t>
+            </a:r>
+            <a:endParaRPr lang="en-US" altLang="ja-JP" sz="2400" dirty="0"/>
+          </a:p>
+        </p:txBody>
+      </p:sp>
+      <p:pic>
+        <p:nvPicPr>
+          <p:cNvPr id="3" name="図 2">
+            <a:extLst>
+              <a:ext uri="{FF2B5EF4-FFF2-40B4-BE49-F238E27FC236}">
+                <a16:creationId xmlns:a16="http://schemas.microsoft.com/office/drawing/2014/main" id="{56905358-33C7-4E5D-8391-F0A0081603DC}"/>
+              </a:ext>
+            </a:extLst>
+          </p:cNvPr>
+          <p:cNvPicPr>
+            <a:picLocks noChangeAspect="1"/>
+          </p:cNvPicPr>
+          <p:nvPr/>
+        </p:nvPicPr>
+        <p:blipFill>
+          <a:blip r:embed="rId2"/>
+          <a:stretch>
+            <a:fillRect/>
+          </a:stretch>
+        </p:blipFill>
+        <p:spPr>
+          <a:xfrm>
+            <a:off x="567541" y="2556457"/>
+            <a:ext cx="10659791" cy="1289401"/>
+          </a:xfrm>
+          <a:prstGeom prst="rect">
+            <a:avLst/>
+          </a:prstGeom>
+        </p:spPr>
+      </p:pic>
+    </p:spTree>
+    <p:extLst>
+      <p:ext uri="{BB962C8B-B14F-4D97-AF65-F5344CB8AC3E}">
+        <p14:creationId xmlns:p14="http://schemas.microsoft.com/office/powerpoint/2010/main" val="3575781164"/>
+      </p:ext>
+    </p:extLst>
+  </p:cSld>
+  <p:clrMapOvr>
+    <a:masterClrMapping/>
+  </p:clrMapOvr>
+</p:sld>
+</file>
+
+<file path=ppt/slides/slide14.xml><?xml version="1.0" encoding="utf-8"?>
+<p:sld xmlns:a="http://schemas.openxmlformats.org/drawingml/2006/main" xmlns:r="http://schemas.openxmlformats.org/officeDocument/2006/relationships" xmlns:p="http://schemas.openxmlformats.org/presentationml/2006/main">
+  <p:cSld>
+    <p:spTree>
+      <p:nvGrpSpPr>
+        <p:cNvPr id="1" name=""/>
+        <p:cNvGrpSpPr/>
+        <p:nvPr/>
+      </p:nvGrpSpPr>
+      <p:grpSpPr>
+        <a:xfrm>
+          <a:off x="0" y="0"/>
+          <a:ext cx="0" cy="0"/>
+          <a:chOff x="0" y="0"/>
+          <a:chExt cx="0" cy="0"/>
+        </a:xfrm>
+      </p:grpSpPr>
+      <p:sp>
+        <p:nvSpPr>
+          <p:cNvPr id="4" name="テキスト ボックス 3">
+            <a:extLst>
+              <a:ext uri="{FF2B5EF4-FFF2-40B4-BE49-F238E27FC236}">
+                <a16:creationId xmlns:a16="http://schemas.microsoft.com/office/drawing/2014/main" id="{5A13BF46-B8C5-48AA-8308-C9ECFF431A18}"/>
+              </a:ext>
+            </a:extLst>
+          </p:cNvPr>
+          <p:cNvSpPr txBox="1"/>
+          <p:nvPr/>
+        </p:nvSpPr>
+        <p:spPr>
+          <a:xfrm>
+            <a:off x="567542" y="491954"/>
+            <a:ext cx="5226111" cy="584775"/>
+          </a:xfrm>
+          <a:prstGeom prst="rect">
+            <a:avLst/>
+          </a:prstGeom>
+          <a:noFill/>
+        </p:spPr>
+        <p:txBody>
+          <a:bodyPr wrap="none" rtlCol="0">
+            <a:spAutoFit/>
+          </a:bodyPr>
+          <a:lstStyle/>
+          <a:p>
+            <a:r>
+              <a:rPr kumimoji="1" lang="ja-JP" altLang="en-US" sz="3200" b="1" u="sng" dirty="0"/>
+              <a:t>当たり判定解説 動く床追従</a:t>
+            </a:r>
+          </a:p>
+        </p:txBody>
+      </p:sp>
+      <p:sp>
+        <p:nvSpPr>
+          <p:cNvPr id="6" name="テキスト ボックス 5">
+            <a:extLst>
+              <a:ext uri="{FF2B5EF4-FFF2-40B4-BE49-F238E27FC236}">
+                <a16:creationId xmlns:a16="http://schemas.microsoft.com/office/drawing/2014/main" id="{55830AD6-028B-4C4E-80BF-B70DFC1C3A46}"/>
+              </a:ext>
+            </a:extLst>
+          </p:cNvPr>
+          <p:cNvSpPr txBox="1"/>
+          <p:nvPr/>
+        </p:nvSpPr>
+        <p:spPr>
+          <a:xfrm>
+            <a:off x="567542" y="1216429"/>
+            <a:ext cx="11264622" cy="830997"/>
+          </a:xfrm>
+          <a:prstGeom prst="rect">
+            <a:avLst/>
+          </a:prstGeom>
+          <a:noFill/>
+        </p:spPr>
+        <p:txBody>
+          <a:bodyPr wrap="none" rtlCol="0">
+            <a:spAutoFit/>
+          </a:bodyPr>
+          <a:lstStyle/>
+          <a:p>
+            <a:r>
+              <a:rPr lang="ja-JP" altLang="en-US" sz="2400" dirty="0"/>
+              <a:t>動く床に乗った場合は、押し出すだけでなく、</a:t>
+            </a:r>
+            <a:r>
+              <a:rPr lang="ja-JP" altLang="en-US" sz="2400" b="1" dirty="0">
+                <a:solidFill>
+                  <a:srgbClr val="FF0000"/>
+                </a:solidFill>
+              </a:rPr>
+              <a:t>一緒に動かなくてはいけません。</a:t>
+            </a:r>
+            <a:endParaRPr lang="en-US" altLang="ja-JP" sz="2400" b="1" dirty="0">
+              <a:solidFill>
+                <a:srgbClr val="FF0000"/>
+              </a:solidFill>
+            </a:endParaRPr>
+          </a:p>
+          <a:p>
+            <a:r>
+              <a:rPr lang="ja-JP" altLang="en-US" sz="2400" dirty="0"/>
+              <a:t>なので、</a:t>
+            </a:r>
+            <a:r>
+              <a:rPr lang="ja-JP" altLang="en-US" sz="2400" b="1" dirty="0">
+                <a:solidFill>
+                  <a:srgbClr val="FF0000"/>
+                </a:solidFill>
+              </a:rPr>
+              <a:t>乗ったときだけ床の移動量を加算する</a:t>
+            </a:r>
+            <a:r>
+              <a:rPr lang="ja-JP" altLang="en-US" sz="2400" dirty="0"/>
+              <a:t>必要があります。</a:t>
+            </a:r>
+            <a:endParaRPr lang="en-US" altLang="ja-JP" sz="2400" dirty="0"/>
+          </a:p>
+        </p:txBody>
+      </p:sp>
+      <p:pic>
+        <p:nvPicPr>
+          <p:cNvPr id="3" name="図 2">
+            <a:extLst>
+              <a:ext uri="{FF2B5EF4-FFF2-40B4-BE49-F238E27FC236}">
+                <a16:creationId xmlns:a16="http://schemas.microsoft.com/office/drawing/2014/main" id="{49ADB7FC-758F-4180-A4B5-294395070ED0}"/>
+              </a:ext>
+            </a:extLst>
+          </p:cNvPr>
+          <p:cNvPicPr>
+            <a:picLocks noChangeAspect="1"/>
+          </p:cNvPicPr>
+          <p:nvPr/>
+        </p:nvPicPr>
+        <p:blipFill>
+          <a:blip r:embed="rId2"/>
+          <a:stretch>
+            <a:fillRect/>
+          </a:stretch>
+        </p:blipFill>
+        <p:spPr>
+          <a:xfrm>
+            <a:off x="567542" y="2187126"/>
+            <a:ext cx="10419698" cy="2008356"/>
+          </a:xfrm>
+          <a:prstGeom prst="rect">
+            <a:avLst/>
+          </a:prstGeom>
+        </p:spPr>
+      </p:pic>
+    </p:spTree>
+    <p:extLst>
+      <p:ext uri="{BB962C8B-B14F-4D97-AF65-F5344CB8AC3E}">
+        <p14:creationId xmlns:p14="http://schemas.microsoft.com/office/powerpoint/2010/main" val="348280575"/>
+      </p:ext>
+    </p:extLst>
+  </p:cSld>
+  <p:clrMapOvr>
+    <a:masterClrMapping/>
+  </p:clrMapOvr>
+</p:sld>
+</file>
+
+<file path=ppt/slides/slide15.xml><?xml version="1.0" encoding="utf-8"?>
+<p:sld xmlns:a="http://schemas.openxmlformats.org/drawingml/2006/main" xmlns:r="http://schemas.openxmlformats.org/officeDocument/2006/relationships" xmlns:p="http://schemas.openxmlformats.org/presentationml/2006/main">
+  <p:cSld>
+    <p:spTree>
+      <p:nvGrpSpPr>
+        <p:cNvPr id="1" name=""/>
+        <p:cNvGrpSpPr/>
+        <p:nvPr/>
+      </p:nvGrpSpPr>
+      <p:grpSpPr>
+        <a:xfrm>
+          <a:off x="0" y="0"/>
+          <a:ext cx="0" cy="0"/>
+          <a:chOff x="0" y="0"/>
+          <a:chExt cx="0" cy="0"/>
+        </a:xfrm>
+      </p:grpSpPr>
+      <p:sp>
+        <p:nvSpPr>
+          <p:cNvPr id="4" name="テキスト ボックス 3">
+            <a:extLst>
+              <a:ext uri="{FF2B5EF4-FFF2-40B4-BE49-F238E27FC236}">
+                <a16:creationId xmlns:a16="http://schemas.microsoft.com/office/drawing/2014/main" id="{5A13BF46-B8C5-48AA-8308-C9ECFF431A18}"/>
+              </a:ext>
+            </a:extLst>
+          </p:cNvPr>
+          <p:cNvSpPr txBox="1"/>
+          <p:nvPr/>
+        </p:nvSpPr>
+        <p:spPr>
+          <a:xfrm>
+            <a:off x="567542" y="491954"/>
+            <a:ext cx="5636479" cy="584775"/>
+          </a:xfrm>
+          <a:prstGeom prst="rect">
+            <a:avLst/>
+          </a:prstGeom>
+          <a:noFill/>
+        </p:spPr>
+        <p:txBody>
+          <a:bodyPr wrap="none" rtlCol="0">
+            <a:spAutoFit/>
+          </a:bodyPr>
+          <a:lstStyle/>
+          <a:p>
+            <a:r>
+              <a:rPr kumimoji="1" lang="ja-JP" altLang="en-US" sz="3200" b="1" u="sng" dirty="0"/>
+              <a:t>当たり判定解説 小数誤差対策</a:t>
+            </a:r>
+          </a:p>
+        </p:txBody>
+      </p:sp>
+      <p:sp>
+        <p:nvSpPr>
+          <p:cNvPr id="6" name="テキスト ボックス 5">
+            <a:extLst>
+              <a:ext uri="{FF2B5EF4-FFF2-40B4-BE49-F238E27FC236}">
+                <a16:creationId xmlns:a16="http://schemas.microsoft.com/office/drawing/2014/main" id="{55830AD6-028B-4C4E-80BF-B70DFC1C3A46}"/>
+              </a:ext>
+            </a:extLst>
+          </p:cNvPr>
+          <p:cNvSpPr txBox="1"/>
+          <p:nvPr/>
+        </p:nvSpPr>
+        <p:spPr>
+          <a:xfrm>
+            <a:off x="567542" y="1216429"/>
+            <a:ext cx="9417963" cy="1569660"/>
+          </a:xfrm>
+          <a:prstGeom prst="rect">
+            <a:avLst/>
+          </a:prstGeom>
+          <a:noFill/>
+        </p:spPr>
+        <p:txBody>
+          <a:bodyPr wrap="none" rtlCol="0">
+            <a:spAutoFit/>
+          </a:bodyPr>
+          <a:lstStyle/>
+          <a:p>
+            <a:r>
+              <a:rPr lang="ja-JP" altLang="en-US" sz="2400" b="1" dirty="0">
+                <a:solidFill>
+                  <a:srgbClr val="FF0000"/>
+                </a:solidFill>
+              </a:rPr>
+              <a:t>コンピューターは正確な小数を表現できません。</a:t>
+            </a:r>
+            <a:endParaRPr lang="en-US" altLang="ja-JP" sz="2400" b="1" dirty="0">
+              <a:solidFill>
+                <a:srgbClr val="FF0000"/>
+              </a:solidFill>
+            </a:endParaRPr>
+          </a:p>
+          <a:p>
+            <a:r>
+              <a:rPr lang="ja-JP" altLang="en-US" sz="2400" dirty="0"/>
+              <a:t>たまに、</a:t>
+            </a:r>
+            <a:r>
+              <a:rPr lang="ja-JP" altLang="en-US" sz="2400" b="1" dirty="0">
+                <a:solidFill>
+                  <a:srgbClr val="FF0000"/>
+                </a:solidFill>
+              </a:rPr>
+              <a:t>ごく小さな小数の誤差で当たり判定が誤る</a:t>
+            </a:r>
+            <a:r>
+              <a:rPr lang="ja-JP" altLang="en-US" sz="2400" dirty="0"/>
+              <a:t>時があります。</a:t>
+            </a:r>
+            <a:endParaRPr lang="en-US" altLang="ja-JP" sz="2400" dirty="0"/>
+          </a:p>
+          <a:p>
+            <a:r>
+              <a:rPr lang="ja-JP" altLang="en-US" sz="2400" dirty="0"/>
+              <a:t>サンプルでは小数以下第３位以降は無視するようにして、</a:t>
+            </a:r>
+            <a:endParaRPr lang="en-US" altLang="ja-JP" sz="2400" dirty="0"/>
+          </a:p>
+          <a:p>
+            <a:r>
+              <a:rPr lang="ja-JP" altLang="en-US" sz="2400" dirty="0"/>
+              <a:t>小さすぎる誤差を無視するようにしています。</a:t>
+            </a:r>
+            <a:endParaRPr lang="en-US" altLang="ja-JP" sz="2400" dirty="0"/>
+          </a:p>
+        </p:txBody>
+      </p:sp>
+      <p:pic>
+        <p:nvPicPr>
+          <p:cNvPr id="5" name="図 4">
+            <a:extLst>
+              <a:ext uri="{FF2B5EF4-FFF2-40B4-BE49-F238E27FC236}">
+                <a16:creationId xmlns:a16="http://schemas.microsoft.com/office/drawing/2014/main" id="{3AEA5FA2-FC53-4A51-BA12-7521C003ED0F}"/>
+              </a:ext>
+            </a:extLst>
+          </p:cNvPr>
+          <p:cNvPicPr>
+            <a:picLocks noChangeAspect="1"/>
+          </p:cNvPicPr>
+          <p:nvPr/>
+        </p:nvPicPr>
+        <p:blipFill>
+          <a:blip r:embed="rId2"/>
+          <a:stretch>
+            <a:fillRect/>
+          </a:stretch>
+        </p:blipFill>
+        <p:spPr>
+          <a:xfrm>
+            <a:off x="567542" y="2925789"/>
+            <a:ext cx="4134427" cy="685896"/>
+          </a:xfrm>
+          <a:prstGeom prst="rect">
+            <a:avLst/>
+          </a:prstGeom>
+        </p:spPr>
+      </p:pic>
+      <p:pic>
+        <p:nvPicPr>
+          <p:cNvPr id="8" name="図 7">
+            <a:extLst>
+              <a:ext uri="{FF2B5EF4-FFF2-40B4-BE49-F238E27FC236}">
+                <a16:creationId xmlns:a16="http://schemas.microsoft.com/office/drawing/2014/main" id="{8C81BD09-FB18-4E3C-83CC-DD57BCFF6361}"/>
+              </a:ext>
+            </a:extLst>
+          </p:cNvPr>
+          <p:cNvPicPr>
+            <a:picLocks noChangeAspect="1"/>
+          </p:cNvPicPr>
+          <p:nvPr/>
+        </p:nvPicPr>
+        <p:blipFill>
+          <a:blip r:embed="rId3"/>
+          <a:stretch>
+            <a:fillRect/>
+          </a:stretch>
+        </p:blipFill>
+        <p:spPr>
+          <a:xfrm>
+            <a:off x="567542" y="3751385"/>
+            <a:ext cx="8830907" cy="1543265"/>
+          </a:xfrm>
+          <a:prstGeom prst="rect">
+            <a:avLst/>
+          </a:prstGeom>
+        </p:spPr>
+      </p:pic>
+      <p:sp>
+        <p:nvSpPr>
+          <p:cNvPr id="9" name="テキスト ボックス 8">
+            <a:extLst>
+              <a:ext uri="{FF2B5EF4-FFF2-40B4-BE49-F238E27FC236}">
+                <a16:creationId xmlns:a16="http://schemas.microsoft.com/office/drawing/2014/main" id="{F4A6DECD-952E-4BF7-AA68-3B7C91161A4B}"/>
+              </a:ext>
+            </a:extLst>
+          </p:cNvPr>
+          <p:cNvSpPr txBox="1"/>
+          <p:nvPr/>
+        </p:nvSpPr>
+        <p:spPr>
+          <a:xfrm>
+            <a:off x="567542" y="5434350"/>
+            <a:ext cx="7914346" cy="830997"/>
+          </a:xfrm>
+          <a:prstGeom prst="rect">
+            <a:avLst/>
+          </a:prstGeom>
+          <a:noFill/>
+        </p:spPr>
+        <p:txBody>
+          <a:bodyPr wrap="none" rtlCol="0">
+            <a:spAutoFit/>
+          </a:bodyPr>
+          <a:lstStyle/>
+          <a:p>
+            <a:r>
+              <a:rPr lang="en-US" altLang="ja-JP" sz="2400" dirty="0"/>
+              <a:t>※</a:t>
+            </a:r>
+            <a:r>
+              <a:rPr lang="ja-JP" altLang="en-US" sz="2400" dirty="0"/>
+              <a:t>サンプルでも小数点以下</a:t>
+            </a:r>
+            <a:r>
+              <a:rPr lang="en-US" altLang="ja-JP" sz="2400" dirty="0"/>
+              <a:t>12</a:t>
+            </a:r>
+            <a:r>
+              <a:rPr lang="ja-JP" altLang="en-US" sz="2400" dirty="0"/>
+              <a:t>位くらいで誤差が発生し、</a:t>
+            </a:r>
+            <a:endParaRPr lang="en-US" altLang="ja-JP" sz="2400" dirty="0"/>
+          </a:p>
+          <a:p>
+            <a:r>
+              <a:rPr lang="ja-JP" altLang="en-US" sz="2400" dirty="0"/>
+              <a:t>　床をすり抜けたりすることがありました。</a:t>
+            </a:r>
+            <a:endParaRPr lang="en-US" altLang="ja-JP" sz="2400" dirty="0"/>
+          </a:p>
+        </p:txBody>
+      </p:sp>
+    </p:spTree>
+    <p:extLst>
+      <p:ext uri="{BB962C8B-B14F-4D97-AF65-F5344CB8AC3E}">
+        <p14:creationId xmlns:p14="http://schemas.microsoft.com/office/powerpoint/2010/main" val="698923526"/>
+      </p:ext>
+    </p:extLst>
+  </p:cSld>
+  <p:clrMapOvr>
+    <a:masterClrMapping/>
+  </p:clrMapOvr>
+</p:sld>
+</file>
+
+<file path=ppt/slides/slide16.xml><?xml version="1.0" encoding="utf-8"?>
+<p:sld xmlns:a="http://schemas.openxmlformats.org/drawingml/2006/main" xmlns:r="http://schemas.openxmlformats.org/officeDocument/2006/relationships" xmlns:p="http://schemas.openxmlformats.org/presentationml/2006/main">
+  <p:cSld>
+    <p:spTree>
+      <p:nvGrpSpPr>
+        <p:cNvPr id="1" name=""/>
+        <p:cNvGrpSpPr/>
+        <p:nvPr/>
+      </p:nvGrpSpPr>
+      <p:grpSpPr>
+        <a:xfrm>
+          <a:off x="0" y="0"/>
+          <a:ext cx="0" cy="0"/>
+          <a:chOff x="0" y="0"/>
+          <a:chExt cx="0" cy="0"/>
+        </a:xfrm>
+      </p:grpSpPr>
+      <p:sp>
+        <p:nvSpPr>
+          <p:cNvPr id="4" name="テキスト ボックス 3">
+            <a:extLst>
+              <a:ext uri="{FF2B5EF4-FFF2-40B4-BE49-F238E27FC236}">
+                <a16:creationId xmlns:a16="http://schemas.microsoft.com/office/drawing/2014/main" id="{5A13BF46-B8C5-48AA-8308-C9ECFF431A18}"/>
+              </a:ext>
+            </a:extLst>
+          </p:cNvPr>
+          <p:cNvSpPr txBox="1"/>
+          <p:nvPr/>
+        </p:nvSpPr>
+        <p:spPr>
+          <a:xfrm>
+            <a:off x="567542" y="491954"/>
+            <a:ext cx="4405373" cy="584775"/>
+          </a:xfrm>
+          <a:prstGeom prst="rect">
+            <a:avLst/>
+          </a:prstGeom>
+          <a:noFill/>
+        </p:spPr>
+        <p:txBody>
+          <a:bodyPr wrap="none" rtlCol="0">
+            <a:spAutoFit/>
+          </a:bodyPr>
+          <a:lstStyle/>
+          <a:p>
+            <a:r>
+              <a:rPr kumimoji="1" lang="ja-JP" altLang="en-US" sz="3200" b="1" u="sng" dirty="0"/>
+              <a:t>当たり判定解説 まとめ</a:t>
+            </a:r>
+          </a:p>
+        </p:txBody>
+      </p:sp>
+      <p:sp>
+        <p:nvSpPr>
+          <p:cNvPr id="6" name="テキスト ボックス 5">
+            <a:extLst>
+              <a:ext uri="{FF2B5EF4-FFF2-40B4-BE49-F238E27FC236}">
+                <a16:creationId xmlns:a16="http://schemas.microsoft.com/office/drawing/2014/main" id="{55830AD6-028B-4C4E-80BF-B70DFC1C3A46}"/>
+              </a:ext>
+            </a:extLst>
+          </p:cNvPr>
+          <p:cNvSpPr txBox="1"/>
+          <p:nvPr/>
+        </p:nvSpPr>
+        <p:spPr>
+          <a:xfrm>
+            <a:off x="567542" y="1216429"/>
+            <a:ext cx="8802410" cy="3046988"/>
+          </a:xfrm>
+          <a:prstGeom prst="rect">
+            <a:avLst/>
+          </a:prstGeom>
+          <a:noFill/>
+        </p:spPr>
+        <p:txBody>
+          <a:bodyPr wrap="none" rtlCol="0">
+            <a:spAutoFit/>
+          </a:bodyPr>
+          <a:lstStyle/>
+          <a:p>
+            <a:r>
+              <a:rPr lang="ja-JP" altLang="en-US" sz="2400" dirty="0"/>
+              <a:t>当たり判定と衝突解決は確たる正解はありません。</a:t>
+            </a:r>
+            <a:endParaRPr lang="en-US" altLang="ja-JP" sz="2400" dirty="0"/>
+          </a:p>
+          <a:p>
+            <a:r>
+              <a:rPr lang="ja-JP" altLang="en-US" sz="2400" dirty="0"/>
+              <a:t>ここで紹介したものを対応しても解決しないものもあります。</a:t>
+            </a:r>
+            <a:endParaRPr lang="en-US" altLang="ja-JP" sz="2400" dirty="0"/>
+          </a:p>
+          <a:p>
+            <a:endParaRPr lang="en-US" altLang="ja-JP" sz="2400" dirty="0"/>
+          </a:p>
+          <a:p>
+            <a:r>
+              <a:rPr lang="ja-JP" altLang="en-US" sz="2400" dirty="0"/>
+              <a:t>大事なことは２点で、</a:t>
+            </a:r>
+            <a:endParaRPr lang="en-US" altLang="ja-JP" sz="2400" dirty="0"/>
+          </a:p>
+          <a:p>
+            <a:r>
+              <a:rPr lang="ja-JP" altLang="en-US" sz="2400" b="1" dirty="0">
+                <a:solidFill>
+                  <a:srgbClr val="FF0000"/>
+                </a:solidFill>
+              </a:rPr>
+              <a:t>・どのようなプログラムを組んだかをきちんと把握すること</a:t>
+            </a:r>
+            <a:endParaRPr lang="en-US" altLang="ja-JP" sz="2400" b="1" dirty="0">
+              <a:solidFill>
+                <a:srgbClr val="FF0000"/>
+              </a:solidFill>
+            </a:endParaRPr>
+          </a:p>
+          <a:p>
+            <a:r>
+              <a:rPr lang="ja-JP" altLang="en-US" sz="2400" b="1" dirty="0">
+                <a:solidFill>
+                  <a:srgbClr val="FF0000"/>
+                </a:solidFill>
+              </a:rPr>
+              <a:t>・不具合が起きたら、根本的な原因を調べること</a:t>
+            </a:r>
+            <a:endParaRPr lang="en-US" altLang="ja-JP" sz="2400" b="1" dirty="0">
+              <a:solidFill>
+                <a:srgbClr val="FF0000"/>
+              </a:solidFill>
+            </a:endParaRPr>
+          </a:p>
+          <a:p>
+            <a:endParaRPr lang="en-US" altLang="ja-JP" sz="2400" dirty="0"/>
+          </a:p>
+          <a:p>
+            <a:r>
+              <a:rPr lang="ja-JP" altLang="en-US" sz="2400" dirty="0"/>
+              <a:t>これらを意識して解決していくことが重要になります。</a:t>
+            </a:r>
+            <a:endParaRPr lang="en-US" altLang="ja-JP" sz="2400" dirty="0"/>
+          </a:p>
+        </p:txBody>
+      </p:sp>
+    </p:spTree>
+    <p:extLst>
+      <p:ext uri="{BB962C8B-B14F-4D97-AF65-F5344CB8AC3E}">
+        <p14:creationId xmlns:p14="http://schemas.microsoft.com/office/powerpoint/2010/main" val="2564702902"/>
       </p:ext>
     </p:extLst>
   </p:cSld>
@@ -4168,10 +4882,10 @@
       </p:grpSpPr>
       <p:sp>
         <p:nvSpPr>
-          <p:cNvPr id="4" name="テキスト ボックス 3">
-            <a:extLst>
-              <a:ext uri="{FF2B5EF4-FFF2-40B4-BE49-F238E27FC236}">
-                <a16:creationId xmlns:a16="http://schemas.microsoft.com/office/drawing/2014/main" id="{5A13BF46-B8C5-48AA-8308-C9ECFF431A18}"/>
+          <p:cNvPr id="6" name="テキスト ボックス 5">
+            <a:extLst>
+              <a:ext uri="{FF2B5EF4-FFF2-40B4-BE49-F238E27FC236}">
+                <a16:creationId xmlns:a16="http://schemas.microsoft.com/office/drawing/2014/main" id="{55830AD6-028B-4C4E-80BF-B70DFC1C3A46}"/>
               </a:ext>
             </a:extLst>
           </p:cNvPr>
@@ -4180,8 +4894,8 @@
         </p:nvSpPr>
         <p:spPr>
           <a:xfrm>
-            <a:off x="567542" y="491954"/>
-            <a:ext cx="2646878" cy="584775"/>
+            <a:off x="4772561" y="3198168"/>
+            <a:ext cx="2646878" cy="461665"/>
           </a:xfrm>
           <a:prstGeom prst="rect">
             <a:avLst/>
@@ -4195,327 +4909,8 @@
           <a:lstStyle/>
           <a:p>
             <a:r>
-              <a:rPr kumimoji="1" lang="ja-JP" altLang="en-US" sz="3200" b="1" u="sng" dirty="0"/>
-              <a:t>接線ベクトル</a:t>
-            </a:r>
-          </a:p>
-        </p:txBody>
-      </p:sp>
-      <p:sp>
-        <p:nvSpPr>
-          <p:cNvPr id="6" name="テキスト ボックス 5">
-            <a:extLst>
-              <a:ext uri="{FF2B5EF4-FFF2-40B4-BE49-F238E27FC236}">
-                <a16:creationId xmlns:a16="http://schemas.microsoft.com/office/drawing/2014/main" id="{55830AD6-028B-4C4E-80BF-B70DFC1C3A46}"/>
-              </a:ext>
-            </a:extLst>
-          </p:cNvPr>
-          <p:cNvSpPr txBox="1"/>
-          <p:nvPr/>
-        </p:nvSpPr>
-        <p:spPr>
-          <a:xfrm>
-            <a:off x="567542" y="1216429"/>
-            <a:ext cx="10956846" cy="830997"/>
-          </a:xfrm>
-          <a:prstGeom prst="rect">
-            <a:avLst/>
-          </a:prstGeom>
-          <a:noFill/>
-        </p:spPr>
-        <p:txBody>
-          <a:bodyPr wrap="none" rtlCol="0">
-            <a:spAutoFit/>
-          </a:bodyPr>
-          <a:lstStyle/>
-          <a:p>
-            <a:r>
-              <a:rPr kumimoji="1" lang="ja-JP" altLang="en-US" sz="2400" dirty="0"/>
-              <a:t>衝突した壁に沿ったベクトルを計算するには、</a:t>
-            </a:r>
-            <a:r>
-              <a:rPr kumimoji="1" lang="ja-JP" altLang="en-US" sz="2400" b="1" dirty="0">
-                <a:solidFill>
-                  <a:srgbClr val="FF0000"/>
-                </a:solidFill>
-              </a:rPr>
-              <a:t>接線ベクトル</a:t>
-            </a:r>
-            <a:r>
-              <a:rPr kumimoji="1" lang="ja-JP" altLang="en-US" sz="2400" dirty="0"/>
-              <a:t>を計算します。</a:t>
-            </a:r>
-            <a:endParaRPr kumimoji="1" lang="en-US" altLang="ja-JP" sz="2400" dirty="0"/>
-          </a:p>
-          <a:p>
-            <a:r>
-              <a:rPr lang="ja-JP" altLang="en-US" sz="2400" dirty="0"/>
-              <a:t>接線ベクトルを計算するには</a:t>
-            </a:r>
-            <a:r>
-              <a:rPr lang="ja-JP" altLang="en-US" sz="2400" b="1" dirty="0">
-                <a:solidFill>
-                  <a:srgbClr val="FF0000"/>
-                </a:solidFill>
-              </a:rPr>
-              <a:t>壁の法線ベクトル</a:t>
-            </a:r>
-            <a:r>
-              <a:rPr lang="ja-JP" altLang="en-US" sz="2400" dirty="0"/>
-              <a:t>が重要になります。</a:t>
-            </a:r>
-            <a:endParaRPr kumimoji="1" lang="en-US" altLang="ja-JP" sz="2400" dirty="0"/>
-          </a:p>
-        </p:txBody>
-      </p:sp>
-      <p:cxnSp>
-        <p:nvCxnSpPr>
-          <p:cNvPr id="8" name="直線コネクタ 7">
-            <a:extLst>
-              <a:ext uri="{FF2B5EF4-FFF2-40B4-BE49-F238E27FC236}">
-                <a16:creationId xmlns:a16="http://schemas.microsoft.com/office/drawing/2014/main" id="{1C846895-ADD9-4851-9D36-21FBDB741CD6}"/>
-              </a:ext>
-            </a:extLst>
-          </p:cNvPr>
-          <p:cNvCxnSpPr/>
-          <p:nvPr/>
-        </p:nvCxnSpPr>
-        <p:spPr>
-          <a:xfrm>
-            <a:off x="2626659" y="2375647"/>
-            <a:ext cx="0" cy="3845859"/>
-          </a:xfrm>
-          <a:prstGeom prst="line">
-            <a:avLst/>
-          </a:prstGeom>
-          <a:ln w="38100">
-            <a:solidFill>
-              <a:schemeClr val="tx1"/>
-            </a:solidFill>
-          </a:ln>
-        </p:spPr>
-        <p:style>
-          <a:lnRef idx="1">
-            <a:schemeClr val="accent1"/>
-          </a:lnRef>
-          <a:fillRef idx="0">
-            <a:schemeClr val="accent1"/>
-          </a:fillRef>
-          <a:effectRef idx="0">
-            <a:schemeClr val="accent1"/>
-          </a:effectRef>
-          <a:fontRef idx="minor">
-            <a:schemeClr val="tx1"/>
-          </a:fontRef>
-        </p:style>
-      </p:cxnSp>
-      <p:cxnSp>
-        <p:nvCxnSpPr>
-          <p:cNvPr id="13" name="直線矢印コネクタ 12">
-            <a:extLst>
-              <a:ext uri="{FF2B5EF4-FFF2-40B4-BE49-F238E27FC236}">
-                <a16:creationId xmlns:a16="http://schemas.microsoft.com/office/drawing/2014/main" id="{7A10B586-47D9-409D-82CA-5B4CF6A67078}"/>
-              </a:ext>
-            </a:extLst>
-          </p:cNvPr>
-          <p:cNvCxnSpPr>
-            <a:cxnSpLocks/>
-          </p:cNvCxnSpPr>
-          <p:nvPr/>
-        </p:nvCxnSpPr>
-        <p:spPr>
-          <a:xfrm>
-            <a:off x="2622749" y="4518212"/>
-            <a:ext cx="0" cy="1739154"/>
-          </a:xfrm>
-          <a:prstGeom prst="straightConnector1">
-            <a:avLst/>
-          </a:prstGeom>
-          <a:ln w="38100">
-            <a:solidFill>
-              <a:srgbClr val="FF0000"/>
-            </a:solidFill>
-            <a:tailEnd type="triangle"/>
-          </a:ln>
-        </p:spPr>
-        <p:style>
-          <a:lnRef idx="1">
-            <a:schemeClr val="accent1"/>
-          </a:lnRef>
-          <a:fillRef idx="0">
-            <a:schemeClr val="accent1"/>
-          </a:fillRef>
-          <a:effectRef idx="0">
-            <a:schemeClr val="accent1"/>
-          </a:effectRef>
-          <a:fontRef idx="minor">
-            <a:schemeClr val="tx1"/>
-          </a:fontRef>
-        </p:style>
-      </p:cxnSp>
-      <p:sp>
-        <p:nvSpPr>
-          <p:cNvPr id="15" name="テキスト ボックス 14">
-            <a:extLst>
-              <a:ext uri="{FF2B5EF4-FFF2-40B4-BE49-F238E27FC236}">
-                <a16:creationId xmlns:a16="http://schemas.microsoft.com/office/drawing/2014/main" id="{0D683768-130A-48D7-97BE-5320172C382A}"/>
-              </a:ext>
-            </a:extLst>
-          </p:cNvPr>
-          <p:cNvSpPr txBox="1"/>
-          <p:nvPr/>
-        </p:nvSpPr>
-        <p:spPr>
-          <a:xfrm>
-            <a:off x="2622749" y="5759841"/>
-            <a:ext cx="3262432" cy="461665"/>
-          </a:xfrm>
-          <a:prstGeom prst="rect">
-            <a:avLst/>
-          </a:prstGeom>
-          <a:noFill/>
-        </p:spPr>
-        <p:txBody>
-          <a:bodyPr wrap="none" rtlCol="0">
-            <a:spAutoFit/>
-          </a:bodyPr>
-          <a:lstStyle/>
-          <a:p>
-            <a:r>
-              <a:rPr kumimoji="1" lang="ja-JP" altLang="en-US" sz="2400" b="1" dirty="0">
-                <a:solidFill>
-                  <a:srgbClr val="FF0000"/>
-                </a:solidFill>
-              </a:rPr>
-              <a:t>求めたい接線ベクトル</a:t>
-            </a:r>
-            <a:endParaRPr kumimoji="1" lang="en-US" altLang="ja-JP" sz="2400" b="1" dirty="0">
-              <a:solidFill>
-                <a:srgbClr val="FF0000"/>
-              </a:solidFill>
-            </a:endParaRPr>
-          </a:p>
-        </p:txBody>
-      </p:sp>
-      <p:cxnSp>
-        <p:nvCxnSpPr>
-          <p:cNvPr id="16" name="直線矢印コネクタ 15">
-            <a:extLst>
-              <a:ext uri="{FF2B5EF4-FFF2-40B4-BE49-F238E27FC236}">
-                <a16:creationId xmlns:a16="http://schemas.microsoft.com/office/drawing/2014/main" id="{A853296A-BEAD-4B83-A403-6A406BA0C3E3}"/>
-              </a:ext>
-            </a:extLst>
-          </p:cNvPr>
-          <p:cNvCxnSpPr>
-            <a:cxnSpLocks/>
-          </p:cNvCxnSpPr>
-          <p:nvPr/>
-        </p:nvCxnSpPr>
-        <p:spPr>
-          <a:xfrm>
-            <a:off x="2620793" y="4518212"/>
-            <a:ext cx="503977" cy="0"/>
-          </a:xfrm>
-          <a:prstGeom prst="straightConnector1">
-            <a:avLst/>
-          </a:prstGeom>
-          <a:ln w="38100">
-            <a:solidFill>
-              <a:srgbClr val="00B050"/>
-            </a:solidFill>
-            <a:tailEnd type="triangle"/>
-          </a:ln>
-        </p:spPr>
-        <p:style>
-          <a:lnRef idx="1">
-            <a:schemeClr val="accent1"/>
-          </a:lnRef>
-          <a:fillRef idx="0">
-            <a:schemeClr val="accent1"/>
-          </a:fillRef>
-          <a:effectRef idx="0">
-            <a:schemeClr val="accent1"/>
-          </a:effectRef>
-          <a:fontRef idx="minor">
-            <a:schemeClr val="tx1"/>
-          </a:fontRef>
-        </p:style>
-      </p:cxnSp>
-      <p:sp>
-        <p:nvSpPr>
-          <p:cNvPr id="20" name="テキスト ボックス 19">
-            <a:extLst>
-              <a:ext uri="{FF2B5EF4-FFF2-40B4-BE49-F238E27FC236}">
-                <a16:creationId xmlns:a16="http://schemas.microsoft.com/office/drawing/2014/main" id="{C920F912-8757-4791-91BE-B2394D94D618}"/>
-              </a:ext>
-            </a:extLst>
-          </p:cNvPr>
-          <p:cNvSpPr txBox="1"/>
-          <p:nvPr/>
-        </p:nvSpPr>
-        <p:spPr>
-          <a:xfrm>
-            <a:off x="2622749" y="4020687"/>
-            <a:ext cx="2031325" cy="461665"/>
-          </a:xfrm>
-          <a:prstGeom prst="rect">
-            <a:avLst/>
-          </a:prstGeom>
-          <a:noFill/>
-        </p:spPr>
-        <p:txBody>
-          <a:bodyPr wrap="none" rtlCol="0">
-            <a:spAutoFit/>
-          </a:bodyPr>
-          <a:lstStyle/>
-          <a:p>
-            <a:r>
-              <a:rPr kumimoji="1" lang="ja-JP" altLang="en-US" sz="2400" b="1" dirty="0">
-                <a:solidFill>
-                  <a:srgbClr val="00B050"/>
-                </a:solidFill>
-              </a:rPr>
-              <a:t>法線ベクトル</a:t>
-            </a:r>
-            <a:endParaRPr kumimoji="1" lang="en-US" altLang="ja-JP" sz="2400" b="1" dirty="0">
-              <a:solidFill>
-                <a:srgbClr val="00B050"/>
-              </a:solidFill>
-            </a:endParaRPr>
-          </a:p>
-        </p:txBody>
-      </p:sp>
-      <p:sp>
-        <p:nvSpPr>
-          <p:cNvPr id="21" name="テキスト ボックス 20">
-            <a:extLst>
-              <a:ext uri="{FF2B5EF4-FFF2-40B4-BE49-F238E27FC236}">
-                <a16:creationId xmlns:a16="http://schemas.microsoft.com/office/drawing/2014/main" id="{896A4254-FE91-4290-906C-F55B81B69152}"/>
-              </a:ext>
-            </a:extLst>
-          </p:cNvPr>
-          <p:cNvSpPr txBox="1"/>
-          <p:nvPr/>
-        </p:nvSpPr>
-        <p:spPr>
-          <a:xfrm>
-            <a:off x="2048477" y="2345287"/>
-            <a:ext cx="492443" cy="461665"/>
-          </a:xfrm>
-          <a:prstGeom prst="rect">
-            <a:avLst/>
-          </a:prstGeom>
-          <a:noFill/>
-        </p:spPr>
-        <p:txBody>
-          <a:bodyPr wrap="none" rtlCol="0">
-            <a:spAutoFit/>
-          </a:bodyPr>
-          <a:lstStyle/>
-          <a:p>
-            <a:r>
-              <a:rPr kumimoji="1" lang="ja-JP" altLang="en-US" sz="2400" b="1" dirty="0"/>
-              <a:t>壁</a:t>
+              <a:rPr lang="ja-JP" altLang="en-US" sz="2400" b="1" dirty="0"/>
+              <a:t>マップチップ拡張</a:t>
             </a:r>
             <a:endParaRPr kumimoji="1" lang="en-US" altLang="ja-JP" sz="2400" b="1" dirty="0"/>
           </a:p>
@@ -4524,7 +4919,7 @@
     </p:spTree>
     <p:extLst>
       <p:ext uri="{BB962C8B-B14F-4D97-AF65-F5344CB8AC3E}">
-        <p14:creationId xmlns:p14="http://schemas.microsoft.com/office/powerpoint/2010/main" val="2434364075"/>
+        <p14:creationId xmlns:p14="http://schemas.microsoft.com/office/powerpoint/2010/main" val="2830833566"/>
       </p:ext>
     </p:extLst>
   </p:cSld>
@@ -4566,7 +4961,7 @@
         <p:spPr>
           <a:xfrm>
             <a:off x="567542" y="491954"/>
-            <a:ext cx="2646878" cy="584775"/>
+            <a:ext cx="6457217" cy="584775"/>
           </a:xfrm>
           <a:prstGeom prst="rect">
             <a:avLst/>
@@ -4581,7 +4976,7 @@
           <a:p>
             <a:r>
               <a:rPr kumimoji="1" lang="ja-JP" altLang="en-US" sz="3200" b="1" u="sng" dirty="0"/>
-              <a:t>接線ベクトル</a:t>
+              <a:t>当たり判定解説 マップチップ拡張</a:t>
             </a:r>
           </a:p>
         </p:txBody>
@@ -4601,7 +4996,7 @@
         <p:spPr>
           <a:xfrm>
             <a:off x="567542" y="1216429"/>
-            <a:ext cx="6647974" cy="830997"/>
+            <a:ext cx="10341293" cy="830997"/>
           </a:xfrm>
           <a:prstGeom prst="rect">
             <a:avLst/>
@@ -4615,15 +5010,15 @@
           <a:lstStyle/>
           <a:p>
             <a:r>
+              <a:rPr lang="ja-JP" altLang="en-US" sz="2400" dirty="0"/>
+              <a:t>坂、動く床などステージに関するものは全てマップチップで配置します。</a:t>
+            </a:r>
+            <a:endParaRPr lang="en-US" altLang="ja-JP" sz="2400" dirty="0"/>
+          </a:p>
+          <a:p>
+            <a:r>
               <a:rPr kumimoji="1" lang="ja-JP" altLang="en-US" sz="2400" dirty="0"/>
-              <a:t>バレットが斜めから壁に入ってきたとします。</a:t>
-            </a:r>
-            <a:endParaRPr lang="en-US" altLang="ja-JP" sz="2400" dirty="0"/>
-          </a:p>
-          <a:p>
-            <a:r>
-              <a:rPr kumimoji="1" lang="ja-JP" altLang="en-US" sz="2400" dirty="0"/>
-              <a:t>この時のベクトルを</a:t>
+              <a:t>これにより、当たり判定を</a:t>
             </a:r>
             <a:r>
               <a:rPr kumimoji="1" lang="ja-JP" altLang="en-US" sz="2400" b="1" dirty="0">
@@ -4631,195 +5026,82 @@
                   <a:srgbClr val="FF0000"/>
                 </a:solidFill>
               </a:rPr>
-              <a:t>入射ベクトル</a:t>
+              <a:t>１つの処理にまとめる</a:t>
             </a:r>
             <a:r>
               <a:rPr kumimoji="1" lang="ja-JP" altLang="en-US" sz="2400" dirty="0"/>
-              <a:t>とします。</a:t>
+              <a:t>ことができます。</a:t>
             </a:r>
             <a:endParaRPr kumimoji="1" lang="en-US" altLang="ja-JP" sz="2400" dirty="0"/>
           </a:p>
         </p:txBody>
       </p:sp>
-      <p:cxnSp>
-        <p:nvCxnSpPr>
-          <p:cNvPr id="14" name="直線コネクタ 13">
-            <a:extLst>
-              <a:ext uri="{FF2B5EF4-FFF2-40B4-BE49-F238E27FC236}">
-                <a16:creationId xmlns:a16="http://schemas.microsoft.com/office/drawing/2014/main" id="{B358283D-6549-45F9-9AE4-B5D8AD741137}"/>
-              </a:ext>
-            </a:extLst>
-          </p:cNvPr>
-          <p:cNvCxnSpPr/>
+      <p:pic>
+        <p:nvPicPr>
+          <p:cNvPr id="3" name="図 2">
+            <a:extLst>
+              <a:ext uri="{FF2B5EF4-FFF2-40B4-BE49-F238E27FC236}">
+                <a16:creationId xmlns:a16="http://schemas.microsoft.com/office/drawing/2014/main" id="{02D16D2E-899A-44ED-83EB-719E02E0567C}"/>
+              </a:ext>
+            </a:extLst>
+          </p:cNvPr>
+          <p:cNvPicPr>
+            <a:picLocks noChangeAspect="1"/>
+          </p:cNvPicPr>
           <p:nvPr/>
-        </p:nvCxnSpPr>
-        <p:spPr>
-          <a:xfrm>
-            <a:off x="2626659" y="2375647"/>
-            <a:ext cx="0" cy="3845859"/>
-          </a:xfrm>
-          <a:prstGeom prst="line">
+        </p:nvPicPr>
+        <p:blipFill>
+          <a:blip r:embed="rId2"/>
+          <a:stretch>
+            <a:fillRect/>
+          </a:stretch>
+        </p:blipFill>
+        <p:spPr>
+          <a:xfrm>
+            <a:off x="4411703" y="2047426"/>
+            <a:ext cx="6294869" cy="4249533"/>
+          </a:xfrm>
+          <a:prstGeom prst="rect">
             <a:avLst/>
           </a:prstGeom>
-          <a:ln w="38100">
-            <a:solidFill>
-              <a:schemeClr val="tx1"/>
-            </a:solidFill>
-          </a:ln>
-        </p:spPr>
-        <p:style>
-          <a:lnRef idx="1">
-            <a:schemeClr val="accent1"/>
-          </a:lnRef>
-          <a:fillRef idx="0">
-            <a:schemeClr val="accent1"/>
-          </a:fillRef>
-          <a:effectRef idx="0">
-            <a:schemeClr val="accent1"/>
-          </a:effectRef>
-          <a:fontRef idx="minor">
-            <a:schemeClr val="tx1"/>
-          </a:fontRef>
-        </p:style>
-      </p:cxnSp>
-      <p:cxnSp>
-        <p:nvCxnSpPr>
-          <p:cNvPr id="17" name="直線矢印コネクタ 16">
-            <a:extLst>
-              <a:ext uri="{FF2B5EF4-FFF2-40B4-BE49-F238E27FC236}">
-                <a16:creationId xmlns:a16="http://schemas.microsoft.com/office/drawing/2014/main" id="{AA32B8B0-432A-4055-B456-751DD8F0F481}"/>
-              </a:ext>
-            </a:extLst>
-          </p:cNvPr>
-          <p:cNvCxnSpPr>
-            <a:cxnSpLocks/>
-          </p:cNvCxnSpPr>
+        </p:spPr>
+      </p:pic>
+      <p:pic>
+        <p:nvPicPr>
+          <p:cNvPr id="8" name="図 7">
+            <a:extLst>
+              <a:ext uri="{FF2B5EF4-FFF2-40B4-BE49-F238E27FC236}">
+                <a16:creationId xmlns:a16="http://schemas.microsoft.com/office/drawing/2014/main" id="{3642DFF7-2310-47ED-AAEF-08A01DE06C21}"/>
+              </a:ext>
+            </a:extLst>
+          </p:cNvPr>
+          <p:cNvPicPr>
+            <a:picLocks noChangeAspect="1"/>
+          </p:cNvPicPr>
           <p:nvPr/>
-        </p:nvCxnSpPr>
-        <p:spPr>
-          <a:xfrm>
-            <a:off x="2622749" y="4518212"/>
-            <a:ext cx="0" cy="1739154"/>
-          </a:xfrm>
-          <a:prstGeom prst="straightConnector1">
+        </p:nvPicPr>
+        <p:blipFill>
+          <a:blip r:embed="rId3"/>
+          <a:stretch>
+            <a:fillRect/>
+          </a:stretch>
+        </p:blipFill>
+        <p:spPr>
+          <a:xfrm>
+            <a:off x="567542" y="2187126"/>
+            <a:ext cx="3515216" cy="2638793"/>
+          </a:xfrm>
+          <a:prstGeom prst="rect">
             <a:avLst/>
           </a:prstGeom>
-          <a:ln w="38100">
-            <a:solidFill>
-              <a:srgbClr val="FF0000"/>
-            </a:solidFill>
-            <a:tailEnd type="triangle"/>
-          </a:ln>
-        </p:spPr>
-        <p:style>
-          <a:lnRef idx="1">
-            <a:schemeClr val="accent1"/>
-          </a:lnRef>
-          <a:fillRef idx="0">
-            <a:schemeClr val="accent1"/>
-          </a:fillRef>
-          <a:effectRef idx="0">
-            <a:schemeClr val="accent1"/>
-          </a:effectRef>
-          <a:fontRef idx="minor">
-            <a:schemeClr val="tx1"/>
-          </a:fontRef>
-        </p:style>
-      </p:cxnSp>
-      <p:cxnSp>
-        <p:nvCxnSpPr>
-          <p:cNvPr id="19" name="直線矢印コネクタ 18">
-            <a:extLst>
-              <a:ext uri="{FF2B5EF4-FFF2-40B4-BE49-F238E27FC236}">
-                <a16:creationId xmlns:a16="http://schemas.microsoft.com/office/drawing/2014/main" id="{B2EFC0F0-318B-49D0-B2F5-63EF8062F134}"/>
-              </a:ext>
-            </a:extLst>
-          </p:cNvPr>
-          <p:cNvCxnSpPr>
-            <a:cxnSpLocks/>
-          </p:cNvCxnSpPr>
-          <p:nvPr/>
-        </p:nvCxnSpPr>
-        <p:spPr>
-          <a:xfrm>
-            <a:off x="2620793" y="4518212"/>
-            <a:ext cx="503977" cy="0"/>
-          </a:xfrm>
-          <a:prstGeom prst="straightConnector1">
-            <a:avLst/>
-          </a:prstGeom>
-          <a:ln w="38100">
-            <a:solidFill>
-              <a:srgbClr val="00B050"/>
-            </a:solidFill>
-            <a:tailEnd type="triangle"/>
-          </a:ln>
-        </p:spPr>
-        <p:style>
-          <a:lnRef idx="1">
-            <a:schemeClr val="accent1"/>
-          </a:lnRef>
-          <a:fillRef idx="0">
-            <a:schemeClr val="accent1"/>
-          </a:fillRef>
-          <a:effectRef idx="0">
-            <a:schemeClr val="accent1"/>
-          </a:effectRef>
-          <a:fontRef idx="minor">
-            <a:schemeClr val="tx1"/>
-          </a:fontRef>
-        </p:style>
-      </p:cxnSp>
-      <p:cxnSp>
-        <p:nvCxnSpPr>
-          <p:cNvPr id="24" name="直線矢印コネクタ 23">
-            <a:extLst>
-              <a:ext uri="{FF2B5EF4-FFF2-40B4-BE49-F238E27FC236}">
-                <a16:creationId xmlns:a16="http://schemas.microsoft.com/office/drawing/2014/main" id="{22F826EF-A5C7-482A-95C6-607021FA4574}"/>
-              </a:ext>
-            </a:extLst>
-          </p:cNvPr>
-          <p:cNvCxnSpPr>
-            <a:cxnSpLocks/>
-          </p:cNvCxnSpPr>
-          <p:nvPr/>
-        </p:nvCxnSpPr>
-        <p:spPr>
-          <a:xfrm flipH="1">
-            <a:off x="2632526" y="2796988"/>
-            <a:ext cx="1559859" cy="1721224"/>
-          </a:xfrm>
-          <a:prstGeom prst="straightConnector1">
-            <a:avLst/>
-          </a:prstGeom>
-          <a:ln w="38100">
-            <a:solidFill>
-              <a:srgbClr val="0070C0"/>
-            </a:solidFill>
-            <a:tailEnd type="triangle"/>
-          </a:ln>
-        </p:spPr>
-        <p:style>
-          <a:lnRef idx="1">
-            <a:schemeClr val="accent1"/>
-          </a:lnRef>
-          <a:fillRef idx="0">
-            <a:schemeClr val="accent1"/>
-          </a:fillRef>
-          <a:effectRef idx="0">
-            <a:schemeClr val="accent1"/>
-          </a:effectRef>
-          <a:fontRef idx="minor">
-            <a:schemeClr val="tx1"/>
-          </a:fontRef>
-        </p:style>
-      </p:cxnSp>
-      <p:sp>
-        <p:nvSpPr>
-          <p:cNvPr id="25" name="テキスト ボックス 24">
-            <a:extLst>
-              <a:ext uri="{FF2B5EF4-FFF2-40B4-BE49-F238E27FC236}">
-                <a16:creationId xmlns:a16="http://schemas.microsoft.com/office/drawing/2014/main" id="{4F31617E-0B4D-4112-9669-7AA7A3C92641}"/>
+        </p:spPr>
+      </p:pic>
+      <p:sp>
+        <p:nvSpPr>
+          <p:cNvPr id="9" name="テキスト ボックス 8">
+            <a:extLst>
+              <a:ext uri="{FF2B5EF4-FFF2-40B4-BE49-F238E27FC236}">
+                <a16:creationId xmlns:a16="http://schemas.microsoft.com/office/drawing/2014/main" id="{1E057EF1-CB7D-4BF8-BEC7-E27060B4416C}"/>
               </a:ext>
             </a:extLst>
           </p:cNvPr>
@@ -4828,8 +5110,8 @@
         </p:nvSpPr>
         <p:spPr>
           <a:xfrm>
-            <a:off x="3534858" y="3493464"/>
-            <a:ext cx="2031325" cy="461665"/>
+            <a:off x="8913683" y="6296959"/>
+            <a:ext cx="2863284" cy="369332"/>
           </a:xfrm>
           <a:prstGeom prst="rect">
             <a:avLst/>
@@ -4843,16 +5125,24 @@
           <a:lstStyle/>
           <a:p>
             <a:r>
-              <a:rPr kumimoji="1" lang="ja-JP" altLang="en-US" sz="2400" b="1" dirty="0">
+              <a:rPr kumimoji="1" lang="en-US" altLang="ja-JP" b="1" dirty="0">
                 <a:solidFill>
-                  <a:srgbClr val="0070C0"/>
+                  <a:srgbClr val="FF0000"/>
                 </a:solidFill>
               </a:rPr>
-              <a:t>入射ベクトル</a:t>
-            </a:r>
-            <a:endParaRPr kumimoji="1" lang="en-US" altLang="ja-JP" sz="2400" b="1" dirty="0">
+              <a:t>※Excel</a:t>
+            </a:r>
+            <a:r>
+              <a:rPr kumimoji="1" lang="ja-JP" altLang="en-US" b="1" dirty="0">
+                <a:solidFill>
+                  <a:srgbClr val="FF0000"/>
+                </a:solidFill>
+              </a:rPr>
+              <a:t>側も対応してます</a:t>
+            </a:r>
+            <a:endParaRPr kumimoji="1" lang="en-US" altLang="ja-JP" b="1" dirty="0">
               <a:solidFill>
-                <a:srgbClr val="0070C0"/>
+                <a:srgbClr val="FF0000"/>
               </a:solidFill>
             </a:endParaRPr>
           </a:p>
@@ -4861,7 +5151,7 @@
     </p:spTree>
     <p:extLst>
       <p:ext uri="{BB962C8B-B14F-4D97-AF65-F5344CB8AC3E}">
-        <p14:creationId xmlns:p14="http://schemas.microsoft.com/office/powerpoint/2010/main" val="3112545165"/>
+        <p14:creationId xmlns:p14="http://schemas.microsoft.com/office/powerpoint/2010/main" val="3021424490"/>
       </p:ext>
     </p:extLst>
   </p:cSld>
@@ -4890,10 +5180,10 @@
       </p:grpSpPr>
       <p:sp>
         <p:nvSpPr>
-          <p:cNvPr id="4" name="テキスト ボックス 3">
-            <a:extLst>
-              <a:ext uri="{FF2B5EF4-FFF2-40B4-BE49-F238E27FC236}">
-                <a16:creationId xmlns:a16="http://schemas.microsoft.com/office/drawing/2014/main" id="{5A13BF46-B8C5-48AA-8308-C9ECFF431A18}"/>
+          <p:cNvPr id="6" name="テキスト ボックス 5">
+            <a:extLst>
+              <a:ext uri="{FF2B5EF4-FFF2-40B4-BE49-F238E27FC236}">
+                <a16:creationId xmlns:a16="http://schemas.microsoft.com/office/drawing/2014/main" id="{55830AD6-028B-4C4E-80BF-B70DFC1C3A46}"/>
               </a:ext>
             </a:extLst>
           </p:cNvPr>
@@ -4902,8 +5192,8 @@
         </p:nvSpPr>
         <p:spPr>
           <a:xfrm>
-            <a:off x="567542" y="491954"/>
-            <a:ext cx="2646878" cy="584775"/>
+            <a:off x="5165297" y="3198168"/>
+            <a:ext cx="1861407" cy="461665"/>
           </a:xfrm>
           <a:prstGeom prst="rect">
             <a:avLst/>
@@ -4917,237 +5207,21 @@
           <a:lstStyle/>
           <a:p>
             <a:r>
-              <a:rPr kumimoji="1" lang="ja-JP" altLang="en-US" sz="3200" b="1" u="sng" dirty="0"/>
-              <a:t>接線ベクトル</a:t>
-            </a:r>
-          </a:p>
-        </p:txBody>
-      </p:sp>
-      <p:sp>
-        <p:nvSpPr>
-          <p:cNvPr id="6" name="テキスト ボックス 5">
-            <a:extLst>
-              <a:ext uri="{FF2B5EF4-FFF2-40B4-BE49-F238E27FC236}">
-                <a16:creationId xmlns:a16="http://schemas.microsoft.com/office/drawing/2014/main" id="{55830AD6-028B-4C4E-80BF-B70DFC1C3A46}"/>
-              </a:ext>
-            </a:extLst>
-          </p:cNvPr>
-          <p:cNvSpPr txBox="1"/>
-          <p:nvPr/>
-        </p:nvSpPr>
-        <p:spPr>
-          <a:xfrm>
-            <a:off x="567542" y="1216429"/>
-            <a:ext cx="8494633" cy="461665"/>
-          </a:xfrm>
-          <a:prstGeom prst="rect">
-            <a:avLst/>
-          </a:prstGeom>
-          <a:noFill/>
-        </p:spPr>
-        <p:txBody>
-          <a:bodyPr wrap="none" rtlCol="0">
-            <a:spAutoFit/>
-          </a:bodyPr>
-          <a:lstStyle/>
-          <a:p>
-            <a:r>
-              <a:rPr kumimoji="1" lang="ja-JP" altLang="en-US" sz="2400" dirty="0"/>
-              <a:t>接線ベクトル求めるには、まず</a:t>
-            </a:r>
-            <a:r>
-              <a:rPr kumimoji="1" lang="ja-JP" altLang="en-US" sz="2400" b="1" dirty="0">
-                <a:solidFill>
-                  <a:srgbClr val="FF0000"/>
-                </a:solidFill>
-              </a:rPr>
-              <a:t>入射ベクトルを反転</a:t>
-            </a:r>
-            <a:r>
-              <a:rPr kumimoji="1" lang="ja-JP" altLang="en-US" sz="2400" dirty="0"/>
-              <a:t>します。</a:t>
-            </a:r>
-            <a:endParaRPr kumimoji="1" lang="en-US" altLang="ja-JP" sz="2400" dirty="0"/>
-          </a:p>
-        </p:txBody>
-      </p:sp>
-      <p:cxnSp>
-        <p:nvCxnSpPr>
-          <p:cNvPr id="14" name="直線コネクタ 13">
-            <a:extLst>
-              <a:ext uri="{FF2B5EF4-FFF2-40B4-BE49-F238E27FC236}">
-                <a16:creationId xmlns:a16="http://schemas.microsoft.com/office/drawing/2014/main" id="{B358283D-6549-45F9-9AE4-B5D8AD741137}"/>
-              </a:ext>
-            </a:extLst>
-          </p:cNvPr>
-          <p:cNvCxnSpPr/>
-          <p:nvPr/>
-        </p:nvCxnSpPr>
-        <p:spPr>
-          <a:xfrm>
-            <a:off x="2626659" y="2375647"/>
-            <a:ext cx="0" cy="3845859"/>
-          </a:xfrm>
-          <a:prstGeom prst="line">
-            <a:avLst/>
-          </a:prstGeom>
-          <a:ln w="38100">
-            <a:solidFill>
-              <a:schemeClr val="tx1"/>
-            </a:solidFill>
-          </a:ln>
-        </p:spPr>
-        <p:style>
-          <a:lnRef idx="1">
-            <a:schemeClr val="accent1"/>
-          </a:lnRef>
-          <a:fillRef idx="0">
-            <a:schemeClr val="accent1"/>
-          </a:fillRef>
-          <a:effectRef idx="0">
-            <a:schemeClr val="accent1"/>
-          </a:effectRef>
-          <a:fontRef idx="minor">
-            <a:schemeClr val="tx1"/>
-          </a:fontRef>
-        </p:style>
-      </p:cxnSp>
-      <p:cxnSp>
-        <p:nvCxnSpPr>
-          <p:cNvPr id="17" name="直線矢印コネクタ 16">
-            <a:extLst>
-              <a:ext uri="{FF2B5EF4-FFF2-40B4-BE49-F238E27FC236}">
-                <a16:creationId xmlns:a16="http://schemas.microsoft.com/office/drawing/2014/main" id="{AA32B8B0-432A-4055-B456-751DD8F0F481}"/>
-              </a:ext>
-            </a:extLst>
-          </p:cNvPr>
-          <p:cNvCxnSpPr>
-            <a:cxnSpLocks/>
-          </p:cNvCxnSpPr>
-          <p:nvPr/>
-        </p:nvCxnSpPr>
-        <p:spPr>
-          <a:xfrm>
-            <a:off x="2622749" y="4518212"/>
-            <a:ext cx="0" cy="1739154"/>
-          </a:xfrm>
-          <a:prstGeom prst="straightConnector1">
-            <a:avLst/>
-          </a:prstGeom>
-          <a:ln w="38100">
-            <a:solidFill>
-              <a:srgbClr val="FF0000"/>
-            </a:solidFill>
-            <a:tailEnd type="triangle"/>
-          </a:ln>
-        </p:spPr>
-        <p:style>
-          <a:lnRef idx="1">
-            <a:schemeClr val="accent1"/>
-          </a:lnRef>
-          <a:fillRef idx="0">
-            <a:schemeClr val="accent1"/>
-          </a:fillRef>
-          <a:effectRef idx="0">
-            <a:schemeClr val="accent1"/>
-          </a:effectRef>
-          <a:fontRef idx="minor">
-            <a:schemeClr val="tx1"/>
-          </a:fontRef>
-        </p:style>
-      </p:cxnSp>
-      <p:cxnSp>
-        <p:nvCxnSpPr>
-          <p:cNvPr id="19" name="直線矢印コネクタ 18">
-            <a:extLst>
-              <a:ext uri="{FF2B5EF4-FFF2-40B4-BE49-F238E27FC236}">
-                <a16:creationId xmlns:a16="http://schemas.microsoft.com/office/drawing/2014/main" id="{B2EFC0F0-318B-49D0-B2F5-63EF8062F134}"/>
-              </a:ext>
-            </a:extLst>
-          </p:cNvPr>
-          <p:cNvCxnSpPr>
-            <a:cxnSpLocks/>
-          </p:cNvCxnSpPr>
-          <p:nvPr/>
-        </p:nvCxnSpPr>
-        <p:spPr>
-          <a:xfrm>
-            <a:off x="2620793" y="4518212"/>
-            <a:ext cx="503977" cy="0"/>
-          </a:xfrm>
-          <a:prstGeom prst="straightConnector1">
-            <a:avLst/>
-          </a:prstGeom>
-          <a:ln w="38100">
-            <a:solidFill>
-              <a:srgbClr val="00B050"/>
-            </a:solidFill>
-            <a:tailEnd type="triangle"/>
-          </a:ln>
-        </p:spPr>
-        <p:style>
-          <a:lnRef idx="1">
-            <a:schemeClr val="accent1"/>
-          </a:lnRef>
-          <a:fillRef idx="0">
-            <a:schemeClr val="accent1"/>
-          </a:fillRef>
-          <a:effectRef idx="0">
-            <a:schemeClr val="accent1"/>
-          </a:effectRef>
-          <a:fontRef idx="minor">
-            <a:schemeClr val="tx1"/>
-          </a:fontRef>
-        </p:style>
-      </p:cxnSp>
-      <p:cxnSp>
-        <p:nvCxnSpPr>
-          <p:cNvPr id="9" name="直線矢印コネクタ 8">
-            <a:extLst>
-              <a:ext uri="{FF2B5EF4-FFF2-40B4-BE49-F238E27FC236}">
-                <a16:creationId xmlns:a16="http://schemas.microsoft.com/office/drawing/2014/main" id="{6388B2E3-DF44-43E7-B107-294819B84E00}"/>
-              </a:ext>
-            </a:extLst>
-          </p:cNvPr>
-          <p:cNvCxnSpPr>
-            <a:cxnSpLocks/>
-          </p:cNvCxnSpPr>
-          <p:nvPr/>
-        </p:nvCxnSpPr>
-        <p:spPr>
-          <a:xfrm flipV="1">
-            <a:off x="2614597" y="2796988"/>
-            <a:ext cx="1559859" cy="1721224"/>
-          </a:xfrm>
-          <a:prstGeom prst="straightConnector1">
-            <a:avLst/>
-          </a:prstGeom>
-          <a:ln w="38100">
-            <a:solidFill>
-              <a:srgbClr val="0070C0"/>
-            </a:solidFill>
-            <a:tailEnd type="triangle"/>
-          </a:ln>
-        </p:spPr>
-        <p:style>
-          <a:lnRef idx="1">
-            <a:schemeClr val="accent1"/>
-          </a:lnRef>
-          <a:fillRef idx="0">
-            <a:schemeClr val="accent1"/>
-          </a:fillRef>
-          <a:effectRef idx="0">
-            <a:schemeClr val="accent1"/>
-          </a:effectRef>
-          <a:fontRef idx="minor">
-            <a:schemeClr val="tx1"/>
-          </a:fontRef>
-        </p:style>
-      </p:cxnSp>
+              <a:rPr lang="en-US" altLang="ja-JP" sz="2400" b="1" dirty="0"/>
+              <a:t>Body</a:t>
+            </a:r>
+            <a:r>
+              <a:rPr lang="ja-JP" altLang="en-US" sz="2400" b="1" dirty="0"/>
+              <a:t>構造体</a:t>
+            </a:r>
+            <a:endParaRPr kumimoji="1" lang="en-US" altLang="ja-JP" sz="2400" b="1" dirty="0"/>
+          </a:p>
+        </p:txBody>
+      </p:sp>
     </p:spTree>
     <p:extLst>
       <p:ext uri="{BB962C8B-B14F-4D97-AF65-F5344CB8AC3E}">
-        <p14:creationId xmlns:p14="http://schemas.microsoft.com/office/powerpoint/2010/main" val="3677992453"/>
+        <p14:creationId xmlns:p14="http://schemas.microsoft.com/office/powerpoint/2010/main" val="2481782397"/>
       </p:ext>
     </p:extLst>
   </p:cSld>
@@ -5189,7 +5263,7 @@
         <p:spPr>
           <a:xfrm>
             <a:off x="567542" y="491954"/>
-            <a:ext cx="2646878" cy="584775"/>
+            <a:ext cx="5412059" cy="584775"/>
           </a:xfrm>
           <a:prstGeom prst="rect">
             <a:avLst/>
@@ -5204,7 +5278,15 @@
           <a:p>
             <a:r>
               <a:rPr kumimoji="1" lang="ja-JP" altLang="en-US" sz="3200" b="1" u="sng" dirty="0"/>
-              <a:t>接線ベクトル</a:t>
+              <a:t>当たり判定解説 </a:t>
+            </a:r>
+            <a:r>
+              <a:rPr kumimoji="1" lang="en-US" altLang="ja-JP" sz="3200" b="1" u="sng" dirty="0"/>
+              <a:t>Body</a:t>
+            </a:r>
+            <a:r>
+              <a:rPr kumimoji="1" lang="ja-JP" altLang="en-US" sz="3200" b="1" u="sng" dirty="0"/>
+              <a:t>構造体</a:t>
             </a:r>
           </a:p>
         </p:txBody>
@@ -5224,7 +5306,7 @@
         <p:spPr>
           <a:xfrm>
             <a:off x="567542" y="1216429"/>
-            <a:ext cx="7879080" cy="830997"/>
+            <a:ext cx="11094704" cy="830997"/>
           </a:xfrm>
           <a:prstGeom prst="rect">
             <a:avLst/>
@@ -5238,292 +5320,250 @@
           <a:lstStyle/>
           <a:p>
             <a:r>
+              <a:rPr lang="ja-JP" altLang="en-US" sz="2400" dirty="0"/>
+              <a:t>当たり判定と衝突解決に必要な変数は</a:t>
+            </a:r>
+            <a:r>
+              <a:rPr lang="en-US" altLang="ja-JP" sz="2400" b="1" dirty="0">
+                <a:solidFill>
+                  <a:srgbClr val="00B050"/>
+                </a:solidFill>
+              </a:rPr>
+              <a:t>Body</a:t>
+            </a:r>
+            <a:r>
               <a:rPr lang="ja-JP" altLang="en-US" sz="2400" b="1" dirty="0">
                 <a:solidFill>
-                  <a:srgbClr val="FF0000"/>
+                  <a:srgbClr val="00B050"/>
                 </a:solidFill>
               </a:rPr>
-              <a:t>反転したベクトルと法線ベクトルの内積</a:t>
+              <a:t>構造体</a:t>
             </a:r>
             <a:r>
               <a:rPr lang="ja-JP" altLang="en-US" sz="2400" dirty="0"/>
-              <a:t>を計算すると、</a:t>
+              <a:t>にまとめてます。</a:t>
             </a:r>
             <a:endParaRPr lang="en-US" altLang="ja-JP" sz="2400" dirty="0"/>
           </a:p>
           <a:p>
             <a:r>
-              <a:rPr kumimoji="1" lang="ja-JP" altLang="en-US" sz="2400" b="1" dirty="0">
+              <a:rPr kumimoji="1" lang="ja-JP" altLang="en-US" sz="2400" dirty="0"/>
+              <a:t>これでどのようなオブジェクトも</a:t>
+            </a:r>
+            <a:r>
+              <a:rPr kumimoji="1" lang="en-US" altLang="ja-JP" sz="2400" b="1" dirty="0">
                 <a:solidFill>
-                  <a:srgbClr val="FF0000"/>
+                  <a:srgbClr val="00B050"/>
                 </a:solidFill>
               </a:rPr>
-              <a:t>横の投影</a:t>
+              <a:t>Body</a:t>
             </a:r>
             <a:r>
               <a:rPr kumimoji="1" lang="ja-JP" altLang="en-US" sz="2400" dirty="0"/>
-              <a:t>を計算することができます。</a:t>
+              <a:t>を用意すれば当たり判定ができます。</a:t>
             </a:r>
             <a:endParaRPr kumimoji="1" lang="en-US" altLang="ja-JP" sz="2400" dirty="0"/>
           </a:p>
         </p:txBody>
       </p:sp>
-      <p:cxnSp>
-        <p:nvCxnSpPr>
-          <p:cNvPr id="14" name="直線コネクタ 13">
-            <a:extLst>
-              <a:ext uri="{FF2B5EF4-FFF2-40B4-BE49-F238E27FC236}">
-                <a16:creationId xmlns:a16="http://schemas.microsoft.com/office/drawing/2014/main" id="{B358283D-6549-45F9-9AE4-B5D8AD741137}"/>
-              </a:ext>
-            </a:extLst>
-          </p:cNvPr>
-          <p:cNvCxnSpPr/>
+      <p:pic>
+        <p:nvPicPr>
+          <p:cNvPr id="5" name="図 4">
+            <a:extLst>
+              <a:ext uri="{FF2B5EF4-FFF2-40B4-BE49-F238E27FC236}">
+                <a16:creationId xmlns:a16="http://schemas.microsoft.com/office/drawing/2014/main" id="{E15134B8-4B5B-46ED-B055-845F00DE30A9}"/>
+              </a:ext>
+            </a:extLst>
+          </p:cNvPr>
+          <p:cNvPicPr>
+            <a:picLocks noChangeAspect="1"/>
+          </p:cNvPicPr>
           <p:nvPr/>
-        </p:nvCxnSpPr>
-        <p:spPr>
-          <a:xfrm>
-            <a:off x="2626659" y="2375647"/>
-            <a:ext cx="0" cy="3845859"/>
-          </a:xfrm>
-          <a:prstGeom prst="line">
+        </p:nvPicPr>
+        <p:blipFill>
+          <a:blip r:embed="rId2"/>
+          <a:stretch>
+            <a:fillRect/>
+          </a:stretch>
+        </p:blipFill>
+        <p:spPr>
+          <a:xfrm>
+            <a:off x="567542" y="2187126"/>
+            <a:ext cx="2901799" cy="2277010"/>
+          </a:xfrm>
+          <a:prstGeom prst="rect">
             <a:avLst/>
           </a:prstGeom>
+        </p:spPr>
+      </p:pic>
+      <p:pic>
+        <p:nvPicPr>
+          <p:cNvPr id="10" name="図 9">
+            <a:extLst>
+              <a:ext uri="{FF2B5EF4-FFF2-40B4-BE49-F238E27FC236}">
+                <a16:creationId xmlns:a16="http://schemas.microsoft.com/office/drawing/2014/main" id="{8BA0099B-A5E9-485A-90DB-B3521AE2473D}"/>
+              </a:ext>
+            </a:extLst>
+          </p:cNvPr>
+          <p:cNvPicPr>
+            <a:picLocks noChangeAspect="1"/>
+          </p:cNvPicPr>
+          <p:nvPr/>
+        </p:nvPicPr>
+        <p:blipFill>
+          <a:blip r:embed="rId3"/>
+          <a:stretch>
+            <a:fillRect/>
+          </a:stretch>
+        </p:blipFill>
+        <p:spPr>
+          <a:xfrm>
+            <a:off x="3981674" y="2187126"/>
+            <a:ext cx="2568428" cy="1824371"/>
+          </a:xfrm>
+          <a:prstGeom prst="rect">
+            <a:avLst/>
+          </a:prstGeom>
+        </p:spPr>
+      </p:pic>
+      <p:sp>
+        <p:nvSpPr>
+          <p:cNvPr id="11" name="正方形/長方形 10">
+            <a:extLst>
+              <a:ext uri="{FF2B5EF4-FFF2-40B4-BE49-F238E27FC236}">
+                <a16:creationId xmlns:a16="http://schemas.microsoft.com/office/drawing/2014/main" id="{32E32AFA-2AB7-41C9-A535-7C78C99456C2}"/>
+              </a:ext>
+            </a:extLst>
+          </p:cNvPr>
+          <p:cNvSpPr/>
+          <p:nvPr/>
+        </p:nvSpPr>
+        <p:spPr>
+          <a:xfrm>
+            <a:off x="5029200" y="3088714"/>
+            <a:ext cx="1066800" cy="318247"/>
+          </a:xfrm>
+          <a:prstGeom prst="rect">
+            <a:avLst/>
+          </a:prstGeom>
+          <a:noFill/>
           <a:ln w="38100">
             <a:solidFill>
-              <a:schemeClr val="tx1"/>
+              <a:srgbClr val="FF0000"/>
             </a:solidFill>
           </a:ln>
         </p:spPr>
         <p:style>
-          <a:lnRef idx="1">
-            <a:schemeClr val="accent1"/>
+          <a:lnRef idx="2">
+            <a:schemeClr val="accent1">
+              <a:shade val="50000"/>
+            </a:schemeClr>
           </a:lnRef>
-          <a:fillRef idx="0">
+          <a:fillRef idx="1">
             <a:schemeClr val="accent1"/>
           </a:fillRef>
           <a:effectRef idx="0">
             <a:schemeClr val="accent1"/>
           </a:effectRef>
           <a:fontRef idx="minor">
-            <a:schemeClr val="tx1"/>
+            <a:schemeClr val="lt1"/>
           </a:fontRef>
         </p:style>
-      </p:cxnSp>
-      <p:cxnSp>
-        <p:nvCxnSpPr>
-          <p:cNvPr id="17" name="直線矢印コネクタ 16">
-            <a:extLst>
-              <a:ext uri="{FF2B5EF4-FFF2-40B4-BE49-F238E27FC236}">
-                <a16:creationId xmlns:a16="http://schemas.microsoft.com/office/drawing/2014/main" id="{AA32B8B0-432A-4055-B456-751DD8F0F481}"/>
-              </a:ext>
-            </a:extLst>
-          </p:cNvPr>
-          <p:cNvCxnSpPr>
-            <a:cxnSpLocks/>
-          </p:cNvCxnSpPr>
+        <p:txBody>
+          <a:bodyPr rtlCol="0" anchor="ctr"/>
+          <a:lstStyle/>
+          <a:p>
+            <a:pPr algn="ctr"/>
+            <a:endParaRPr kumimoji="1" lang="ja-JP" altLang="en-US"/>
+          </a:p>
+        </p:txBody>
+      </p:sp>
+      <p:pic>
+        <p:nvPicPr>
+          <p:cNvPr id="15" name="図 14">
+            <a:extLst>
+              <a:ext uri="{FF2B5EF4-FFF2-40B4-BE49-F238E27FC236}">
+                <a16:creationId xmlns:a16="http://schemas.microsoft.com/office/drawing/2014/main" id="{D765CCBA-1034-4C6C-808F-4C3F47E0A9A1}"/>
+              </a:ext>
+            </a:extLst>
+          </p:cNvPr>
+          <p:cNvPicPr>
+            <a:picLocks noChangeAspect="1"/>
+          </p:cNvPicPr>
           <p:nvPr/>
-        </p:nvCxnSpPr>
-        <p:spPr>
-          <a:xfrm>
-            <a:off x="2622749" y="4518212"/>
-            <a:ext cx="0" cy="1739154"/>
-          </a:xfrm>
-          <a:prstGeom prst="straightConnector1">
+        </p:nvPicPr>
+        <p:blipFill>
+          <a:blip r:embed="rId4"/>
+          <a:stretch>
+            <a:fillRect/>
+          </a:stretch>
+        </p:blipFill>
+        <p:spPr>
+          <a:xfrm>
+            <a:off x="6736344" y="2187126"/>
+            <a:ext cx="4711241" cy="2025913"/>
+          </a:xfrm>
+          <a:prstGeom prst="rect">
             <a:avLst/>
           </a:prstGeom>
+        </p:spPr>
+      </p:pic>
+      <p:sp>
+        <p:nvSpPr>
+          <p:cNvPr id="16" name="正方形/長方形 15">
+            <a:extLst>
+              <a:ext uri="{FF2B5EF4-FFF2-40B4-BE49-F238E27FC236}">
+                <a16:creationId xmlns:a16="http://schemas.microsoft.com/office/drawing/2014/main" id="{31FD58B8-172C-465D-B123-76B7495147B5}"/>
+              </a:ext>
+            </a:extLst>
+          </p:cNvPr>
+          <p:cNvSpPr/>
+          <p:nvPr/>
+        </p:nvSpPr>
+        <p:spPr>
+          <a:xfrm>
+            <a:off x="7862048" y="3007384"/>
+            <a:ext cx="1066800" cy="318247"/>
+          </a:xfrm>
+          <a:prstGeom prst="rect">
+            <a:avLst/>
+          </a:prstGeom>
+          <a:noFill/>
           <a:ln w="38100">
             <a:solidFill>
               <a:srgbClr val="FF0000"/>
             </a:solidFill>
-            <a:tailEnd type="triangle"/>
           </a:ln>
         </p:spPr>
         <p:style>
-          <a:lnRef idx="1">
-            <a:schemeClr val="accent1"/>
+          <a:lnRef idx="2">
+            <a:schemeClr val="accent1">
+              <a:shade val="50000"/>
+            </a:schemeClr>
           </a:lnRef>
-          <a:fillRef idx="0">
+          <a:fillRef idx="1">
             <a:schemeClr val="accent1"/>
           </a:fillRef>
           <a:effectRef idx="0">
             <a:schemeClr val="accent1"/>
           </a:effectRef>
           <a:fontRef idx="minor">
-            <a:schemeClr val="tx1"/>
+            <a:schemeClr val="lt1"/>
           </a:fontRef>
         </p:style>
-      </p:cxnSp>
-      <p:cxnSp>
-        <p:nvCxnSpPr>
-          <p:cNvPr id="19" name="直線矢印コネクタ 18">
-            <a:extLst>
-              <a:ext uri="{FF2B5EF4-FFF2-40B4-BE49-F238E27FC236}">
-                <a16:creationId xmlns:a16="http://schemas.microsoft.com/office/drawing/2014/main" id="{B2EFC0F0-318B-49D0-B2F5-63EF8062F134}"/>
-              </a:ext>
-            </a:extLst>
-          </p:cNvPr>
-          <p:cNvCxnSpPr>
-            <a:cxnSpLocks/>
-          </p:cNvCxnSpPr>
-          <p:nvPr/>
-        </p:nvCxnSpPr>
-        <p:spPr>
-          <a:xfrm>
-            <a:off x="2620793" y="4518212"/>
-            <a:ext cx="503977" cy="0"/>
-          </a:xfrm>
-          <a:prstGeom prst="straightConnector1">
-            <a:avLst/>
-          </a:prstGeom>
-          <a:ln w="38100">
-            <a:solidFill>
-              <a:srgbClr val="00B050"/>
-            </a:solidFill>
-            <a:tailEnd type="triangle"/>
-          </a:ln>
-        </p:spPr>
-        <p:style>
-          <a:lnRef idx="1">
-            <a:schemeClr val="accent1"/>
-          </a:lnRef>
-          <a:fillRef idx="0">
-            <a:schemeClr val="accent1"/>
-          </a:fillRef>
-          <a:effectRef idx="0">
-            <a:schemeClr val="accent1"/>
-          </a:effectRef>
-          <a:fontRef idx="minor">
-            <a:schemeClr val="tx1"/>
-          </a:fontRef>
-        </p:style>
-      </p:cxnSp>
-      <p:sp>
-        <p:nvSpPr>
-          <p:cNvPr id="25" name="テキスト ボックス 24">
-            <a:extLst>
-              <a:ext uri="{FF2B5EF4-FFF2-40B4-BE49-F238E27FC236}">
-                <a16:creationId xmlns:a16="http://schemas.microsoft.com/office/drawing/2014/main" id="{4F31617E-0B4D-4112-9669-7AA7A3C92641}"/>
-              </a:ext>
-            </a:extLst>
-          </p:cNvPr>
-          <p:cNvSpPr txBox="1"/>
-          <p:nvPr/>
-        </p:nvSpPr>
-        <p:spPr>
-          <a:xfrm>
-            <a:off x="2996538" y="4610108"/>
-            <a:ext cx="800219" cy="461665"/>
-          </a:xfrm>
-          <a:prstGeom prst="rect">
-            <a:avLst/>
-          </a:prstGeom>
-          <a:noFill/>
-        </p:spPr>
-        <p:txBody>
-          <a:bodyPr wrap="none" rtlCol="0">
-            <a:spAutoFit/>
-          </a:bodyPr>
-          <a:lstStyle/>
-          <a:p>
-            <a:r>
-              <a:rPr lang="ja-JP" altLang="en-US" sz="2400" b="1" dirty="0"/>
-              <a:t>投影</a:t>
-            </a:r>
-            <a:endParaRPr kumimoji="1" lang="en-US" altLang="ja-JP" sz="2400" b="1" dirty="0"/>
-          </a:p>
-        </p:txBody>
-      </p:sp>
-      <p:cxnSp>
-        <p:nvCxnSpPr>
-          <p:cNvPr id="9" name="直線矢印コネクタ 8">
-            <a:extLst>
-              <a:ext uri="{FF2B5EF4-FFF2-40B4-BE49-F238E27FC236}">
-                <a16:creationId xmlns:a16="http://schemas.microsoft.com/office/drawing/2014/main" id="{6388B2E3-DF44-43E7-B107-294819B84E00}"/>
-              </a:ext>
-            </a:extLst>
-          </p:cNvPr>
-          <p:cNvCxnSpPr>
-            <a:cxnSpLocks/>
-          </p:cNvCxnSpPr>
-          <p:nvPr/>
-        </p:nvCxnSpPr>
-        <p:spPr>
-          <a:xfrm flipV="1">
-            <a:off x="2614597" y="2796988"/>
-            <a:ext cx="1559859" cy="1721224"/>
-          </a:xfrm>
-          <a:prstGeom prst="straightConnector1">
-            <a:avLst/>
-          </a:prstGeom>
-          <a:ln w="38100">
-            <a:solidFill>
-              <a:srgbClr val="0070C0"/>
-            </a:solidFill>
-            <a:tailEnd type="triangle"/>
-          </a:ln>
-        </p:spPr>
-        <p:style>
-          <a:lnRef idx="1">
-            <a:schemeClr val="accent1"/>
-          </a:lnRef>
-          <a:fillRef idx="0">
-            <a:schemeClr val="accent1"/>
-          </a:fillRef>
-          <a:effectRef idx="0">
-            <a:schemeClr val="accent1"/>
-          </a:effectRef>
-          <a:fontRef idx="minor">
-            <a:schemeClr val="tx1"/>
-          </a:fontRef>
-        </p:style>
-      </p:cxnSp>
-      <p:cxnSp>
-        <p:nvCxnSpPr>
-          <p:cNvPr id="3" name="直線矢印コネクタ 2">
-            <a:extLst>
-              <a:ext uri="{FF2B5EF4-FFF2-40B4-BE49-F238E27FC236}">
-                <a16:creationId xmlns:a16="http://schemas.microsoft.com/office/drawing/2014/main" id="{4A8C6EE2-658B-472E-BBBD-8467115DC747}"/>
-              </a:ext>
-            </a:extLst>
-          </p:cNvPr>
-          <p:cNvCxnSpPr/>
-          <p:nvPr/>
-        </p:nvCxnSpPr>
-        <p:spPr>
-          <a:xfrm>
-            <a:off x="2614597" y="4518212"/>
-            <a:ext cx="1625709" cy="0"/>
-          </a:xfrm>
-          <a:prstGeom prst="straightConnector1">
-            <a:avLst/>
-          </a:prstGeom>
-          <a:ln w="38100">
-            <a:solidFill>
-              <a:schemeClr val="tx1"/>
-            </a:solidFill>
-            <a:prstDash val="dash"/>
-            <a:tailEnd type="triangle"/>
-          </a:ln>
-        </p:spPr>
-        <p:style>
-          <a:lnRef idx="1">
-            <a:schemeClr val="accent1"/>
-          </a:lnRef>
-          <a:fillRef idx="0">
-            <a:schemeClr val="accent1"/>
-          </a:fillRef>
-          <a:effectRef idx="0">
-            <a:schemeClr val="accent1"/>
-          </a:effectRef>
-          <a:fontRef idx="minor">
-            <a:schemeClr val="tx1"/>
-          </a:fontRef>
-        </p:style>
-      </p:cxnSp>
+        <p:txBody>
+          <a:bodyPr rtlCol="0" anchor="ctr"/>
+          <a:lstStyle/>
+          <a:p>
+            <a:pPr algn="ctr"/>
+            <a:endParaRPr kumimoji="1" lang="ja-JP" altLang="en-US"/>
+          </a:p>
+        </p:txBody>
+      </p:sp>
     </p:spTree>
     <p:extLst>
       <p:ext uri="{BB962C8B-B14F-4D97-AF65-F5344CB8AC3E}">
-        <p14:creationId xmlns:p14="http://schemas.microsoft.com/office/powerpoint/2010/main" val="1417108842"/>
+        <p14:creationId xmlns:p14="http://schemas.microsoft.com/office/powerpoint/2010/main" val="439974758"/>
       </p:ext>
     </p:extLst>
   </p:cSld>
@@ -5565,7 +5605,7 @@
         <p:spPr>
           <a:xfrm>
             <a:off x="567542" y="491954"/>
-            <a:ext cx="2646878" cy="584775"/>
+            <a:ext cx="5412059" cy="584775"/>
           </a:xfrm>
           <a:prstGeom prst="rect">
             <a:avLst/>
@@ -5580,7 +5620,15 @@
           <a:p>
             <a:r>
               <a:rPr kumimoji="1" lang="ja-JP" altLang="en-US" sz="3200" b="1" u="sng" dirty="0"/>
-              <a:t>接線ベクトル</a:t>
+              <a:t>当たり判定解説 </a:t>
+            </a:r>
+            <a:r>
+              <a:rPr kumimoji="1" lang="en-US" altLang="ja-JP" sz="3200" b="1" u="sng" dirty="0"/>
+              <a:t>Body</a:t>
+            </a:r>
+            <a:r>
+              <a:rPr kumimoji="1" lang="ja-JP" altLang="en-US" sz="3200" b="1" u="sng" dirty="0"/>
+              <a:t>構造体</a:t>
             </a:r>
           </a:p>
         </p:txBody>
@@ -5600,7 +5648,7 @@
         <p:spPr>
           <a:xfrm>
             <a:off x="567542" y="1216429"/>
-            <a:ext cx="11572399" cy="830997"/>
+            <a:ext cx="9206366" cy="830997"/>
           </a:xfrm>
           <a:prstGeom prst="rect">
             <a:avLst/>
@@ -5614,23 +5662,27 @@
           <a:lstStyle/>
           <a:p>
             <a:r>
-              <a:rPr lang="ja-JP" altLang="en-US" sz="2400" b="1" dirty="0">
+              <a:rPr lang="en-US" altLang="ja-JP" sz="2400" dirty="0"/>
+              <a:t>Body</a:t>
+            </a:r>
+            <a:r>
+              <a:rPr lang="ja-JP" altLang="en-US" sz="2400" dirty="0"/>
+              <a:t>同士で当たり判定＆衝突解決をしてます。</a:t>
+            </a:r>
+            <a:endParaRPr lang="en-US" altLang="ja-JP" sz="2400" dirty="0"/>
+          </a:p>
+          <a:p>
+            <a:r>
+              <a:rPr kumimoji="1" lang="ja-JP" altLang="en-US" sz="2400" dirty="0"/>
+              <a:t>つまり</a:t>
+            </a:r>
+            <a:r>
+              <a:rPr kumimoji="1" lang="en-US" altLang="ja-JP" sz="2400" b="1" dirty="0">
                 <a:solidFill>
                   <a:srgbClr val="FF0000"/>
                 </a:solidFill>
               </a:rPr>
-              <a:t>入射ベクトルをすべてのベクトルの根元</a:t>
-            </a:r>
-            <a:r>
-              <a:rPr lang="ja-JP" altLang="en-US" sz="2400" dirty="0"/>
-              <a:t>に合わせます。</a:t>
-            </a:r>
-            <a:endParaRPr lang="en-US" altLang="ja-JP" sz="2400" dirty="0"/>
-          </a:p>
-          <a:p>
-            <a:r>
-              <a:rPr kumimoji="1" lang="ja-JP" altLang="en-US" sz="2400" dirty="0"/>
-              <a:t>すると、</a:t>
+              <a:t>Body</a:t>
             </a:r>
             <a:r>
               <a:rPr kumimoji="1" lang="ja-JP" altLang="en-US" sz="2400" b="1" dirty="0">
@@ -5638,689 +5690,184 @@
                   <a:srgbClr val="FF0000"/>
                 </a:solidFill>
               </a:rPr>
-              <a:t>入射ベクトルに投影の分だけ移動した先が求めたい座標</a:t>
-            </a:r>
-            <a:r>
-              <a:rPr kumimoji="1" lang="ja-JP" altLang="en-US" sz="2400" dirty="0"/>
-              <a:t>だとわかります。</a:t>
-            </a:r>
-            <a:endParaRPr kumimoji="1" lang="en-US" altLang="ja-JP" sz="2400" dirty="0"/>
-          </a:p>
-        </p:txBody>
-      </p:sp>
-      <p:cxnSp>
-        <p:nvCxnSpPr>
-          <p:cNvPr id="14" name="直線コネクタ 13">
-            <a:extLst>
-              <a:ext uri="{FF2B5EF4-FFF2-40B4-BE49-F238E27FC236}">
-                <a16:creationId xmlns:a16="http://schemas.microsoft.com/office/drawing/2014/main" id="{B358283D-6549-45F9-9AE4-B5D8AD741137}"/>
-              </a:ext>
-            </a:extLst>
-          </p:cNvPr>
-          <p:cNvCxnSpPr/>
+              <a:t>を持っていればどんなものでも当たり判定できます。</a:t>
+            </a:r>
+            <a:endParaRPr kumimoji="1" lang="en-US" altLang="ja-JP" sz="2400" b="1" dirty="0">
+              <a:solidFill>
+                <a:srgbClr val="FF0000"/>
+              </a:solidFill>
+            </a:endParaRPr>
+          </a:p>
+        </p:txBody>
+      </p:sp>
+      <p:pic>
+        <p:nvPicPr>
+          <p:cNvPr id="3" name="図 2">
+            <a:extLst>
+              <a:ext uri="{FF2B5EF4-FFF2-40B4-BE49-F238E27FC236}">
+                <a16:creationId xmlns:a16="http://schemas.microsoft.com/office/drawing/2014/main" id="{26B4CA3E-A8BD-45A1-9EB1-863F210055C6}"/>
+              </a:ext>
+            </a:extLst>
+          </p:cNvPr>
+          <p:cNvPicPr>
+            <a:picLocks noChangeAspect="1"/>
+          </p:cNvPicPr>
           <p:nvPr/>
-        </p:nvCxnSpPr>
-        <p:spPr>
-          <a:xfrm>
-            <a:off x="2626659" y="2375647"/>
-            <a:ext cx="0" cy="3845859"/>
-          </a:xfrm>
-          <a:prstGeom prst="line">
+        </p:nvPicPr>
+        <p:blipFill>
+          <a:blip r:embed="rId2"/>
+          <a:stretch>
+            <a:fillRect/>
+          </a:stretch>
+        </p:blipFill>
+        <p:spPr>
+          <a:xfrm>
+            <a:off x="567542" y="2187126"/>
+            <a:ext cx="7449590" cy="1876687"/>
+          </a:xfrm>
+          <a:prstGeom prst="rect">
             <a:avLst/>
           </a:prstGeom>
+        </p:spPr>
+      </p:pic>
+      <p:pic>
+        <p:nvPicPr>
+          <p:cNvPr id="8" name="図 7">
+            <a:extLst>
+              <a:ext uri="{FF2B5EF4-FFF2-40B4-BE49-F238E27FC236}">
+                <a16:creationId xmlns:a16="http://schemas.microsoft.com/office/drawing/2014/main" id="{15BB4084-2DAC-40A7-94D8-D6A0F4F8D9F8}"/>
+              </a:ext>
+            </a:extLst>
+          </p:cNvPr>
+          <p:cNvPicPr>
+            <a:picLocks noChangeAspect="1"/>
+          </p:cNvPicPr>
+          <p:nvPr/>
+        </p:nvPicPr>
+        <p:blipFill>
+          <a:blip r:embed="rId3"/>
+          <a:stretch>
+            <a:fillRect/>
+          </a:stretch>
+        </p:blipFill>
+        <p:spPr>
+          <a:xfrm>
+            <a:off x="567542" y="4345768"/>
+            <a:ext cx="8830907" cy="2200582"/>
+          </a:xfrm>
+          <a:prstGeom prst="rect">
+            <a:avLst/>
+          </a:prstGeom>
+        </p:spPr>
+      </p:pic>
+      <p:sp>
+        <p:nvSpPr>
+          <p:cNvPr id="13" name="正方形/長方形 12">
+            <a:extLst>
+              <a:ext uri="{FF2B5EF4-FFF2-40B4-BE49-F238E27FC236}">
+                <a16:creationId xmlns:a16="http://schemas.microsoft.com/office/drawing/2014/main" id="{D0A5EE26-3160-43D4-8A1A-D7B23750BBEB}"/>
+              </a:ext>
+            </a:extLst>
+          </p:cNvPr>
+          <p:cNvSpPr/>
+          <p:nvPr/>
+        </p:nvSpPr>
+        <p:spPr>
+          <a:xfrm>
+            <a:off x="3890682" y="2420471"/>
+            <a:ext cx="3962400" cy="251011"/>
+          </a:xfrm>
+          <a:prstGeom prst="rect">
+            <a:avLst/>
+          </a:prstGeom>
+          <a:noFill/>
           <a:ln w="38100">
             <a:solidFill>
-              <a:schemeClr val="tx1"/>
+              <a:srgbClr val="FF0000"/>
             </a:solidFill>
           </a:ln>
         </p:spPr>
         <p:style>
-          <a:lnRef idx="1">
-            <a:schemeClr val="accent1"/>
+          <a:lnRef idx="2">
+            <a:schemeClr val="accent1">
+              <a:shade val="50000"/>
+            </a:schemeClr>
           </a:lnRef>
-          <a:fillRef idx="0">
+          <a:fillRef idx="1">
             <a:schemeClr val="accent1"/>
           </a:fillRef>
           <a:effectRef idx="0">
             <a:schemeClr val="accent1"/>
           </a:effectRef>
           <a:fontRef idx="minor">
-            <a:schemeClr val="tx1"/>
+            <a:schemeClr val="lt1"/>
           </a:fontRef>
         </p:style>
-      </p:cxnSp>
-      <p:cxnSp>
-        <p:nvCxnSpPr>
-          <p:cNvPr id="17" name="直線矢印コネクタ 16">
-            <a:extLst>
-              <a:ext uri="{FF2B5EF4-FFF2-40B4-BE49-F238E27FC236}">
-                <a16:creationId xmlns:a16="http://schemas.microsoft.com/office/drawing/2014/main" id="{AA32B8B0-432A-4055-B456-751DD8F0F481}"/>
-              </a:ext>
-            </a:extLst>
-          </p:cNvPr>
-          <p:cNvCxnSpPr>
-            <a:cxnSpLocks/>
-          </p:cNvCxnSpPr>
+        <p:txBody>
+          <a:bodyPr rtlCol="0" anchor="ctr"/>
+          <a:lstStyle/>
+          <a:p>
+            <a:pPr algn="ctr"/>
+            <a:endParaRPr kumimoji="1" lang="ja-JP" altLang="en-US"/>
+          </a:p>
+        </p:txBody>
+      </p:sp>
+      <p:sp>
+        <p:nvSpPr>
+          <p:cNvPr id="14" name="正方形/長方形 13">
+            <a:extLst>
+              <a:ext uri="{FF2B5EF4-FFF2-40B4-BE49-F238E27FC236}">
+                <a16:creationId xmlns:a16="http://schemas.microsoft.com/office/drawing/2014/main" id="{529AFD52-96C3-4D23-85EF-0F4AA391D01B}"/>
+              </a:ext>
+            </a:extLst>
+          </p:cNvPr>
+          <p:cNvSpPr/>
           <p:nvPr/>
-        </p:nvCxnSpPr>
-        <p:spPr>
-          <a:xfrm>
-            <a:off x="2622749" y="4518212"/>
-            <a:ext cx="0" cy="1739154"/>
-          </a:xfrm>
-          <a:prstGeom prst="straightConnector1">
+        </p:nvSpPr>
+        <p:spPr>
+          <a:xfrm>
+            <a:off x="3836895" y="4535862"/>
+            <a:ext cx="3245223" cy="251011"/>
+          </a:xfrm>
+          <a:prstGeom prst="rect">
             <a:avLst/>
           </a:prstGeom>
+          <a:noFill/>
           <a:ln w="38100">
             <a:solidFill>
               <a:srgbClr val="FF0000"/>
             </a:solidFill>
-            <a:tailEnd type="triangle"/>
           </a:ln>
         </p:spPr>
         <p:style>
-          <a:lnRef idx="1">
-            <a:schemeClr val="accent1"/>
+          <a:lnRef idx="2">
+            <a:schemeClr val="accent1">
+              <a:shade val="50000"/>
+            </a:schemeClr>
           </a:lnRef>
-          <a:fillRef idx="0">
+          <a:fillRef idx="1">
             <a:schemeClr val="accent1"/>
           </a:fillRef>
           <a:effectRef idx="0">
             <a:schemeClr val="accent1"/>
           </a:effectRef>
           <a:fontRef idx="minor">
-            <a:schemeClr val="tx1"/>
+            <a:schemeClr val="lt1"/>
           </a:fontRef>
         </p:style>
-      </p:cxnSp>
-      <p:cxnSp>
-        <p:nvCxnSpPr>
-          <p:cNvPr id="19" name="直線矢印コネクタ 18">
-            <a:extLst>
-              <a:ext uri="{FF2B5EF4-FFF2-40B4-BE49-F238E27FC236}">
-                <a16:creationId xmlns:a16="http://schemas.microsoft.com/office/drawing/2014/main" id="{B2EFC0F0-318B-49D0-B2F5-63EF8062F134}"/>
-              </a:ext>
-            </a:extLst>
-          </p:cNvPr>
-          <p:cNvCxnSpPr>
-            <a:cxnSpLocks/>
-          </p:cNvCxnSpPr>
-          <p:nvPr/>
-        </p:nvCxnSpPr>
-        <p:spPr>
-          <a:xfrm>
-            <a:off x="2620793" y="4518212"/>
-            <a:ext cx="503977" cy="0"/>
-          </a:xfrm>
-          <a:prstGeom prst="straightConnector1">
-            <a:avLst/>
-          </a:prstGeom>
-          <a:ln w="38100">
-            <a:solidFill>
-              <a:srgbClr val="00B050"/>
-            </a:solidFill>
-            <a:tailEnd type="triangle"/>
-          </a:ln>
-        </p:spPr>
-        <p:style>
-          <a:lnRef idx="1">
-            <a:schemeClr val="accent1"/>
-          </a:lnRef>
-          <a:fillRef idx="0">
-            <a:schemeClr val="accent1"/>
-          </a:fillRef>
-          <a:effectRef idx="0">
-            <a:schemeClr val="accent1"/>
-          </a:effectRef>
-          <a:fontRef idx="minor">
-            <a:schemeClr val="tx1"/>
-          </a:fontRef>
-        </p:style>
-      </p:cxnSp>
-      <p:cxnSp>
-        <p:nvCxnSpPr>
-          <p:cNvPr id="9" name="直線矢印コネクタ 8">
-            <a:extLst>
-              <a:ext uri="{FF2B5EF4-FFF2-40B4-BE49-F238E27FC236}">
-                <a16:creationId xmlns:a16="http://schemas.microsoft.com/office/drawing/2014/main" id="{6388B2E3-DF44-43E7-B107-294819B84E00}"/>
-              </a:ext>
-            </a:extLst>
-          </p:cNvPr>
-          <p:cNvCxnSpPr>
-            <a:cxnSpLocks/>
-          </p:cNvCxnSpPr>
-          <p:nvPr/>
-        </p:nvCxnSpPr>
-        <p:spPr>
-          <a:xfrm flipV="1">
-            <a:off x="2614597" y="2796988"/>
-            <a:ext cx="1559859" cy="1721224"/>
-          </a:xfrm>
-          <a:prstGeom prst="straightConnector1">
-            <a:avLst/>
-          </a:prstGeom>
-          <a:ln w="38100">
-            <a:solidFill>
-              <a:srgbClr val="0070C0"/>
-            </a:solidFill>
-            <a:tailEnd type="triangle"/>
-          </a:ln>
-        </p:spPr>
-        <p:style>
-          <a:lnRef idx="1">
-            <a:schemeClr val="accent1"/>
-          </a:lnRef>
-          <a:fillRef idx="0">
-            <a:schemeClr val="accent1"/>
-          </a:fillRef>
-          <a:effectRef idx="0">
-            <a:schemeClr val="accent1"/>
-          </a:effectRef>
-          <a:fontRef idx="minor">
-            <a:schemeClr val="tx1"/>
-          </a:fontRef>
-        </p:style>
-      </p:cxnSp>
-      <p:cxnSp>
-        <p:nvCxnSpPr>
-          <p:cNvPr id="3" name="直線矢印コネクタ 2">
-            <a:extLst>
-              <a:ext uri="{FF2B5EF4-FFF2-40B4-BE49-F238E27FC236}">
-                <a16:creationId xmlns:a16="http://schemas.microsoft.com/office/drawing/2014/main" id="{4A8C6EE2-658B-472E-BBBD-8467115DC747}"/>
-              </a:ext>
-            </a:extLst>
-          </p:cNvPr>
-          <p:cNvCxnSpPr/>
-          <p:nvPr/>
-        </p:nvCxnSpPr>
-        <p:spPr>
-          <a:xfrm>
-            <a:off x="2614597" y="4518212"/>
-            <a:ext cx="1625709" cy="0"/>
-          </a:xfrm>
-          <a:prstGeom prst="straightConnector1">
-            <a:avLst/>
-          </a:prstGeom>
-          <a:ln w="38100">
-            <a:solidFill>
-              <a:schemeClr val="tx1"/>
-            </a:solidFill>
-            <a:prstDash val="dash"/>
-            <a:tailEnd type="triangle"/>
-          </a:ln>
-        </p:spPr>
-        <p:style>
-          <a:lnRef idx="1">
-            <a:schemeClr val="accent1"/>
-          </a:lnRef>
-          <a:fillRef idx="0">
-            <a:schemeClr val="accent1"/>
-          </a:fillRef>
-          <a:effectRef idx="0">
-            <a:schemeClr val="accent1"/>
-          </a:effectRef>
-          <a:fontRef idx="minor">
-            <a:schemeClr val="tx1"/>
-          </a:fontRef>
-        </p:style>
-      </p:cxnSp>
-      <p:cxnSp>
-        <p:nvCxnSpPr>
-          <p:cNvPr id="10" name="直線矢印コネクタ 9">
-            <a:extLst>
-              <a:ext uri="{FF2B5EF4-FFF2-40B4-BE49-F238E27FC236}">
-                <a16:creationId xmlns:a16="http://schemas.microsoft.com/office/drawing/2014/main" id="{59D7E47B-529B-4EAD-8C32-14C1C23A2A75}"/>
-              </a:ext>
-            </a:extLst>
-          </p:cNvPr>
-          <p:cNvCxnSpPr>
-            <a:cxnSpLocks/>
-          </p:cNvCxnSpPr>
-          <p:nvPr/>
-        </p:nvCxnSpPr>
-        <p:spPr>
-          <a:xfrm flipH="1">
-            <a:off x="1062890" y="4500282"/>
-            <a:ext cx="1559859" cy="1721224"/>
-          </a:xfrm>
-          <a:prstGeom prst="straightConnector1">
-            <a:avLst/>
-          </a:prstGeom>
-          <a:ln w="38100">
-            <a:solidFill>
-              <a:srgbClr val="0070C0"/>
-            </a:solidFill>
-            <a:tailEnd type="triangle"/>
-          </a:ln>
-        </p:spPr>
-        <p:style>
-          <a:lnRef idx="1">
-            <a:schemeClr val="accent1"/>
-          </a:lnRef>
-          <a:fillRef idx="0">
-            <a:schemeClr val="accent1"/>
-          </a:fillRef>
-          <a:effectRef idx="0">
-            <a:schemeClr val="accent1"/>
-          </a:effectRef>
-          <a:fontRef idx="minor">
-            <a:schemeClr val="tx1"/>
-          </a:fontRef>
-        </p:style>
-      </p:cxnSp>
-      <p:cxnSp>
-        <p:nvCxnSpPr>
-          <p:cNvPr id="11" name="直線矢印コネクタ 10">
-            <a:extLst>
-              <a:ext uri="{FF2B5EF4-FFF2-40B4-BE49-F238E27FC236}">
-                <a16:creationId xmlns:a16="http://schemas.microsoft.com/office/drawing/2014/main" id="{3DB13246-D4B0-406C-8BE9-2CDAB029AA1B}"/>
-              </a:ext>
-            </a:extLst>
-          </p:cNvPr>
-          <p:cNvCxnSpPr/>
-          <p:nvPr/>
-        </p:nvCxnSpPr>
-        <p:spPr>
-          <a:xfrm>
-            <a:off x="1029964" y="6257366"/>
-            <a:ext cx="1625709" cy="0"/>
-          </a:xfrm>
-          <a:prstGeom prst="straightConnector1">
-            <a:avLst/>
-          </a:prstGeom>
-          <a:ln w="38100">
-            <a:solidFill>
-              <a:schemeClr val="tx1"/>
-            </a:solidFill>
-            <a:prstDash val="dash"/>
-            <a:tailEnd type="triangle"/>
-          </a:ln>
-        </p:spPr>
-        <p:style>
-          <a:lnRef idx="1">
-            <a:schemeClr val="accent1"/>
-          </a:lnRef>
-          <a:fillRef idx="0">
-            <a:schemeClr val="accent1"/>
-          </a:fillRef>
-          <a:effectRef idx="0">
-            <a:schemeClr val="accent1"/>
-          </a:effectRef>
-          <a:fontRef idx="minor">
-            <a:schemeClr val="tx1"/>
-          </a:fontRef>
-        </p:style>
-      </p:cxnSp>
-      <p:sp>
-        <p:nvSpPr>
-          <p:cNvPr id="12" name="テキスト ボックス 11">
-            <a:extLst>
-              <a:ext uri="{FF2B5EF4-FFF2-40B4-BE49-F238E27FC236}">
-                <a16:creationId xmlns:a16="http://schemas.microsoft.com/office/drawing/2014/main" id="{EBECACC2-A5FB-4BAB-8F80-99050B7E51BF}"/>
-              </a:ext>
-            </a:extLst>
-          </p:cNvPr>
-          <p:cNvSpPr txBox="1"/>
-          <p:nvPr/>
-        </p:nvSpPr>
-        <p:spPr>
-          <a:xfrm>
-            <a:off x="83208" y="4978892"/>
-            <a:ext cx="1851789" cy="307777"/>
-          </a:xfrm>
-          <a:prstGeom prst="rect">
-            <a:avLst/>
-          </a:prstGeom>
-          <a:noFill/>
-        </p:spPr>
-        <p:txBody>
-          <a:bodyPr wrap="none" rtlCol="0">
-            <a:spAutoFit/>
-          </a:bodyPr>
-          <a:lstStyle/>
-          <a:p>
-            <a:r>
-              <a:rPr lang="ja-JP" altLang="en-US" sz="1400" b="1" dirty="0">
-                <a:solidFill>
-                  <a:srgbClr val="0070C0"/>
-                </a:solidFill>
-              </a:rPr>
-              <a:t>① 入射ベクトルから</a:t>
-            </a:r>
-            <a:endParaRPr kumimoji="1" lang="en-US" altLang="ja-JP" sz="1400" b="1" dirty="0">
-              <a:solidFill>
-                <a:srgbClr val="0070C0"/>
-              </a:solidFill>
-            </a:endParaRPr>
-          </a:p>
-        </p:txBody>
-      </p:sp>
-      <p:sp>
-        <p:nvSpPr>
-          <p:cNvPr id="13" name="テキスト ボックス 12">
-            <a:extLst>
-              <a:ext uri="{FF2B5EF4-FFF2-40B4-BE49-F238E27FC236}">
-                <a16:creationId xmlns:a16="http://schemas.microsoft.com/office/drawing/2014/main" id="{2ECD81C2-1994-4460-9675-D5E97F00368F}"/>
-              </a:ext>
-            </a:extLst>
-          </p:cNvPr>
-          <p:cNvSpPr txBox="1"/>
-          <p:nvPr/>
-        </p:nvSpPr>
-        <p:spPr>
-          <a:xfrm>
-            <a:off x="319508" y="6434937"/>
-            <a:ext cx="5083443" cy="307777"/>
-          </a:xfrm>
-          <a:prstGeom prst="rect">
-            <a:avLst/>
-          </a:prstGeom>
-          <a:noFill/>
-        </p:spPr>
-        <p:txBody>
-          <a:bodyPr wrap="none" rtlCol="0">
-            <a:spAutoFit/>
-          </a:bodyPr>
-          <a:lstStyle/>
-          <a:p>
-            <a:r>
-              <a:rPr lang="ja-JP" altLang="en-US" sz="1400" b="1" dirty="0"/>
-              <a:t>② </a:t>
-            </a:r>
-            <a:r>
-              <a:rPr lang="ja-JP" altLang="en-US" sz="1400" b="1" dirty="0">
-                <a:solidFill>
-                  <a:srgbClr val="00B050"/>
-                </a:solidFill>
-              </a:rPr>
-              <a:t>法線の向き</a:t>
-            </a:r>
-            <a:r>
-              <a:rPr lang="ja-JP" altLang="en-US" sz="1400" b="1" dirty="0"/>
-              <a:t>に投影の分だけ移動すると</a:t>
-            </a:r>
-            <a:r>
-              <a:rPr lang="ja-JP" altLang="en-US" sz="1400" b="1" dirty="0">
-                <a:solidFill>
-                  <a:srgbClr val="FF0000"/>
-                </a:solidFill>
-              </a:rPr>
-              <a:t>目的地</a:t>
-            </a:r>
-            <a:r>
-              <a:rPr lang="ja-JP" altLang="en-US" sz="1400" b="1" dirty="0"/>
-              <a:t>にたどり着く</a:t>
-            </a:r>
-            <a:endParaRPr kumimoji="1" lang="en-US" altLang="ja-JP" sz="1400" b="1" dirty="0"/>
-          </a:p>
-        </p:txBody>
-      </p:sp>
-      <mc:AlternateContent xmlns:mc="http://schemas.openxmlformats.org/markup-compatibility/2006" xmlns:a14="http://schemas.microsoft.com/office/drawing/2010/main">
-        <mc:Choice Requires="a14">
-          <p:sp>
-            <p:nvSpPr>
-              <p:cNvPr id="15" name="テキスト ボックス 14">
-                <a:extLst>
-                  <a:ext uri="{FF2B5EF4-FFF2-40B4-BE49-F238E27FC236}">
-                    <a16:creationId xmlns:a16="http://schemas.microsoft.com/office/drawing/2014/main" id="{F5AF3D5F-B2A0-4D9F-9861-18619BE2D63A}"/>
-                  </a:ext>
-                </a:extLst>
-              </p:cNvPr>
-              <p:cNvSpPr txBox="1"/>
-              <p:nvPr/>
-            </p:nvSpPr>
-            <p:spPr>
-              <a:xfrm>
-                <a:off x="6708365" y="2963915"/>
-                <a:ext cx="4493538" cy="2677656"/>
-              </a:xfrm>
-              <a:prstGeom prst="rect">
-                <a:avLst/>
-              </a:prstGeom>
-              <a:noFill/>
-            </p:spPr>
-            <p:txBody>
-              <a:bodyPr wrap="none" rtlCol="0">
-                <a:spAutoFit/>
-              </a:bodyPr>
-              <a:lstStyle/>
-              <a:p>
-                <a:r>
-                  <a:rPr lang="ja-JP" altLang="en-US" sz="2400" dirty="0"/>
-                  <a:t>このことから以下の計算で、</a:t>
-                </a:r>
-                <a:endParaRPr lang="en-US" altLang="ja-JP" sz="2400" dirty="0"/>
-              </a:p>
-              <a:p>
-                <a:r>
-                  <a:rPr lang="ja-JP" altLang="en-US" sz="2400" dirty="0"/>
-                  <a:t>接線ベクトルを計算できます。</a:t>
-                </a:r>
-                <a:endParaRPr kumimoji="1" lang="en-US" altLang="ja-JP" sz="2400" b="0" i="1" dirty="0">
-                  <a:solidFill>
-                    <a:srgbClr val="FF0000"/>
-                  </a:solidFill>
-                  <a:latin typeface="Cambria Math" panose="02040503050406030204" pitchFamily="18" charset="0"/>
-                </a:endParaRPr>
-              </a:p>
-              <a:p>
-                <a:pPr/>
-                <a14:m>
-                  <m:oMathPara xmlns:m="http://schemas.openxmlformats.org/officeDocument/2006/math">
-                    <m:oMathParaPr>
-                      <m:jc m:val="left"/>
-                    </m:oMathParaPr>
-                    <m:oMath xmlns:m="http://schemas.openxmlformats.org/officeDocument/2006/math">
-                      <m:r>
-                        <a:rPr kumimoji="1" lang="en-US" altLang="ja-JP" sz="2400" b="0" i="1" smtClean="0">
-                          <a:solidFill>
-                            <a:srgbClr val="FF0000"/>
-                          </a:solidFill>
-                          <a:latin typeface="Cambria Math" panose="02040503050406030204" pitchFamily="18" charset="0"/>
-                        </a:rPr>
-                        <m:t>𝑃</m:t>
-                      </m:r>
-                      <m:r>
-                        <a:rPr kumimoji="1" lang="en-US" altLang="ja-JP" sz="2400" b="0" i="1" smtClean="0">
-                          <a:solidFill>
-                            <a:srgbClr val="FF0000"/>
-                          </a:solidFill>
-                          <a:latin typeface="Cambria Math" panose="02040503050406030204" pitchFamily="18" charset="0"/>
-                        </a:rPr>
-                        <m:t>=</m:t>
-                      </m:r>
-                      <m:r>
-                        <a:rPr kumimoji="1" lang="en-US" altLang="ja-JP" sz="2400" b="0" i="1" smtClean="0">
-                          <a:solidFill>
-                            <a:srgbClr val="FF0000"/>
-                          </a:solidFill>
-                          <a:latin typeface="Cambria Math" panose="02040503050406030204" pitchFamily="18" charset="0"/>
-                        </a:rPr>
-                        <m:t>𝐹</m:t>
-                      </m:r>
-                      <m:r>
-                        <a:rPr kumimoji="1" lang="en-US" altLang="ja-JP" sz="2400" b="0" i="1" smtClean="0">
-                          <a:solidFill>
-                            <a:srgbClr val="FF0000"/>
-                          </a:solidFill>
-                          <a:latin typeface="Cambria Math" panose="02040503050406030204" pitchFamily="18" charset="0"/>
-                        </a:rPr>
-                        <m:t>+</m:t>
-                      </m:r>
-                      <m:d>
-                        <m:dPr>
-                          <m:ctrlPr>
-                            <a:rPr kumimoji="1" lang="en-US" altLang="ja-JP" sz="2400" b="0" i="1" smtClean="0">
-                              <a:solidFill>
-                                <a:srgbClr val="FF0000"/>
-                              </a:solidFill>
-                              <a:latin typeface="Cambria Math" panose="02040503050406030204" pitchFamily="18" charset="0"/>
-                            </a:rPr>
-                          </m:ctrlPr>
-                        </m:dPr>
-                        <m:e>
-                          <m:r>
-                            <a:rPr kumimoji="1" lang="en-US" altLang="ja-JP" sz="2400" b="0" i="1" smtClean="0">
-                              <a:solidFill>
-                                <a:srgbClr val="FF0000"/>
-                              </a:solidFill>
-                              <a:latin typeface="Cambria Math" panose="02040503050406030204" pitchFamily="18" charset="0"/>
-                            </a:rPr>
-                            <m:t>−</m:t>
-                          </m:r>
-                          <m:r>
-                            <a:rPr kumimoji="1" lang="en-US" altLang="ja-JP" sz="2400" b="0" i="1" smtClean="0">
-                              <a:solidFill>
-                                <a:srgbClr val="FF0000"/>
-                              </a:solidFill>
-                              <a:latin typeface="Cambria Math" panose="02040503050406030204" pitchFamily="18" charset="0"/>
-                            </a:rPr>
-                            <m:t>𝐹</m:t>
-                          </m:r>
-                          <m:r>
-                            <a:rPr lang="ja-JP" altLang="en-US" sz="2400" i="1">
-                              <a:solidFill>
-                                <a:srgbClr val="FF0000"/>
-                              </a:solidFill>
-                              <a:latin typeface="Cambria Math" panose="02040503050406030204" pitchFamily="18" charset="0"/>
-                            </a:rPr>
-                            <m:t>・</m:t>
-                          </m:r>
-                          <m:r>
-                            <a:rPr lang="en-US" altLang="ja-JP" sz="2400" b="0" i="1" smtClean="0">
-                              <a:solidFill>
-                                <a:srgbClr val="FF0000"/>
-                              </a:solidFill>
-                              <a:latin typeface="Cambria Math" panose="02040503050406030204" pitchFamily="18" charset="0"/>
-                            </a:rPr>
-                            <m:t>𝑁</m:t>
-                          </m:r>
-                        </m:e>
-                      </m:d>
-                      <m:r>
-                        <a:rPr kumimoji="1" lang="en-US" altLang="ja-JP" sz="2400" b="0" i="1" smtClean="0">
-                          <a:solidFill>
-                            <a:srgbClr val="FF0000"/>
-                          </a:solidFill>
-                          <a:latin typeface="Cambria Math" panose="02040503050406030204" pitchFamily="18" charset="0"/>
-                        </a:rPr>
-                        <m:t>𝑁</m:t>
-                      </m:r>
-                    </m:oMath>
-                  </m:oMathPara>
-                </a14:m>
-                <a:endParaRPr kumimoji="1" lang="en-US" altLang="ja-JP" sz="2400" b="0" dirty="0">
-                  <a:solidFill>
-                    <a:srgbClr val="FF0000"/>
-                  </a:solidFill>
-                </a:endParaRPr>
-              </a:p>
-              <a:p>
-                <a:endParaRPr kumimoji="1" lang="en-US" altLang="ja-JP" sz="2400" dirty="0"/>
-              </a:p>
-              <a:p>
-                <a14:m>
-                  <m:oMath xmlns:m="http://schemas.openxmlformats.org/officeDocument/2006/math">
-                    <m:r>
-                      <a:rPr kumimoji="1" lang="en-US" altLang="ja-JP" sz="2400" b="0" i="1" smtClean="0">
-                        <a:latin typeface="Cambria Math" panose="02040503050406030204" pitchFamily="18" charset="0"/>
-                      </a:rPr>
-                      <m:t>𝑃</m:t>
-                    </m:r>
-                  </m:oMath>
-                </a14:m>
-                <a:r>
-                  <a:rPr kumimoji="1" lang="ja-JP" altLang="en-US" sz="2400" dirty="0"/>
-                  <a:t>・・・接線ベクトル</a:t>
-                </a:r>
-                <a:endParaRPr kumimoji="1" lang="en-US" altLang="ja-JP" sz="2400" dirty="0"/>
-              </a:p>
-              <a:p>
-                <a14:m>
-                  <m:oMath xmlns:m="http://schemas.openxmlformats.org/officeDocument/2006/math">
-                    <m:r>
-                      <a:rPr kumimoji="1" lang="en-US" altLang="ja-JP" sz="2400" b="0" i="1" smtClean="0">
-                        <a:latin typeface="Cambria Math" panose="02040503050406030204" pitchFamily="18" charset="0"/>
-                      </a:rPr>
-                      <m:t>𝐹</m:t>
-                    </m:r>
-                  </m:oMath>
-                </a14:m>
-                <a:r>
-                  <a:rPr kumimoji="1" lang="ja-JP" altLang="en-US" sz="2400" dirty="0"/>
-                  <a:t>・・・入射ベクトル</a:t>
-                </a:r>
-                <a:endParaRPr kumimoji="1" lang="en-US" altLang="ja-JP" sz="2400" dirty="0"/>
-              </a:p>
-              <a:p>
-                <a14:m>
-                  <m:oMath xmlns:m="http://schemas.openxmlformats.org/officeDocument/2006/math">
-                    <m:r>
-                      <a:rPr kumimoji="1" lang="en-US" altLang="ja-JP" sz="2400" b="0" i="1" smtClean="0">
-                        <a:latin typeface="Cambria Math" panose="02040503050406030204" pitchFamily="18" charset="0"/>
-                      </a:rPr>
-                      <m:t>𝑁</m:t>
-                    </m:r>
-                  </m:oMath>
-                </a14:m>
-                <a:r>
-                  <a:rPr kumimoji="1" lang="ja-JP" altLang="en-US" sz="2400" dirty="0"/>
-                  <a:t>・・・法線ベクトル</a:t>
-                </a:r>
-                <a:endParaRPr kumimoji="1" lang="en-US" altLang="ja-JP" sz="2400" dirty="0"/>
-              </a:p>
-            </p:txBody>
-          </p:sp>
-        </mc:Choice>
-        <mc:Fallback xmlns="">
-          <p:sp>
-            <p:nvSpPr>
-              <p:cNvPr id="15" name="テキスト ボックス 14">
-                <a:extLst>
-                  <a:ext uri="{FF2B5EF4-FFF2-40B4-BE49-F238E27FC236}">
-                    <a16:creationId xmlns:a16="http://schemas.microsoft.com/office/drawing/2014/main" id="{F5AF3D5F-B2A0-4D9F-9861-18619BE2D63A}"/>
-                  </a:ext>
-                </a:extLst>
-              </p:cNvPr>
-              <p:cNvSpPr txBox="1">
-                <a:spLocks noRot="1" noChangeAspect="1" noMove="1" noResize="1" noEditPoints="1" noAdjustHandles="1" noChangeArrowheads="1" noChangeShapeType="1" noTextEdit="1"/>
-              </p:cNvSpPr>
-              <p:nvPr/>
-            </p:nvSpPr>
-            <p:spPr>
-              <a:xfrm>
-                <a:off x="6708365" y="2963915"/>
-                <a:ext cx="4493538" cy="2677656"/>
-              </a:xfrm>
-              <a:prstGeom prst="rect">
-                <a:avLst/>
-              </a:prstGeom>
-              <a:blipFill>
-                <a:blip r:embed="rId2"/>
-                <a:stretch>
-                  <a:fillRect l="-2033" t="-1822" r="-1084" b="-4328"/>
-                </a:stretch>
-              </a:blipFill>
-            </p:spPr>
-            <p:txBody>
-              <a:bodyPr/>
-              <a:lstStyle/>
-              <a:p>
-                <a:r>
-                  <a:rPr lang="ja-JP" altLang="en-US">
-                    <a:noFill/>
-                  </a:rPr>
-                  <a:t> </a:t>
-                </a:r>
-              </a:p>
-            </p:txBody>
-          </p:sp>
-        </mc:Fallback>
-      </mc:AlternateContent>
+        <p:txBody>
+          <a:bodyPr rtlCol="0" anchor="ctr"/>
+          <a:lstStyle/>
+          <a:p>
+            <a:pPr algn="ctr"/>
+            <a:endParaRPr kumimoji="1" lang="ja-JP" altLang="en-US"/>
+          </a:p>
+        </p:txBody>
+      </p:sp>
     </p:spTree>
     <p:extLst>
       <p:ext uri="{BB962C8B-B14F-4D97-AF65-F5344CB8AC3E}">
-        <p14:creationId xmlns:p14="http://schemas.microsoft.com/office/powerpoint/2010/main" val="2986159015"/>
+        <p14:creationId xmlns:p14="http://schemas.microsoft.com/office/powerpoint/2010/main" val="2846640024"/>
       </p:ext>
     </p:extLst>
   </p:cSld>
@@ -6349,10 +5896,10 @@
       </p:grpSpPr>
       <p:sp>
         <p:nvSpPr>
-          <p:cNvPr id="4" name="テキスト ボックス 3">
-            <a:extLst>
-              <a:ext uri="{FF2B5EF4-FFF2-40B4-BE49-F238E27FC236}">
-                <a16:creationId xmlns:a16="http://schemas.microsoft.com/office/drawing/2014/main" id="{5A13BF46-B8C5-48AA-8308-C9ECFF431A18}"/>
+          <p:cNvPr id="6" name="テキスト ボックス 5">
+            <a:extLst>
+              <a:ext uri="{FF2B5EF4-FFF2-40B4-BE49-F238E27FC236}">
+                <a16:creationId xmlns:a16="http://schemas.microsoft.com/office/drawing/2014/main" id="{55830AD6-028B-4C4E-80BF-B70DFC1C3A46}"/>
               </a:ext>
             </a:extLst>
           </p:cNvPr>
@@ -6361,8 +5908,8 @@
         </p:nvSpPr>
         <p:spPr>
           <a:xfrm>
-            <a:off x="567542" y="491954"/>
-            <a:ext cx="2646878" cy="584775"/>
+            <a:off x="5388114" y="3198168"/>
+            <a:ext cx="1415772" cy="461665"/>
           </a:xfrm>
           <a:prstGeom prst="rect">
             <a:avLst/>
@@ -6376,162 +5923,17 @@
           <a:lstStyle/>
           <a:p>
             <a:r>
-              <a:rPr kumimoji="1" lang="ja-JP" altLang="en-US" sz="3200" b="1" u="sng" dirty="0"/>
-              <a:t>接線ベクトル</a:t>
-            </a:r>
-          </a:p>
-        </p:txBody>
-      </p:sp>
-      <p:sp>
-        <p:nvSpPr>
-          <p:cNvPr id="6" name="テキスト ボックス 5">
-            <a:extLst>
-              <a:ext uri="{FF2B5EF4-FFF2-40B4-BE49-F238E27FC236}">
-                <a16:creationId xmlns:a16="http://schemas.microsoft.com/office/drawing/2014/main" id="{55830AD6-028B-4C4E-80BF-B70DFC1C3A46}"/>
-              </a:ext>
-            </a:extLst>
-          </p:cNvPr>
-          <p:cNvSpPr txBox="1"/>
-          <p:nvPr/>
-        </p:nvSpPr>
-        <p:spPr>
-          <a:xfrm>
-            <a:off x="567542" y="1216429"/>
-            <a:ext cx="10323660" cy="461665"/>
-          </a:xfrm>
-          <a:prstGeom prst="rect">
-            <a:avLst/>
-          </a:prstGeom>
-          <a:noFill/>
-        </p:spPr>
-        <p:txBody>
-          <a:bodyPr wrap="none" rtlCol="0">
-            <a:spAutoFit/>
-          </a:bodyPr>
-          <a:lstStyle/>
-          <a:p>
-            <a:r>
-              <a:rPr kumimoji="1" lang="ja-JP" altLang="en-US" sz="2400" dirty="0"/>
-              <a:t>以上を踏まえて、</a:t>
-            </a:r>
-            <a:r>
-              <a:rPr kumimoji="1" lang="en-US" altLang="ja-JP" sz="2400" b="1" dirty="0">
-                <a:solidFill>
-                  <a:srgbClr val="FF0000"/>
-                </a:solidFill>
-              </a:rPr>
-              <a:t>MyMath.cpp</a:t>
-            </a:r>
-            <a:r>
-              <a:rPr kumimoji="1" lang="ja-JP" altLang="en-US" sz="2400" dirty="0"/>
-              <a:t>の</a:t>
-            </a:r>
-            <a:r>
-              <a:rPr kumimoji="1" lang="en-US" altLang="ja-JP" sz="2400" b="1" dirty="0" err="1">
-                <a:solidFill>
-                  <a:srgbClr val="0070C0"/>
-                </a:solidFill>
-              </a:rPr>
-              <a:t>VecTangent</a:t>
-            </a:r>
-            <a:r>
-              <a:rPr kumimoji="1" lang="ja-JP" altLang="en-US" sz="2400" dirty="0"/>
-              <a:t>関数を完成させましょう。</a:t>
-            </a:r>
-            <a:endParaRPr kumimoji="1" lang="en-US" altLang="ja-JP" sz="2400" dirty="0"/>
-          </a:p>
-        </p:txBody>
-      </p:sp>
-      <p:pic>
-        <p:nvPicPr>
-          <p:cNvPr id="5" name="図 4">
-            <a:extLst>
-              <a:ext uri="{FF2B5EF4-FFF2-40B4-BE49-F238E27FC236}">
-                <a16:creationId xmlns:a16="http://schemas.microsoft.com/office/drawing/2014/main" id="{B05DFA0D-EF56-4238-AF07-E5CE8568CE7C}"/>
-              </a:ext>
-            </a:extLst>
-          </p:cNvPr>
-          <p:cNvPicPr>
-            <a:picLocks noChangeAspect="1"/>
-          </p:cNvPicPr>
-          <p:nvPr/>
-        </p:nvPicPr>
-        <p:blipFill>
-          <a:blip r:embed="rId2"/>
-          <a:stretch>
-            <a:fillRect/>
-          </a:stretch>
-        </p:blipFill>
-        <p:spPr>
-          <a:xfrm>
-            <a:off x="567542" y="1817794"/>
-            <a:ext cx="9081048" cy="3964441"/>
-          </a:xfrm>
-          <a:prstGeom prst="rect">
-            <a:avLst/>
-          </a:prstGeom>
-        </p:spPr>
-      </p:pic>
-      <p:sp>
-        <p:nvSpPr>
-          <p:cNvPr id="16" name="テキスト ボックス 15">
-            <a:extLst>
-              <a:ext uri="{FF2B5EF4-FFF2-40B4-BE49-F238E27FC236}">
-                <a16:creationId xmlns:a16="http://schemas.microsoft.com/office/drawing/2014/main" id="{7CBED1F3-87B3-4B73-8558-676B2CC2E670}"/>
-              </a:ext>
-            </a:extLst>
-          </p:cNvPr>
-          <p:cNvSpPr txBox="1"/>
-          <p:nvPr/>
-        </p:nvSpPr>
-        <p:spPr>
-          <a:xfrm>
-            <a:off x="567542" y="5921935"/>
-            <a:ext cx="9071714" cy="461665"/>
-          </a:xfrm>
-          <a:prstGeom prst="rect">
-            <a:avLst/>
-          </a:prstGeom>
-          <a:noFill/>
-        </p:spPr>
-        <p:txBody>
-          <a:bodyPr wrap="none" rtlCol="0">
-            <a:spAutoFit/>
-          </a:bodyPr>
-          <a:lstStyle/>
-          <a:p>
-            <a:r>
-              <a:rPr kumimoji="1" lang="en-US" altLang="ja-JP" sz="2400" b="1" dirty="0" err="1">
-                <a:solidFill>
-                  <a:srgbClr val="0070C0"/>
-                </a:solidFill>
-              </a:rPr>
-              <a:t>vecIncident</a:t>
-            </a:r>
-            <a:r>
-              <a:rPr kumimoji="1" lang="ja-JP" altLang="en-US" sz="2400" dirty="0"/>
-              <a:t>が入射ベクトル、</a:t>
-            </a:r>
-            <a:r>
-              <a:rPr kumimoji="1" lang="en-US" altLang="ja-JP" sz="2400" b="1" dirty="0" err="1">
-                <a:solidFill>
-                  <a:srgbClr val="0070C0"/>
-                </a:solidFill>
-              </a:rPr>
-              <a:t>vecNormal</a:t>
-            </a:r>
-            <a:r>
-              <a:rPr kumimoji="1" lang="ja-JP" altLang="en-US" sz="2400" dirty="0"/>
-              <a:t>が法線ベクトルです。</a:t>
-            </a:r>
-            <a:endParaRPr kumimoji="1" lang="en-US" altLang="ja-JP" sz="2400" dirty="0"/>
+              <a:rPr lang="ja-JP" altLang="en-US" sz="2400" b="1" dirty="0"/>
+              <a:t>負荷軽減</a:t>
+            </a:r>
+            <a:endParaRPr kumimoji="1" lang="en-US" altLang="ja-JP" sz="2400" b="1" dirty="0"/>
           </a:p>
         </p:txBody>
       </p:sp>
     </p:spTree>
     <p:extLst>
       <p:ext uri="{BB962C8B-B14F-4D97-AF65-F5344CB8AC3E}">
-        <p14:creationId xmlns:p14="http://schemas.microsoft.com/office/powerpoint/2010/main" val="2608488697"/>
+        <p14:creationId xmlns:p14="http://schemas.microsoft.com/office/powerpoint/2010/main" val="4284892924"/>
       </p:ext>
     </p:extLst>
   </p:cSld>
@@ -6573,7 +5975,7 @@
         <p:spPr>
           <a:xfrm>
             <a:off x="567542" y="491954"/>
-            <a:ext cx="2646878" cy="584775"/>
+            <a:ext cx="4815742" cy="584775"/>
           </a:xfrm>
           <a:prstGeom prst="rect">
             <a:avLst/>
@@ -6588,7 +5990,7 @@
           <a:p>
             <a:r>
               <a:rPr kumimoji="1" lang="ja-JP" altLang="en-US" sz="3200" b="1" u="sng" dirty="0"/>
-              <a:t>反射ベクトル</a:t>
+              <a:t>当たり判定解説 負荷軽減</a:t>
             </a:r>
           </a:p>
         </p:txBody>
@@ -6608,7 +6010,7 @@
         <p:spPr>
           <a:xfrm>
             <a:off x="567542" y="1216429"/>
-            <a:ext cx="8363187" cy="461665"/>
+            <a:ext cx="11678197" cy="3046988"/>
           </a:xfrm>
           <a:prstGeom prst="rect">
             <a:avLst/>
@@ -6620,6 +6022,38 @@
             <a:spAutoFit/>
           </a:bodyPr>
           <a:lstStyle/>
+          <a:p>
+            <a:r>
+              <a:rPr lang="ja-JP" altLang="en-US" sz="2400" dirty="0"/>
+              <a:t>ステージを広げるとブロックの数も増えていきます。</a:t>
+            </a:r>
+            <a:endParaRPr lang="en-US" altLang="ja-JP" sz="2400" dirty="0"/>
+          </a:p>
+          <a:p>
+            <a:r>
+              <a:rPr kumimoji="1" lang="ja-JP" altLang="en-US" sz="2400" dirty="0"/>
+              <a:t>広げていくとそのうちに、大量のブロックと当たり判定をすることになります。</a:t>
+            </a:r>
+            <a:endParaRPr kumimoji="1" lang="en-US" altLang="ja-JP" sz="2400" dirty="0"/>
+          </a:p>
+          <a:p>
+            <a:endParaRPr lang="en-US" altLang="ja-JP" sz="2400" dirty="0"/>
+          </a:p>
+          <a:p>
+            <a:r>
+              <a:rPr lang="ja-JP" altLang="en-US" sz="2400" dirty="0"/>
+              <a:t>いくらスペックの高い</a:t>
+            </a:r>
+            <a:r>
+              <a:rPr lang="en-US" altLang="ja-JP" sz="2400" dirty="0"/>
+              <a:t>PC</a:t>
+            </a:r>
+            <a:r>
+              <a:rPr lang="ja-JP" altLang="en-US" sz="2400" dirty="0"/>
+              <a:t>とはいえ、数千、数万のブロックと当たり判定をすると、</a:t>
+            </a:r>
+            <a:endParaRPr lang="en-US" altLang="ja-JP" sz="2400" dirty="0"/>
+          </a:p>
           <a:p>
             <a:r>
               <a:rPr lang="ja-JP" altLang="en-US" sz="2400" b="1" dirty="0">
@@ -6627,760 +6061,41 @@
                   <a:srgbClr val="FF0000"/>
                 </a:solidFill>
               </a:rPr>
-              <a:t>投影の長さを</a:t>
-            </a:r>
-            <a:r>
-              <a:rPr lang="en-US" altLang="ja-JP" sz="2400" b="1" dirty="0">
-                <a:solidFill>
-                  <a:srgbClr val="FF0000"/>
-                </a:solidFill>
-              </a:rPr>
-              <a:t>2</a:t>
-            </a:r>
-            <a:r>
-              <a:rPr lang="ja-JP" altLang="en-US" sz="2400" b="1" dirty="0">
-                <a:solidFill>
-                  <a:srgbClr val="FF0000"/>
-                </a:solidFill>
-              </a:rPr>
-              <a:t>倍</a:t>
-            </a:r>
-            <a:r>
-              <a:rPr lang="ja-JP" altLang="en-US" sz="2400" b="1" dirty="0"/>
-              <a:t>にすると、</a:t>
-            </a:r>
-            <a:r>
-              <a:rPr lang="ja-JP" altLang="en-US" sz="2400" b="1" dirty="0">
-                <a:solidFill>
-                  <a:srgbClr val="FF0000"/>
-                </a:solidFill>
-              </a:rPr>
-              <a:t>反射ベクトル</a:t>
-            </a:r>
-            <a:r>
-              <a:rPr lang="ja-JP" altLang="en-US" sz="2400" b="1" dirty="0"/>
-              <a:t>が計算できます。</a:t>
-            </a:r>
-            <a:endParaRPr kumimoji="1" lang="en-US" altLang="ja-JP" sz="2400" dirty="0"/>
-          </a:p>
-        </p:txBody>
-      </p:sp>
-      <p:cxnSp>
-        <p:nvCxnSpPr>
-          <p:cNvPr id="14" name="直線コネクタ 13">
-            <a:extLst>
-              <a:ext uri="{FF2B5EF4-FFF2-40B4-BE49-F238E27FC236}">
-                <a16:creationId xmlns:a16="http://schemas.microsoft.com/office/drawing/2014/main" id="{B358283D-6549-45F9-9AE4-B5D8AD741137}"/>
-              </a:ext>
-            </a:extLst>
-          </p:cNvPr>
-          <p:cNvCxnSpPr/>
-          <p:nvPr/>
-        </p:nvCxnSpPr>
-        <p:spPr>
-          <a:xfrm>
-            <a:off x="2626659" y="2375647"/>
-            <a:ext cx="0" cy="3845859"/>
-          </a:xfrm>
-          <a:prstGeom prst="line">
-            <a:avLst/>
-          </a:prstGeom>
-          <a:ln w="38100">
-            <a:solidFill>
-              <a:schemeClr val="tx1"/>
-            </a:solidFill>
-          </a:ln>
-        </p:spPr>
-        <p:style>
-          <a:lnRef idx="1">
-            <a:schemeClr val="accent1"/>
-          </a:lnRef>
-          <a:fillRef idx="0">
-            <a:schemeClr val="accent1"/>
-          </a:fillRef>
-          <a:effectRef idx="0">
-            <a:schemeClr val="accent1"/>
-          </a:effectRef>
-          <a:fontRef idx="minor">
-            <a:schemeClr val="tx1"/>
-          </a:fontRef>
-        </p:style>
-      </p:cxnSp>
-      <p:cxnSp>
-        <p:nvCxnSpPr>
-          <p:cNvPr id="17" name="直線矢印コネクタ 16">
-            <a:extLst>
-              <a:ext uri="{FF2B5EF4-FFF2-40B4-BE49-F238E27FC236}">
-                <a16:creationId xmlns:a16="http://schemas.microsoft.com/office/drawing/2014/main" id="{AA32B8B0-432A-4055-B456-751DD8F0F481}"/>
-              </a:ext>
-            </a:extLst>
-          </p:cNvPr>
-          <p:cNvCxnSpPr>
-            <a:cxnSpLocks/>
-          </p:cNvCxnSpPr>
-          <p:nvPr/>
-        </p:nvCxnSpPr>
-        <p:spPr>
-          <a:xfrm>
-            <a:off x="2622749" y="4518212"/>
-            <a:ext cx="1617557" cy="1739154"/>
-          </a:xfrm>
-          <a:prstGeom prst="straightConnector1">
-            <a:avLst/>
-          </a:prstGeom>
-          <a:ln w="38100">
-            <a:solidFill>
-              <a:srgbClr val="FF0000"/>
-            </a:solidFill>
-            <a:tailEnd type="triangle"/>
-          </a:ln>
-        </p:spPr>
-        <p:style>
-          <a:lnRef idx="1">
-            <a:schemeClr val="accent1"/>
-          </a:lnRef>
-          <a:fillRef idx="0">
-            <a:schemeClr val="accent1"/>
-          </a:fillRef>
-          <a:effectRef idx="0">
-            <a:schemeClr val="accent1"/>
-          </a:effectRef>
-          <a:fontRef idx="minor">
-            <a:schemeClr val="tx1"/>
-          </a:fontRef>
-        </p:style>
-      </p:cxnSp>
-      <p:cxnSp>
-        <p:nvCxnSpPr>
-          <p:cNvPr id="19" name="直線矢印コネクタ 18">
-            <a:extLst>
-              <a:ext uri="{FF2B5EF4-FFF2-40B4-BE49-F238E27FC236}">
-                <a16:creationId xmlns:a16="http://schemas.microsoft.com/office/drawing/2014/main" id="{B2EFC0F0-318B-49D0-B2F5-63EF8062F134}"/>
-              </a:ext>
-            </a:extLst>
-          </p:cNvPr>
-          <p:cNvCxnSpPr>
-            <a:cxnSpLocks/>
-          </p:cNvCxnSpPr>
-          <p:nvPr/>
-        </p:nvCxnSpPr>
-        <p:spPr>
-          <a:xfrm>
-            <a:off x="2620793" y="4518212"/>
-            <a:ext cx="503977" cy="0"/>
-          </a:xfrm>
-          <a:prstGeom prst="straightConnector1">
-            <a:avLst/>
-          </a:prstGeom>
-          <a:ln w="38100">
-            <a:solidFill>
-              <a:srgbClr val="00B050"/>
-            </a:solidFill>
-            <a:tailEnd type="triangle"/>
-          </a:ln>
-        </p:spPr>
-        <p:style>
-          <a:lnRef idx="1">
-            <a:schemeClr val="accent1"/>
-          </a:lnRef>
-          <a:fillRef idx="0">
-            <a:schemeClr val="accent1"/>
-          </a:fillRef>
-          <a:effectRef idx="0">
-            <a:schemeClr val="accent1"/>
-          </a:effectRef>
-          <a:fontRef idx="minor">
-            <a:schemeClr val="tx1"/>
-          </a:fontRef>
-        </p:style>
-      </p:cxnSp>
-      <p:cxnSp>
-        <p:nvCxnSpPr>
-          <p:cNvPr id="9" name="直線矢印コネクタ 8">
-            <a:extLst>
-              <a:ext uri="{FF2B5EF4-FFF2-40B4-BE49-F238E27FC236}">
-                <a16:creationId xmlns:a16="http://schemas.microsoft.com/office/drawing/2014/main" id="{6388B2E3-DF44-43E7-B107-294819B84E00}"/>
-              </a:ext>
-            </a:extLst>
-          </p:cNvPr>
-          <p:cNvCxnSpPr>
-            <a:cxnSpLocks/>
-          </p:cNvCxnSpPr>
-          <p:nvPr/>
-        </p:nvCxnSpPr>
-        <p:spPr>
-          <a:xfrm flipV="1">
-            <a:off x="2614597" y="2796988"/>
-            <a:ext cx="1559859" cy="1721224"/>
-          </a:xfrm>
-          <a:prstGeom prst="straightConnector1">
-            <a:avLst/>
-          </a:prstGeom>
-          <a:ln w="38100">
-            <a:solidFill>
-              <a:srgbClr val="0070C0"/>
-            </a:solidFill>
-            <a:tailEnd type="triangle"/>
-          </a:ln>
-        </p:spPr>
-        <p:style>
-          <a:lnRef idx="1">
-            <a:schemeClr val="accent1"/>
-          </a:lnRef>
-          <a:fillRef idx="0">
-            <a:schemeClr val="accent1"/>
-          </a:fillRef>
-          <a:effectRef idx="0">
-            <a:schemeClr val="accent1"/>
-          </a:effectRef>
-          <a:fontRef idx="minor">
-            <a:schemeClr val="tx1"/>
-          </a:fontRef>
-        </p:style>
-      </p:cxnSp>
-      <p:cxnSp>
-        <p:nvCxnSpPr>
-          <p:cNvPr id="3" name="直線矢印コネクタ 2">
-            <a:extLst>
-              <a:ext uri="{FF2B5EF4-FFF2-40B4-BE49-F238E27FC236}">
-                <a16:creationId xmlns:a16="http://schemas.microsoft.com/office/drawing/2014/main" id="{4A8C6EE2-658B-472E-BBBD-8467115DC747}"/>
-              </a:ext>
-            </a:extLst>
-          </p:cNvPr>
-          <p:cNvCxnSpPr/>
-          <p:nvPr/>
-        </p:nvCxnSpPr>
-        <p:spPr>
-          <a:xfrm>
-            <a:off x="2614597" y="6257368"/>
-            <a:ext cx="1625709" cy="0"/>
-          </a:xfrm>
-          <a:prstGeom prst="straightConnector1">
-            <a:avLst/>
-          </a:prstGeom>
-          <a:ln w="38100">
-            <a:solidFill>
-              <a:schemeClr val="tx1"/>
-            </a:solidFill>
-            <a:prstDash val="dash"/>
-            <a:tailEnd type="triangle"/>
-          </a:ln>
-        </p:spPr>
-        <p:style>
-          <a:lnRef idx="1">
-            <a:schemeClr val="accent1"/>
-          </a:lnRef>
-          <a:fillRef idx="0">
-            <a:schemeClr val="accent1"/>
-          </a:fillRef>
-          <a:effectRef idx="0">
-            <a:schemeClr val="accent1"/>
-          </a:effectRef>
-          <a:fontRef idx="minor">
-            <a:schemeClr val="tx1"/>
-          </a:fontRef>
-        </p:style>
-      </p:cxnSp>
-      <p:cxnSp>
-        <p:nvCxnSpPr>
-          <p:cNvPr id="10" name="直線矢印コネクタ 9">
-            <a:extLst>
-              <a:ext uri="{FF2B5EF4-FFF2-40B4-BE49-F238E27FC236}">
-                <a16:creationId xmlns:a16="http://schemas.microsoft.com/office/drawing/2014/main" id="{59D7E47B-529B-4EAD-8C32-14C1C23A2A75}"/>
-              </a:ext>
-            </a:extLst>
-          </p:cNvPr>
-          <p:cNvCxnSpPr>
-            <a:cxnSpLocks/>
-          </p:cNvCxnSpPr>
-          <p:nvPr/>
-        </p:nvCxnSpPr>
-        <p:spPr>
-          <a:xfrm flipH="1">
-            <a:off x="1062890" y="4500282"/>
-            <a:ext cx="1559859" cy="1721224"/>
-          </a:xfrm>
-          <a:prstGeom prst="straightConnector1">
-            <a:avLst/>
-          </a:prstGeom>
-          <a:ln w="38100">
-            <a:solidFill>
-              <a:srgbClr val="0070C0"/>
-            </a:solidFill>
-            <a:tailEnd type="triangle"/>
-          </a:ln>
-        </p:spPr>
-        <p:style>
-          <a:lnRef idx="1">
-            <a:schemeClr val="accent1"/>
-          </a:lnRef>
-          <a:fillRef idx="0">
-            <a:schemeClr val="accent1"/>
-          </a:fillRef>
-          <a:effectRef idx="0">
-            <a:schemeClr val="accent1"/>
-          </a:effectRef>
-          <a:fontRef idx="minor">
-            <a:schemeClr val="tx1"/>
-          </a:fontRef>
-        </p:style>
-      </p:cxnSp>
-      <p:cxnSp>
-        <p:nvCxnSpPr>
-          <p:cNvPr id="11" name="直線矢印コネクタ 10">
-            <a:extLst>
-              <a:ext uri="{FF2B5EF4-FFF2-40B4-BE49-F238E27FC236}">
-                <a16:creationId xmlns:a16="http://schemas.microsoft.com/office/drawing/2014/main" id="{3DB13246-D4B0-406C-8BE9-2CDAB029AA1B}"/>
-              </a:ext>
-            </a:extLst>
-          </p:cNvPr>
-          <p:cNvCxnSpPr/>
-          <p:nvPr/>
-        </p:nvCxnSpPr>
-        <p:spPr>
-          <a:xfrm>
-            <a:off x="1029964" y="6257366"/>
-            <a:ext cx="1625709" cy="0"/>
-          </a:xfrm>
-          <a:prstGeom prst="straightConnector1">
-            <a:avLst/>
-          </a:prstGeom>
-          <a:ln w="38100">
-            <a:solidFill>
-              <a:schemeClr val="tx1"/>
-            </a:solidFill>
-            <a:prstDash val="dash"/>
-            <a:tailEnd type="triangle"/>
-          </a:ln>
-        </p:spPr>
-        <p:style>
-          <a:lnRef idx="1">
-            <a:schemeClr val="accent1"/>
-          </a:lnRef>
-          <a:fillRef idx="0">
-            <a:schemeClr val="accent1"/>
-          </a:fillRef>
-          <a:effectRef idx="0">
-            <a:schemeClr val="accent1"/>
-          </a:effectRef>
-          <a:fontRef idx="minor">
-            <a:schemeClr val="tx1"/>
-          </a:fontRef>
-        </p:style>
-      </p:cxnSp>
-      <p:sp>
-        <p:nvSpPr>
-          <p:cNvPr id="12" name="テキスト ボックス 11">
-            <a:extLst>
-              <a:ext uri="{FF2B5EF4-FFF2-40B4-BE49-F238E27FC236}">
-                <a16:creationId xmlns:a16="http://schemas.microsoft.com/office/drawing/2014/main" id="{EBECACC2-A5FB-4BAB-8F80-99050B7E51BF}"/>
-              </a:ext>
-            </a:extLst>
-          </p:cNvPr>
-          <p:cNvSpPr txBox="1"/>
-          <p:nvPr/>
-        </p:nvSpPr>
-        <p:spPr>
-          <a:xfrm>
-            <a:off x="83208" y="4978892"/>
-            <a:ext cx="1851789" cy="307777"/>
-          </a:xfrm>
-          <a:prstGeom prst="rect">
-            <a:avLst/>
-          </a:prstGeom>
-          <a:noFill/>
-        </p:spPr>
-        <p:txBody>
-          <a:bodyPr wrap="none" rtlCol="0">
-            <a:spAutoFit/>
-          </a:bodyPr>
-          <a:lstStyle/>
-          <a:p>
-            <a:r>
-              <a:rPr lang="ja-JP" altLang="en-US" sz="1400" b="1" dirty="0">
-                <a:solidFill>
-                  <a:srgbClr val="0070C0"/>
-                </a:solidFill>
-              </a:rPr>
-              <a:t>① 入射ベクトルから</a:t>
-            </a:r>
-            <a:endParaRPr kumimoji="1" lang="en-US" altLang="ja-JP" sz="1400" b="1" dirty="0">
-              <a:solidFill>
-                <a:srgbClr val="0070C0"/>
-              </a:solidFill>
-            </a:endParaRPr>
-          </a:p>
-        </p:txBody>
-      </p:sp>
-      <p:sp>
-        <p:nvSpPr>
-          <p:cNvPr id="13" name="テキスト ボックス 12">
-            <a:extLst>
-              <a:ext uri="{FF2B5EF4-FFF2-40B4-BE49-F238E27FC236}">
-                <a16:creationId xmlns:a16="http://schemas.microsoft.com/office/drawing/2014/main" id="{2ECD81C2-1994-4460-9675-D5E97F00368F}"/>
-              </a:ext>
-            </a:extLst>
-          </p:cNvPr>
-          <p:cNvSpPr txBox="1"/>
-          <p:nvPr/>
-        </p:nvSpPr>
-        <p:spPr>
-          <a:xfrm>
-            <a:off x="319508" y="6434937"/>
-            <a:ext cx="5186035" cy="307777"/>
-          </a:xfrm>
-          <a:prstGeom prst="rect">
-            <a:avLst/>
-          </a:prstGeom>
-          <a:noFill/>
-        </p:spPr>
-        <p:txBody>
-          <a:bodyPr wrap="none" rtlCol="0">
-            <a:spAutoFit/>
-          </a:bodyPr>
-          <a:lstStyle/>
-          <a:p>
-            <a:r>
-              <a:rPr lang="ja-JP" altLang="en-US" sz="1400" b="1" dirty="0"/>
-              <a:t>② </a:t>
-            </a:r>
-            <a:r>
-              <a:rPr lang="ja-JP" altLang="en-US" sz="1400" b="1" dirty="0">
-                <a:solidFill>
-                  <a:srgbClr val="00B050"/>
-                </a:solidFill>
-              </a:rPr>
-              <a:t>法線の向き</a:t>
-            </a:r>
-            <a:r>
-              <a:rPr lang="ja-JP" altLang="en-US" sz="1400" b="1" dirty="0"/>
-              <a:t>に投影の分の</a:t>
-            </a:r>
-            <a:r>
-              <a:rPr lang="en-US" altLang="ja-JP" sz="1400" b="1" dirty="0"/>
-              <a:t>2</a:t>
-            </a:r>
-            <a:r>
-              <a:rPr lang="ja-JP" altLang="en-US" sz="1400" b="1" dirty="0"/>
-              <a:t>倍移動すると</a:t>
-            </a:r>
-            <a:r>
-              <a:rPr lang="ja-JP" altLang="en-US" sz="1400" b="1" dirty="0">
-                <a:solidFill>
-                  <a:srgbClr val="FF0000"/>
-                </a:solidFill>
-              </a:rPr>
-              <a:t>目的地</a:t>
-            </a:r>
-            <a:r>
-              <a:rPr lang="ja-JP" altLang="en-US" sz="1400" b="1" dirty="0"/>
-              <a:t>にたどり着く</a:t>
-            </a:r>
-            <a:endParaRPr kumimoji="1" lang="en-US" altLang="ja-JP" sz="1400" b="1" dirty="0"/>
-          </a:p>
-        </p:txBody>
-      </p:sp>
-      <mc:AlternateContent xmlns:mc="http://schemas.openxmlformats.org/markup-compatibility/2006" xmlns:a14="http://schemas.microsoft.com/office/drawing/2010/main">
-        <mc:Choice Requires="a14">
-          <p:sp>
-            <p:nvSpPr>
-              <p:cNvPr id="15" name="テキスト ボックス 14">
-                <a:extLst>
-                  <a:ext uri="{FF2B5EF4-FFF2-40B4-BE49-F238E27FC236}">
-                    <a16:creationId xmlns:a16="http://schemas.microsoft.com/office/drawing/2014/main" id="{F5AF3D5F-B2A0-4D9F-9861-18619BE2D63A}"/>
-                  </a:ext>
-                </a:extLst>
-              </p:cNvPr>
-              <p:cNvSpPr txBox="1"/>
-              <p:nvPr/>
-            </p:nvSpPr>
-            <p:spPr>
-              <a:xfrm>
-                <a:off x="6708365" y="2963915"/>
-                <a:ext cx="4493538" cy="2677656"/>
-              </a:xfrm>
-              <a:prstGeom prst="rect">
-                <a:avLst/>
-              </a:prstGeom>
-              <a:noFill/>
-            </p:spPr>
-            <p:txBody>
-              <a:bodyPr wrap="none" rtlCol="0">
-                <a:spAutoFit/>
-              </a:bodyPr>
-              <a:lstStyle/>
-              <a:p>
-                <a:r>
-                  <a:rPr lang="ja-JP" altLang="en-US" sz="2400" dirty="0"/>
-                  <a:t>このことから以下の計算で、</a:t>
-                </a:r>
-                <a:endParaRPr lang="en-US" altLang="ja-JP" sz="2400" dirty="0"/>
-              </a:p>
-              <a:p>
-                <a:r>
-                  <a:rPr lang="ja-JP" altLang="en-US" sz="2400" dirty="0"/>
-                  <a:t>反射ベクトルを計算できます。</a:t>
-                </a:r>
-                <a:endParaRPr kumimoji="1" lang="en-US" altLang="ja-JP" sz="2400" dirty="0"/>
-              </a:p>
-              <a:p>
-                <a:pPr/>
-                <a14:m>
-                  <m:oMathPara xmlns:m="http://schemas.openxmlformats.org/officeDocument/2006/math">
-                    <m:oMathParaPr>
-                      <m:jc m:val="left"/>
-                    </m:oMathParaPr>
-                    <m:oMath xmlns:m="http://schemas.openxmlformats.org/officeDocument/2006/math">
-                      <m:r>
-                        <a:rPr kumimoji="1" lang="en-US" altLang="ja-JP" sz="2400" b="0" i="1" smtClean="0">
-                          <a:solidFill>
-                            <a:srgbClr val="FF0000"/>
-                          </a:solidFill>
-                          <a:latin typeface="Cambria Math" panose="02040503050406030204" pitchFamily="18" charset="0"/>
-                        </a:rPr>
-                        <m:t>𝑅</m:t>
-                      </m:r>
-                      <m:r>
-                        <a:rPr kumimoji="1" lang="en-US" altLang="ja-JP" sz="2400" b="0" i="1" smtClean="0">
-                          <a:solidFill>
-                            <a:srgbClr val="FF0000"/>
-                          </a:solidFill>
-                          <a:latin typeface="Cambria Math" panose="02040503050406030204" pitchFamily="18" charset="0"/>
-                        </a:rPr>
-                        <m:t>=</m:t>
-                      </m:r>
-                      <m:r>
-                        <a:rPr kumimoji="1" lang="en-US" altLang="ja-JP" sz="2400" b="0" i="1" smtClean="0">
-                          <a:solidFill>
-                            <a:srgbClr val="FF0000"/>
-                          </a:solidFill>
-                          <a:latin typeface="Cambria Math" panose="02040503050406030204" pitchFamily="18" charset="0"/>
-                        </a:rPr>
-                        <m:t>𝐹</m:t>
-                      </m:r>
-                      <m:r>
-                        <a:rPr kumimoji="1" lang="en-US" altLang="ja-JP" sz="2400" b="0" i="1" smtClean="0">
-                          <a:solidFill>
-                            <a:srgbClr val="FF0000"/>
-                          </a:solidFill>
-                          <a:latin typeface="Cambria Math" panose="02040503050406030204" pitchFamily="18" charset="0"/>
-                        </a:rPr>
-                        <m:t>+2</m:t>
-                      </m:r>
-                      <m:d>
-                        <m:dPr>
-                          <m:ctrlPr>
-                            <a:rPr kumimoji="1" lang="en-US" altLang="ja-JP" sz="2400" b="0" i="1" smtClean="0">
-                              <a:solidFill>
-                                <a:srgbClr val="FF0000"/>
-                              </a:solidFill>
-                              <a:latin typeface="Cambria Math" panose="02040503050406030204" pitchFamily="18" charset="0"/>
-                            </a:rPr>
-                          </m:ctrlPr>
-                        </m:dPr>
-                        <m:e>
-                          <m:r>
-                            <a:rPr kumimoji="1" lang="en-US" altLang="ja-JP" sz="2400" b="0" i="1" smtClean="0">
-                              <a:solidFill>
-                                <a:srgbClr val="FF0000"/>
-                              </a:solidFill>
-                              <a:latin typeface="Cambria Math" panose="02040503050406030204" pitchFamily="18" charset="0"/>
-                            </a:rPr>
-                            <m:t>−</m:t>
-                          </m:r>
-                          <m:r>
-                            <a:rPr kumimoji="1" lang="en-US" altLang="ja-JP" sz="2400" b="0" i="1" smtClean="0">
-                              <a:solidFill>
-                                <a:srgbClr val="FF0000"/>
-                              </a:solidFill>
-                              <a:latin typeface="Cambria Math" panose="02040503050406030204" pitchFamily="18" charset="0"/>
-                            </a:rPr>
-                            <m:t>𝐹</m:t>
-                          </m:r>
-                          <m:r>
-                            <a:rPr lang="ja-JP" altLang="en-US" sz="2400" i="1">
-                              <a:solidFill>
-                                <a:srgbClr val="FF0000"/>
-                              </a:solidFill>
-                              <a:latin typeface="Cambria Math" panose="02040503050406030204" pitchFamily="18" charset="0"/>
-                            </a:rPr>
-                            <m:t>・</m:t>
-                          </m:r>
-                          <m:r>
-                            <a:rPr lang="en-US" altLang="ja-JP" sz="2400" b="0" i="1" smtClean="0">
-                              <a:solidFill>
-                                <a:srgbClr val="FF0000"/>
-                              </a:solidFill>
-                              <a:latin typeface="Cambria Math" panose="02040503050406030204" pitchFamily="18" charset="0"/>
-                            </a:rPr>
-                            <m:t>𝑁</m:t>
-                          </m:r>
-                        </m:e>
-                      </m:d>
-                      <m:r>
-                        <a:rPr kumimoji="1" lang="en-US" altLang="ja-JP" sz="2400" b="0" i="1" smtClean="0">
-                          <a:solidFill>
-                            <a:srgbClr val="FF0000"/>
-                          </a:solidFill>
-                          <a:latin typeface="Cambria Math" panose="02040503050406030204" pitchFamily="18" charset="0"/>
-                        </a:rPr>
-                        <m:t>𝑁</m:t>
-                      </m:r>
-                    </m:oMath>
-                  </m:oMathPara>
-                </a14:m>
-                <a:endParaRPr kumimoji="1" lang="en-US" altLang="ja-JP" sz="2400" b="0" dirty="0">
-                  <a:solidFill>
-                    <a:srgbClr val="FF0000"/>
-                  </a:solidFill>
-                </a:endParaRPr>
-              </a:p>
-              <a:p>
-                <a:endParaRPr kumimoji="1" lang="en-US" altLang="ja-JP" sz="2400" dirty="0"/>
-              </a:p>
-              <a:p>
-                <a14:m>
-                  <m:oMath xmlns:m="http://schemas.openxmlformats.org/officeDocument/2006/math">
-                    <m:r>
-                      <a:rPr kumimoji="1" lang="en-US" altLang="ja-JP" sz="2400" b="0" i="1" smtClean="0">
-                        <a:latin typeface="Cambria Math" panose="02040503050406030204" pitchFamily="18" charset="0"/>
-                      </a:rPr>
-                      <m:t>𝑅</m:t>
-                    </m:r>
-                  </m:oMath>
-                </a14:m>
-                <a:r>
-                  <a:rPr kumimoji="1" lang="ja-JP" altLang="en-US" sz="2400" dirty="0"/>
-                  <a:t>・・・反射ベクトル</a:t>
-                </a:r>
-                <a:endParaRPr kumimoji="1" lang="en-US" altLang="ja-JP" sz="2400" dirty="0"/>
-              </a:p>
-              <a:p>
-                <a14:m>
-                  <m:oMath xmlns:m="http://schemas.openxmlformats.org/officeDocument/2006/math">
-                    <m:r>
-                      <a:rPr kumimoji="1" lang="en-US" altLang="ja-JP" sz="2400" b="0" i="1" smtClean="0">
-                        <a:latin typeface="Cambria Math" panose="02040503050406030204" pitchFamily="18" charset="0"/>
-                      </a:rPr>
-                      <m:t>𝐹</m:t>
-                    </m:r>
-                  </m:oMath>
-                </a14:m>
-                <a:r>
-                  <a:rPr kumimoji="1" lang="ja-JP" altLang="en-US" sz="2400" dirty="0"/>
-                  <a:t>・・・入射ベクトル</a:t>
-                </a:r>
-                <a:endParaRPr kumimoji="1" lang="en-US" altLang="ja-JP" sz="2400" dirty="0"/>
-              </a:p>
-              <a:p>
-                <a14:m>
-                  <m:oMath xmlns:m="http://schemas.openxmlformats.org/officeDocument/2006/math">
-                    <m:r>
-                      <a:rPr kumimoji="1" lang="en-US" altLang="ja-JP" sz="2400" b="0" i="1" smtClean="0">
-                        <a:latin typeface="Cambria Math" panose="02040503050406030204" pitchFamily="18" charset="0"/>
-                      </a:rPr>
-                      <m:t>𝑁</m:t>
-                    </m:r>
-                  </m:oMath>
-                </a14:m>
-                <a:r>
-                  <a:rPr kumimoji="1" lang="ja-JP" altLang="en-US" sz="2400" dirty="0"/>
-                  <a:t>・・・法線ベクトル</a:t>
-                </a:r>
-                <a:endParaRPr kumimoji="1" lang="en-US" altLang="ja-JP" sz="2400" dirty="0"/>
-              </a:p>
-            </p:txBody>
-          </p:sp>
-        </mc:Choice>
-        <mc:Fallback xmlns="">
-          <p:sp>
-            <p:nvSpPr>
-              <p:cNvPr id="15" name="テキスト ボックス 14">
-                <a:extLst>
-                  <a:ext uri="{FF2B5EF4-FFF2-40B4-BE49-F238E27FC236}">
-                    <a16:creationId xmlns:a16="http://schemas.microsoft.com/office/drawing/2014/main" id="{F5AF3D5F-B2A0-4D9F-9861-18619BE2D63A}"/>
-                  </a:ext>
-                </a:extLst>
-              </p:cNvPr>
-              <p:cNvSpPr txBox="1">
-                <a:spLocks noRot="1" noChangeAspect="1" noMove="1" noResize="1" noEditPoints="1" noAdjustHandles="1" noChangeArrowheads="1" noChangeShapeType="1" noTextEdit="1"/>
-              </p:cNvSpPr>
-              <p:nvPr/>
-            </p:nvSpPr>
-            <p:spPr>
-              <a:xfrm>
-                <a:off x="6708365" y="2963915"/>
-                <a:ext cx="4493538" cy="2677656"/>
-              </a:xfrm>
-              <a:prstGeom prst="rect">
-                <a:avLst/>
-              </a:prstGeom>
-              <a:blipFill>
-                <a:blip r:embed="rId2"/>
-                <a:stretch>
-                  <a:fillRect l="-2033" t="-1822" r="-1084" b="-4328"/>
-                </a:stretch>
-              </a:blipFill>
-            </p:spPr>
-            <p:txBody>
-              <a:bodyPr/>
-              <a:lstStyle/>
-              <a:p>
-                <a:r>
-                  <a:rPr lang="ja-JP" altLang="en-US">
-                    <a:noFill/>
-                  </a:rPr>
-                  <a:t> </a:t>
-                </a:r>
-              </a:p>
-            </p:txBody>
-          </p:sp>
-        </mc:Fallback>
-      </mc:AlternateContent>
-      <p:sp>
-        <p:nvSpPr>
-          <p:cNvPr id="16" name="テキスト ボックス 15">
-            <a:extLst>
-              <a:ext uri="{FF2B5EF4-FFF2-40B4-BE49-F238E27FC236}">
-                <a16:creationId xmlns:a16="http://schemas.microsoft.com/office/drawing/2014/main" id="{428B2065-5043-4B8A-A53E-AC72010C7DDD}"/>
-              </a:ext>
-            </a:extLst>
-          </p:cNvPr>
-          <p:cNvSpPr txBox="1"/>
-          <p:nvPr/>
-        </p:nvSpPr>
-        <p:spPr>
-          <a:xfrm>
-            <a:off x="3371626" y="4855009"/>
-            <a:ext cx="2031325" cy="461665"/>
-          </a:xfrm>
-          <a:prstGeom prst="rect">
-            <a:avLst/>
-          </a:prstGeom>
-          <a:noFill/>
-        </p:spPr>
-        <p:txBody>
-          <a:bodyPr wrap="none" rtlCol="0">
-            <a:spAutoFit/>
-          </a:bodyPr>
-          <a:lstStyle/>
-          <a:p>
-            <a:r>
-              <a:rPr lang="ja-JP" altLang="en-US" sz="2400" b="1" dirty="0">
-                <a:solidFill>
-                  <a:srgbClr val="FF0000"/>
-                </a:solidFill>
-              </a:rPr>
-              <a:t>反射ベクトル</a:t>
-            </a:r>
-            <a:endParaRPr kumimoji="1" lang="en-US" altLang="ja-JP" sz="2400" dirty="0"/>
+              <a:t>処理落ち</a:t>
+            </a:r>
+            <a:r>
+              <a:rPr lang="ja-JP" altLang="en-US" sz="2400" dirty="0"/>
+              <a:t>が発生してゲームに影響が出てしまいます。</a:t>
+            </a:r>
+            <a:endParaRPr lang="en-US" altLang="ja-JP" sz="2400" dirty="0"/>
+          </a:p>
+          <a:p>
+            <a:endParaRPr lang="en-US" altLang="ja-JP" sz="2400" dirty="0"/>
+          </a:p>
+          <a:p>
+            <a:r>
+              <a:rPr lang="en-US" altLang="ja-JP" sz="2400" dirty="0"/>
+              <a:t>※</a:t>
+            </a:r>
+            <a:r>
+              <a:rPr lang="ja-JP" altLang="en-US" sz="2400" dirty="0"/>
+              <a:t>処理落ちとは、プログラムの処理が多すぎてゲームの速度が落ちることです。</a:t>
+            </a:r>
+            <a:endParaRPr lang="en-US" altLang="ja-JP" sz="2400" dirty="0"/>
+          </a:p>
+          <a:p>
+            <a:r>
+              <a:rPr lang="ja-JP" altLang="en-US" sz="2400" dirty="0"/>
+              <a:t>　昔のゲームではよく発生してました。</a:t>
+            </a:r>
+            <a:endParaRPr lang="en-US" altLang="ja-JP" sz="2400" dirty="0"/>
           </a:p>
         </p:txBody>
       </p:sp>
     </p:spTree>
     <p:extLst>
       <p:ext uri="{BB962C8B-B14F-4D97-AF65-F5344CB8AC3E}">
-        <p14:creationId xmlns:p14="http://schemas.microsoft.com/office/powerpoint/2010/main" val="3635082977"/>
+        <p14:creationId xmlns:p14="http://schemas.microsoft.com/office/powerpoint/2010/main" val="2409967761"/>
       </p:ext>
     </p:extLst>
   </p:cSld>
@@ -7422,7 +6137,7 @@
         <p:spPr>
           <a:xfrm>
             <a:off x="567542" y="491954"/>
-            <a:ext cx="2646878" cy="584775"/>
+            <a:ext cx="4815742" cy="584775"/>
           </a:xfrm>
           <a:prstGeom prst="rect">
             <a:avLst/>
@@ -7436,12 +6151,8 @@
           <a:lstStyle/>
           <a:p>
             <a:r>
-              <a:rPr lang="ja-JP" altLang="en-US" sz="3200" b="1" u="sng" dirty="0"/>
-              <a:t>反射</a:t>
-            </a:r>
-            <a:r>
               <a:rPr kumimoji="1" lang="ja-JP" altLang="en-US" sz="3200" b="1" u="sng" dirty="0"/>
-              <a:t>ベクトル</a:t>
+              <a:t>当たり判定解説 負荷軽減</a:t>
             </a:r>
           </a:p>
         </p:txBody>
@@ -7461,7 +6172,7 @@
         <p:spPr>
           <a:xfrm>
             <a:off x="567542" y="1216429"/>
-            <a:ext cx="10046340" cy="461665"/>
+            <a:ext cx="11094704" cy="1200329"/>
           </a:xfrm>
           <a:prstGeom prst="rect">
             <a:avLst/>
@@ -7475,39 +6186,61 @@
           <a:lstStyle/>
           <a:p>
             <a:r>
-              <a:rPr kumimoji="1" lang="ja-JP" altLang="en-US" sz="2400" dirty="0"/>
-              <a:t>以上を踏まえて、</a:t>
-            </a:r>
-            <a:r>
-              <a:rPr kumimoji="1" lang="en-US" altLang="ja-JP" sz="2400" dirty="0"/>
-              <a:t>MyMath.cpp</a:t>
-            </a:r>
-            <a:r>
-              <a:rPr kumimoji="1" lang="ja-JP" altLang="en-US" sz="2400" dirty="0"/>
-              <a:t>の</a:t>
-            </a:r>
-            <a:r>
-              <a:rPr kumimoji="1" lang="en-US" altLang="ja-JP" sz="2400" b="1" dirty="0" err="1">
+              <a:rPr lang="ja-JP" altLang="en-US" sz="2400" dirty="0"/>
+              <a:t>サンプルでは、</a:t>
+            </a:r>
+            <a:r>
+              <a:rPr lang="en-US" altLang="ja-JP" sz="2400" b="1" dirty="0">
                 <a:solidFill>
-                  <a:srgbClr val="0070C0"/>
+                  <a:srgbClr val="FF0000"/>
                 </a:solidFill>
               </a:rPr>
-              <a:t>VecReflact</a:t>
-            </a:r>
-            <a:r>
-              <a:rPr kumimoji="1" lang="ja-JP" altLang="en-US" sz="2400" dirty="0"/>
-              <a:t>関数を完成させましょう。</a:t>
-            </a:r>
-            <a:endParaRPr kumimoji="1" lang="en-US" altLang="ja-JP" sz="2400" dirty="0"/>
+              <a:t>Body</a:t>
+            </a:r>
+            <a:r>
+              <a:rPr lang="ja-JP" altLang="en-US" sz="2400" b="1" dirty="0">
+                <a:solidFill>
+                  <a:srgbClr val="FF0000"/>
+                </a:solidFill>
+              </a:rPr>
+              <a:t>の周囲にあるマップチップとしか当たり判定をしません。</a:t>
+            </a:r>
+            <a:endParaRPr lang="en-US" altLang="ja-JP" sz="2400" b="1" dirty="0">
+              <a:solidFill>
+                <a:srgbClr val="FF0000"/>
+              </a:solidFill>
+            </a:endParaRPr>
+          </a:p>
+          <a:p>
+            <a:r>
+              <a:rPr lang="ja-JP" altLang="en-US" sz="2400" dirty="0"/>
+              <a:t>これによりどれだけステージを広げても、</a:t>
+            </a:r>
+            <a:endParaRPr lang="en-US" altLang="ja-JP" sz="2400" dirty="0"/>
+          </a:p>
+          <a:p>
+            <a:r>
+              <a:rPr lang="ja-JP" altLang="en-US" sz="2400" b="1" dirty="0">
+                <a:solidFill>
+                  <a:srgbClr val="FF0000"/>
+                </a:solidFill>
+              </a:rPr>
+              <a:t>当たり判定処理の最大量が保証されます。</a:t>
+            </a:r>
+            <a:endParaRPr lang="en-US" altLang="ja-JP" sz="2400" b="1" dirty="0">
+              <a:solidFill>
+                <a:srgbClr val="FF0000"/>
+              </a:solidFill>
+            </a:endParaRPr>
           </a:p>
         </p:txBody>
       </p:sp>
       <p:pic>
         <p:nvPicPr>
-          <p:cNvPr id="3" name="図 2">
-            <a:extLst>
-              <a:ext uri="{FF2B5EF4-FFF2-40B4-BE49-F238E27FC236}">
-                <a16:creationId xmlns:a16="http://schemas.microsoft.com/office/drawing/2014/main" id="{F01440EE-E534-4BBB-81EB-4DBFB26C543D}"/>
+          <p:cNvPr id="8" name="図 7">
+            <a:extLst>
+              <a:ext uri="{FF2B5EF4-FFF2-40B4-BE49-F238E27FC236}">
+                <a16:creationId xmlns:a16="http://schemas.microsoft.com/office/drawing/2014/main" id="{EF6B5015-3630-4D6A-9EF5-6ECECF96479B}"/>
               </a:ext>
             </a:extLst>
           </p:cNvPr>
@@ -7524,18 +6257,115 @@
         </p:blipFill>
         <p:spPr>
           <a:xfrm>
-            <a:off x="567541" y="1817794"/>
-            <a:ext cx="9748575" cy="4018230"/>
+            <a:off x="580967" y="2556458"/>
+            <a:ext cx="6745701" cy="3924465"/>
           </a:xfrm>
           <a:prstGeom prst="rect">
             <a:avLst/>
           </a:prstGeom>
         </p:spPr>
       </p:pic>
+      <p:sp>
+        <p:nvSpPr>
+          <p:cNvPr id="9" name="正方形/長方形 8">
+            <a:extLst>
+              <a:ext uri="{FF2B5EF4-FFF2-40B4-BE49-F238E27FC236}">
+                <a16:creationId xmlns:a16="http://schemas.microsoft.com/office/drawing/2014/main" id="{9FE1256B-CE51-49FE-8EE9-251320EB405A}"/>
+              </a:ext>
+            </a:extLst>
+          </p:cNvPr>
+          <p:cNvSpPr/>
+          <p:nvPr/>
+        </p:nvSpPr>
+        <p:spPr>
+          <a:xfrm>
+            <a:off x="115672" y="3785877"/>
+            <a:ext cx="2859741" cy="1855694"/>
+          </a:xfrm>
+          <a:prstGeom prst="rect">
+            <a:avLst/>
+          </a:prstGeom>
+          <a:noFill/>
+          <a:ln w="38100">
+            <a:solidFill>
+              <a:srgbClr val="FF0000"/>
+            </a:solidFill>
+          </a:ln>
+        </p:spPr>
+        <p:style>
+          <a:lnRef idx="2">
+            <a:schemeClr val="accent1">
+              <a:shade val="50000"/>
+            </a:schemeClr>
+          </a:lnRef>
+          <a:fillRef idx="1">
+            <a:schemeClr val="accent1"/>
+          </a:fillRef>
+          <a:effectRef idx="0">
+            <a:schemeClr val="accent1"/>
+          </a:effectRef>
+          <a:fontRef idx="minor">
+            <a:schemeClr val="lt1"/>
+          </a:fontRef>
+        </p:style>
+        <p:txBody>
+          <a:bodyPr rtlCol="0" anchor="ctr"/>
+          <a:lstStyle/>
+          <a:p>
+            <a:pPr algn="ctr"/>
+            <a:endParaRPr kumimoji="1" lang="ja-JP" altLang="en-US"/>
+          </a:p>
+        </p:txBody>
+      </p:sp>
+      <p:sp>
+        <p:nvSpPr>
+          <p:cNvPr id="10" name="テキスト ボックス 9">
+            <a:extLst>
+              <a:ext uri="{FF2B5EF4-FFF2-40B4-BE49-F238E27FC236}">
+                <a16:creationId xmlns:a16="http://schemas.microsoft.com/office/drawing/2014/main" id="{3CF74CB4-83C9-4905-890A-2BAE97AD1EF2}"/>
+              </a:ext>
+            </a:extLst>
+          </p:cNvPr>
+          <p:cNvSpPr txBox="1"/>
+          <p:nvPr/>
+        </p:nvSpPr>
+        <p:spPr>
+          <a:xfrm>
+            <a:off x="2010142" y="5781271"/>
+            <a:ext cx="4570482" cy="646331"/>
+          </a:xfrm>
+          <a:prstGeom prst="rect">
+            <a:avLst/>
+          </a:prstGeom>
+          <a:solidFill>
+            <a:schemeClr val="bg1"/>
+          </a:solidFill>
+        </p:spPr>
+        <p:txBody>
+          <a:bodyPr wrap="none" rtlCol="0">
+            <a:spAutoFit/>
+          </a:bodyPr>
+          <a:lstStyle/>
+          <a:p>
+            <a:r>
+              <a:rPr lang="ja-JP" altLang="en-US" dirty="0"/>
+              <a:t>実際はこの範囲しか判定してない。</a:t>
+            </a:r>
+            <a:endParaRPr lang="en-US" altLang="ja-JP" dirty="0"/>
+          </a:p>
+          <a:p>
+            <a:r>
+              <a:rPr lang="ja-JP" altLang="en-US" dirty="0"/>
+              <a:t>つまりこれ以上多くの判定は行われない。</a:t>
+            </a:r>
+            <a:endParaRPr lang="en-US" altLang="ja-JP" dirty="0"/>
+          </a:p>
+        </p:txBody>
+      </p:sp>
     </p:spTree>
     <p:extLst>
       <p:ext uri="{BB962C8B-B14F-4D97-AF65-F5344CB8AC3E}">
-        <p14:creationId xmlns:p14="http://schemas.microsoft.com/office/powerpoint/2010/main" val="1064728255"/>
+        <p14:creationId xmlns:p14="http://schemas.microsoft.com/office/powerpoint/2010/main" val="3636641933"/>
       </p:ext>
     </p:extLst>
   </p:cSld>
